--- a/docs/TCA-Vibe-Coding.pptx
+++ b/docs/TCA-Vibe-Coding.pptx
@@ -5,26 +5,25 @@
     <p:sldMasterId id="2147483648" r:id="rId1"/>
   </p:sldMasterIdLst>
   <p:notesMasterIdLst>
-    <p:notesMasterId r:id="rId19"/>
+    <p:notesMasterId r:id="rId18"/>
   </p:notesMasterIdLst>
   <p:sldIdLst>
     <p:sldId id="256" r:id="rId2"/>
-    <p:sldId id="257" r:id="rId3"/>
-    <p:sldId id="258" r:id="rId4"/>
-    <p:sldId id="259" r:id="rId5"/>
-    <p:sldId id="260" r:id="rId6"/>
-    <p:sldId id="261" r:id="rId7"/>
-    <p:sldId id="262" r:id="rId8"/>
-    <p:sldId id="263" r:id="rId9"/>
-    <p:sldId id="264" r:id="rId10"/>
-    <p:sldId id="265" r:id="rId11"/>
-    <p:sldId id="266" r:id="rId12"/>
-    <p:sldId id="267" r:id="rId13"/>
-    <p:sldId id="268" r:id="rId14"/>
-    <p:sldId id="269" r:id="rId15"/>
-    <p:sldId id="270" r:id="rId16"/>
-    <p:sldId id="271" r:id="rId17"/>
-    <p:sldId id="272" r:id="rId18"/>
+    <p:sldId id="258" r:id="rId3"/>
+    <p:sldId id="259" r:id="rId4"/>
+    <p:sldId id="260" r:id="rId5"/>
+    <p:sldId id="261" r:id="rId6"/>
+    <p:sldId id="262" r:id="rId7"/>
+    <p:sldId id="263" r:id="rId8"/>
+    <p:sldId id="264" r:id="rId9"/>
+    <p:sldId id="265" r:id="rId10"/>
+    <p:sldId id="266" r:id="rId11"/>
+    <p:sldId id="267" r:id="rId12"/>
+    <p:sldId id="268" r:id="rId13"/>
+    <p:sldId id="269" r:id="rId14"/>
+    <p:sldId id="270" r:id="rId15"/>
+    <p:sldId id="271" r:id="rId16"/>
+    <p:sldId id="272" r:id="rId17"/>
   </p:sldIdLst>
   <p:sldSz cx="9144000" cy="5143500" type="screen16x9"/>
   <p:notesSz cx="5143500" cy="9144000"/>
@@ -389,11 +388,11 @@
           <a:p>
             <a:r>
               <a:rPr lang="en-US" dirty="0"/>
-              <a:t>SKILL #3 (2:30). "The cockpit" - not the whole plane, just the dials a pilot actually watches. Lean on the top three (context); move fast on the rest.
-/context (Claude) or /status (Codex): shows what it's holding in its head right now. Context is finite. When answers drift, check this first.
-@path: pins an exact file so it stops guessing which file you mean. Keeps context lean. Identical in both tools.
-/compact: summarise and trim a bloated conversation. /clear or fresh session: wipe the slate for an unrelated task so old context doesn't leak.
-Reassurance: you don't memorise this, you just reach for the dials when it goes vague. That's the difference between flying the tool and being flown by it.</a:t>
+              <a:t>CONTEXT (2:00). Metaphor: context is fuel, with a gauge. Three states.
+Too little: not told enough, so it guesses - wrong file, invented convention, confident nonsense. Fix by pinning with @ and stating the goal.
+Just right: the files that matter are pinned, the task is in view, nothing extra. Live here.
+Too much: long rambling session, old unrelated stuff still in the window, slow and leaking into answers. Fix with /compact, or /clear and start fresh.
+Tie back: the cockpit commands keep the gauge in the green. When an answer goes vague or off-topic, 90% of the time it's context, not intelligence.</a:t>
             </a:r>
           </a:p>
         </p:txBody>
@@ -480,11 +479,10 @@
           <a:p>
             <a:r>
               <a:rPr lang="en-US" dirty="0"/>
-              <a:t>CONTEXT (2:00). Metaphor: context is fuel, with a gauge. Three states.
-Too little: not told enough, so it guesses - wrong file, invented convention, confident nonsense. Fix by pinning with @ and stating the goal.
-Just right: the files that matter are pinned, the task is in view, nothing extra. Live here.
-Too much: long rambling session, old unrelated stuff still in the window, slow and leaking into answers. Fix with /compact, or /clear and start fresh.
-Tie back: the cockpit commands keep the gauge in the green. When an answer goes vague or off-topic, 90% of the time it's context, not intelligence.</a:t>
+              <a:t>SKILL #4 (2:00). Set expectations: it WILL break. The first build won't be perfect. Normal, not failure.
+Wrong instinct (left): open the file, read the trace, start fixing. Two problems - you grabbed the keyboard, and the agent's mental model is now stale because you changed things behind its back. You made it worse.
+Right move (right): treat it like a colleague on a call who can't see your screen. Paste the exact error. Describe the behaviour: "streak shows 3, ticked it, still 3." Describe what you SAW, not what to CHANGE. The moment you say "change line 40" you're micromanaging again.
+You are the eyes; it is the hands. Report what the eyes see.</a:t>
             </a:r>
           </a:p>
         </p:txBody>
@@ -571,10 +569,8 @@
           <a:p>
             <a:r>
               <a:rPr lang="en-US" dirty="0"/>
-              <a:t>SKILL #4 (2:00). Set expectations: it WILL break. The first build won't be perfect. Normal, not failure.
-Wrong instinct (left): open the file, read the trace, start fixing. Two problems - you grabbed the keyboard, and the agent's mental model is now stale because you changed things behind its back. You made it worse.
-Right move (right): treat it like a colleague on a call who can't see your screen. Paste the exact error. Describe the behaviour: "streak shows 3, ticked it, still 3." Describe what you SAW, not what to CHANGE. The moment you say "change line 40" you're micromanaging again.
-You are the eyes; it is the hands. Report what the eyes see.</a:t>
+              <a:t>SKILL #5 (1:00). Fast. You never touched git by hand - you asked, the agent did it. "You just shipped without writing a line."
+Two nets, name both - they'll rely on them in the lab. Small commits = personal undo; a bad turn is one revert away, so you can be brave. Checkpoints = OUR net for the day (known-good tags). Fall behind or make a mess, reset and rejoin. Say it clearly: reaching for a checkpoint is expected and fine. Nobody gets stranded.</a:t>
             </a:r>
           </a:p>
         </p:txBody>
@@ -661,8 +657,11 @@
           <a:p>
             <a:r>
               <a:rPr lang="en-US" dirty="0"/>
-              <a:t>SKILL #5 (1:00). Fast. You never touched git by hand - you asked, the agent did it. "You just shipped without writing a line."
-Two nets, name both - they'll rely on them in the lab. Small commits = personal undo; a bad turn is one revert away, so you can be brave. Checkpoints = OUR net for the day (known-good tags). Fall behind or make a mess, reset and rejoin. Say it clearly: reaching for a checkpoint is expected and fine. Nobody gets stranded.</a:t>
+              <a:t>WHAT CHANGED (2:30). Zoom out - the VP-in-the-room slide, and for anyone who's been away: here's how the ground shifted.
+PLANNING - just covered: from "make it plan, check the steps" to "it plans fine, check it understood the right problem." Anchor, don't re-teach.
+CONTEXT - a year ago windows were small and you pruned constantly to stop it forgetting. Now windows are repo-scale and memory persists. But that made context ENGINEERING the discipline, not an afterthought. Most agent failures in the field now trace to context drift and stale memory, not the model being dim. (If asked for a number: industry write-ups put the majority of enterprise agent failures on context, not capability - directional, not gospel.)
+AGENTS - a year ago it was you and one chat. Now both tools run teams: Codex spins up parallel subagents; Claude Code runs Agent Teams sharing a task list and messaging each other. That's your Section 3 this afternoon - plant it.
+Close line - the through-thread of the whole day: the mechanical part got automated, so the human skill moved UP - intent, context, verification. Same reason the returning engineer isn't behind.</a:t>
             </a:r>
           </a:p>
         </p:txBody>
@@ -749,11 +748,10 @@
           <a:p>
             <a:r>
               <a:rPr lang="en-US" dirty="0"/>
-              <a:t>WHAT CHANGED (2:30). Zoom out - the VP-in-the-room slide, and for anyone who's been away: here's how the ground shifted.
-PLANNING - just covered: from "make it plan, check the steps" to "it plans fine, check it understood the right problem." Anchor, don't re-teach.
-CONTEXT - a year ago windows were small and you pruned constantly to stop it forgetting. Now windows are repo-scale and memory persists. But that made context ENGINEERING the discipline, not an afterthought. Most agent failures in the field now trace to context drift and stale memory, not the model being dim. (If asked for a number: industry write-ups put the majority of enterprise agent failures on context, not capability - directional, not gospel.)
-AGENTS - a year ago it was you and one chat. Now both tools run teams: Codex spins up parallel subagents; Claude Code runs Agent Teams sharing a task list and messaging each other. That's your Section 3 this afternoon - plant it.
-Close line - the through-thread of the whole day: the mechanical part got automated, so the human skill moved UP - intent, context, verification. Same reason the returning engineer isn't behind.</a:t>
+              <a:t>TAKEAWAYS (1:30). Mirror of slide 2, now as outcomes.
+Rusty: the win is confidence. You'll feel the loop, the tools stop being scary, and you'll rediscover that your judgement is the valuable part.
+Confident: the win is restraint. You'll feel the tension of directing, catch your keyboard reflex, and - the surprise - get further by doing less.
+Lab reflection prompts: "Where did you reach for the keyboard, and what happened when you didn't?" "Where did you accept output without reading it - what risk did you take?"</a:t>
             </a:r>
           </a:p>
         </p:txBody>
@@ -840,10 +838,9 @@
           <a:p>
             <a:r>
               <a:rPr lang="en-US" dirty="0"/>
-              <a:t>TAKEAWAYS (1:30). Mirror of slide 2, now as outcomes.
-Rusty: the win is confidence. You'll feel the loop, the tools stop being scary, and you'll rediscover that your judgement is the valuable part.
-Confident: the win is restraint. You'll feel the tension of directing, catch your keyboard reflex, and - the surprise - get further by doing less.
-Lab reflection prompts: "Where did you reach for the keyboard, and what happened when you didn't?" "Where did you accept output without reading it - what risk did you take?"</a:t>
+              <a:t>GOLDEN RULES (1:30). Leave this up while they open terminals. Read briskly - they've heard them all.
+1 Resist the keyboard. 2 Prompt by outcome. 3 Plan review not writing. 4 Report symptoms. 5 Commit small, use checkpoints.
+Then bridge to the close.</a:t>
             </a:r>
           </a:p>
         </p:txBody>
@@ -928,12 +925,7 @@
           <a:bodyPr/>
           <a:lstStyle/>
           <a:p>
-            <a:r>
-              <a:rPr lang="en-US" dirty="0"/>
-              <a:t>GOLDEN RULES (1:30). Leave this up while they open terminals. Read briskly - they've heard them all.
-1 Resist the keyboard. 2 Prompt by outcome. 3 Plan review not writing. 4 Report symptoms. 5 Commit small, use checkpoints.
-Then bridge to the close.</a:t>
-            </a:r>
+            <a:endParaRPr lang="en-US" dirty="0"/>
           </a:p>
         </p:txBody>
       </p:sp>
@@ -955,95 +947,6 @@
             <a:fld id="{F7021451-1387-4CA6-816F-3879F97B5CBC}" type="slidenum">
               <a:rPr lang="en-US"/>
               <a:t>16</a:t>
-            </a:fld>
-            <a:endParaRPr lang="en-US"/>
-          </a:p>
-        </p:txBody>
-      </p:sp>
-    </p:spTree>
-    <p:extLst>
-      <p:ext uri="{BB962C8B-B14F-4D97-AF65-F5344CB8AC3E}">
-        <p14:creationId xmlns:p14="http://schemas.microsoft.com/office/powerpoint/2010/main" val="1024086991"/>
-      </p:ext>
-    </p:extLst>
-  </p:cSld>
-  <p:clrMapOvr>
-    <a:masterClrMapping/>
-  </p:clrMapOvr>
-</p:notes>
-</file>
-
-<file path=ppt/notesSlides/notesSlide17.xml><?xml version="1.0" encoding="utf-8"?>
-<p:notes xmlns:a="http://schemas.openxmlformats.org/drawingml/2006/main" xmlns:r="http://schemas.openxmlformats.org/officeDocument/2006/relationships" xmlns:p="http://schemas.openxmlformats.org/presentationml/2006/main">
-  <p:cSld>
-    <p:spTree>
-      <p:nvGrpSpPr>
-        <p:cNvPr id="1" name=""/>
-        <p:cNvGrpSpPr/>
-        <p:nvPr/>
-      </p:nvGrpSpPr>
-      <p:grpSpPr>
-        <a:xfrm>
-          <a:off x="0" y="0"/>
-          <a:ext cx="0" cy="0"/>
-          <a:chOff x="0" y="0"/>
-          <a:chExt cx="0" cy="0"/>
-        </a:xfrm>
-      </p:grpSpPr>
-      <p:sp>
-        <p:nvSpPr>
-          <p:cNvPr id="2" name="Slide Image Placeholder 1"/>
-          <p:cNvSpPr>
-            <a:spLocks noGrp="1" noRot="1" noChangeAspect="1"/>
-          </p:cNvSpPr>
-          <p:nvPr>
-            <p:ph type="sldImg"/>
-          </p:nvPr>
-        </p:nvSpPr>
-        <p:spPr/>
-      </p:sp>
-      <p:sp>
-        <p:nvSpPr>
-          <p:cNvPr id="3" name="Notes Placeholder 2"/>
-          <p:cNvSpPr>
-            <a:spLocks noGrp="1"/>
-          </p:cNvSpPr>
-          <p:nvPr>
-            <p:ph type="body" idx="1"/>
-          </p:nvPr>
-        </p:nvSpPr>
-        <p:spPr/>
-        <p:txBody>
-          <a:bodyPr/>
-          <a:lstStyle/>
-          <a:p>
-            <a:r>
-              <a:rPr lang="en-US" dirty="0"/>
-              <a:t>CLOSE (1:00). Lift the energy: this morning is the easy, fun rung. By this afternoon you'll run a TEAM of agents that build and test for you. It all starts with the loop you just learned.
-Final line, warm and direct: "You're not behind. The typing got automated; the judgement didn't. Let's build." Hand to the lab - Block A: scaffold from an empty folder, one prompt, plan first.
-Total run ~29-30 min including buffer.</a:t>
-            </a:r>
-          </a:p>
-        </p:txBody>
-      </p:sp>
-      <p:sp>
-        <p:nvSpPr>
-          <p:cNvPr id="4" name="Slide Number Placeholder 3"/>
-          <p:cNvSpPr>
-            <a:spLocks noGrp="1"/>
-          </p:cNvSpPr>
-          <p:nvPr>
-            <p:ph type="sldNum" sz="quarter" idx="10"/>
-          </p:nvPr>
-        </p:nvSpPr>
-        <p:spPr/>
-        <p:txBody>
-          <a:bodyPr/>
-          <a:lstStyle/>
-          <a:p>
-            <a:fld id="{F7021451-1387-4CA6-816F-3879F97B5CBC}" type="slidenum">
-              <a:rPr lang="en-US"/>
-              <a:t>17</a:t>
             </a:fld>
             <a:endParaRPr lang="en-US"/>
           </a:p>
@@ -1108,10 +1011,8 @@
           <a:p>
             <a:r>
               <a:rPr lang="en-US" dirty="0"/>
-              <a:t>FRAMING (1:15). The honesty slide. Name the two halves of the room warmly.
-Rusty engineers: you are NOT behind. The part of the job that decayed - remembering syntax, hand-typing boilerplate - is exactly the part that got automated. Your judgement about what "good" looks like matters more now, not less.
-Confident engineers: fair warning, this is harder for you. Your speed is a habit to unlearn. Today the skill is directing, not doing.
-Land it: "Everyone here learns something new."</a:t>
+              <a:t>THE LADDER (1:15). Each rung removes a different crutch. Rung 1 (now): lean fully on the agent, ugly is fine. Rung 2: make it behave the same tomorrow. Rung 3: stop trusting it, build harnesses.
+The point of the day is the change in your RELATIONSHIP to the code, not the app. This morning: "you drive, I direct." Don't over-explain 2 and 3.</a:t>
             </a:r>
           </a:p>
         </p:txBody>
@@ -1198,8 +1099,8 @@
           <a:p>
             <a:r>
               <a:rPr lang="en-US" dirty="0"/>
-              <a:t>THE LADDER (1:15). Each rung removes a different crutch. Rung 1 (now): lean fully on the agent, ugly is fine. Rung 2: make it behave the same tomorrow. Rung 3: stop trusting it, build harnesses.
-The point of the day is the change in your RELATIONSHIP to the code, not the app. This morning: "you drive, I direct." Don't over-explain 2 and 3.</a:t>
+              <a:t>DEFINITION (1:15). Vibe coding = using the tool. That's the whole definition today.
+The mindset shift is the money line. Read both quotes aloud. Old question = implementation. New question = outcome. All day we push from "how" to "what". For the confident engineers this is the uncomfortable one - you're good at "how".</a:t>
             </a:r>
           </a:p>
         </p:txBody>
@@ -1286,8 +1187,10 @@
           <a:p>
             <a:r>
               <a:rPr lang="en-US" dirty="0"/>
-              <a:t>DEFINITION (1:15). Vibe coding = using the tool. That's the whole definition today.
-The mindset shift is the money line. Read both quotes aloud. Old question = implementation. New question = outcome. All day we push from "how" to "what". For the confident engineers this is the uncomfortable one - you're good at "how".</a:t>
+              <a:t>THE LOOP (2:45 - core slide). Walk left to right. 1 PROMPT you say what you want. 2 GENERATE it writes. 3 RUN it executes/tests. 4 OBSERVE you look at what actually happened. 5 REACT you respond, go again.
+Most important point: your work is 1, 4, 5 - prompt, observe, react. Steps 2 and 3 belong to the agent. Every time you grab the keyboard to do step 2, you break the loop.
+Second point: small turns. Don't ask for the whole app and disappear. Small loop, look, react.
+Ask the room: "Which step do people get wrong most?" (Answer: they skip OBSERVE - accept output without looking.)</a:t>
             </a:r>
           </a:p>
         </p:txBody>
@@ -1374,10 +1277,12 @@
           <a:p>
             <a:r>
               <a:rPr lang="en-US" dirty="0"/>
-              <a:t>THE LOOP (2:45 - core slide). Walk left to right. 1 PROMPT you say what you want. 2 GENERATE it writes. 3 RUN it executes/tests. 4 OBSERVE you look at what actually happened. 5 REACT you respond, go again.
-Most important point: your work is 1, 4, 5 - prompt, observe, react. Steps 2 and 3 belong to the agent. Every time you grab the keyboard to do step 2, you break the loop.
-Second point: small turns. Don't ask for the whole app and disappear. Small loop, look, react.
-Ask the room: "Which step do people get wrong most?" (Answer: they skip OBSERVE - accept output without looking.)</a:t>
+              <a:t>ANATOMY (2:00 - technical grounding). Vocabulary for the juniors, precise model for the seniors.
+CONTEXT WINDOW - the agent's short-term memory: your prompt, open files, the conversation, every command's output. Finite, and it fills up. Nearly every "it went stupid" moment is really "context is full or polluted." Remember this two slides on.
+TOOLS - it doesn't just emit text. It calls tools: read/write a file, run the shell, run tests, git, search, MCP servers. Tools make it an agent, not a chatbot.
+THE LOOP - pick a tool, run it, READ the result, decide, repeat. Same loop as before, machinery visible.
+PERMISSIONS - what it may do without asking. Both tools have approval modes: ask-every-time, ask-for-risky, or full-auto in a sandbox. The most important safety dial; most people never touch it.
+Say it: not autocomplete - it reasons, acts through tools, checks its own results.</a:t>
             </a:r>
           </a:p>
         </p:txBody>
@@ -1464,12 +1369,10 @@
           <a:p>
             <a:r>
               <a:rPr lang="en-US" dirty="0"/>
-              <a:t>ANATOMY (2:00 - technical grounding). Vocabulary for the juniors, precise model for the seniors.
-CONTEXT WINDOW - the agent's short-term memory: your prompt, open files, the conversation, every command's output. Finite, and it fills up. Nearly every "it went stupid" moment is really "context is full or polluted." Remember this two slides on.
-TOOLS - it doesn't just emit text. It calls tools: read/write a file, run the shell, run tests, git, search, MCP servers. Tools make it an agent, not a chatbot.
-THE LOOP - pick a tool, run it, READ the result, decide, repeat. Same loop as before, machinery visible.
-PERMISSIONS - what it may do without asking. Both tools have approval modes: ask-every-time, ask-for-risky, or full-auto in a sandbox. The most important safety dial; most people never touch it.
-Say it: not autocomplete - it reasons, acts through tools, checks its own results.</a:t>
+              <a:t>THE RULE (1:45). Slow down - emotional anchor of the session. Say it plainly, let it sit: "Resist the keyboard."
+Every workshop someone opens the file and hand-edits the moment the agent stumbles. It feels productive; it's the habit we're breaking. The struggle of NOT touching it is the lesson.
+Reframe the twitch: the urge to fix it means you know what's wrong - so say what's wrong in a prompt. You still use your expertise, just in words not keystrokes.
+Lab note: we don't help for the first three minutes of any block. Same principle.</a:t>
             </a:r>
           </a:p>
         </p:txBody>
@@ -1556,10 +1459,10 @@
           <a:p>
             <a:r>
               <a:rPr lang="en-US" dirty="0"/>
-              <a:t>THE RULE (1:45). Slow down - emotional anchor of the session. Say it plainly, let it sit: "Resist the keyboard."
-Every workshop someone opens the file and hand-edits the moment the agent stumbles. It feels productive; it's the habit we're breaking. The struggle of NOT touching it is the lesson.
-Reframe the twitch: the urge to fix it means you know what's wrong - so say what's wrong in a prompt. You still use your expertise, just in words not keystrokes.
-Lab note: we don't help for the first three minutes of any block. Same principle.</a:t>
+              <a:t>SKILL #1 (2:30). Read the left box in a tedious voice - feel how exhausting it is. That's hand-coding through a straw: you did the thinking AND you carry the risk of being wrong.
+Right box: two changes - OUTCOME (streak grows, miss resets) plus a CONSTRAINT ("show me a plan first"). You never named a file or said "how". The agent can choose a better implementation than you'd type.
+The tell you're doing it right: the same prompt works verbatim in Claude Code or Codex. Implementation-free prompts are portable.
+Seniors: you often DO know the best implementation - bank it for OBSERVE and REACT, don't type it. This is the habit they take back to work Monday.</a:t>
             </a:r>
           </a:p>
         </p:txBody>
@@ -1646,10 +1549,12 @@
           <a:p>
             <a:r>
               <a:rPr lang="en-US" dirty="0"/>
-              <a:t>SKILL #1 (2:30). Read the left box in a tedious voice - feel how exhausting it is. That's hand-coding through a straw: you did the thinking AND you carry the risk of being wrong.
-Right box: two changes - OUTCOME (streak grows, miss resets) plus a CONSTRAINT ("show me a plan first"). You never named a file or said "how". The agent can choose a better implementation than you'd type.
-The tell you're doing it right: the same prompt works verbatim in Claude Code or Codex. Implementation-free prompts are portable.
-Seniors: you often DO know the best implementation - bank it for OBSERVE and REACT, don't type it. This is the habit they take back to work Monday.</a:t>
+              <a:t>SKILL #2 (2:30). Lead with the "what changed" - half the room learned the old way.
+A year ago, plan mode was about MECHANICS: you forced a plan because left alone it charged in and made a mess, and you read for dumb structural mistakes. 2025 models genuinely planned clumsily.
+That's mostly over. Modern agents decompose and sequence well. If you're still checking whether it put the loop in the right file, you're auditing a problem it rarely has.
+The risk FLIPPED. The dangerous plan today isn't messy - it's clean, confident, and aimed at slightly the wrong target. A tidy plan for the wrong problem is more dangerous than an obviously bad one - it doesn't trip your alarm.
+So the review moved UP: read for INTENT and SCOPE. Did it get the real goal? Touching more than it should? What did it assume that I never said?
+Confident engineers: a good-looking plan lulls you. Rusty: good news - "is this even the right problem" is exactly your strength, and it's what matters most now. Keys unchanged.</a:t>
             </a:r>
           </a:p>
         </p:txBody>
@@ -1736,12 +1641,11 @@
           <a:p>
             <a:r>
               <a:rPr lang="en-US" dirty="0"/>
-              <a:t>SKILL #2 (2:30). Lead with the "what changed" - half the room learned the old way.
-A year ago, plan mode was about MECHANICS: you forced a plan because left alone it charged in and made a mess, and you read for dumb structural mistakes. 2025 models genuinely planned clumsily.
-That's mostly over. Modern agents decompose and sequence well. If you're still checking whether it put the loop in the right file, you're auditing a problem it rarely has.
-The risk FLIPPED. The dangerous plan today isn't messy - it's clean, confident, and aimed at slightly the wrong target. A tidy plan for the wrong problem is more dangerous than an obviously bad one - it doesn't trip your alarm.
-So the review moved UP: read for INTENT and SCOPE. Did it get the real goal? Touching more than it should? What did it assume that I never said?
-Confident engineers: a good-looking plan lulls you. Rusty: good news - "is this even the right problem" is exactly your strength, and it's what matters most now. Keys unchanged.</a:t>
+              <a:t>SKILL #3 (2:30). "The cockpit" - not the whole plane, just the dials a pilot actually watches. Lean on the top three (context); move fast on the rest.
+/context (Claude) or /status (Codex): shows what it's holding in its head right now. Context is finite. When answers drift, check this first.
+@path: pins an exact file so it stops guessing which file you mean. Keeps context lean. Identical in both tools.
+/compact: summarise and trim a bloated conversation. /clear or fresh session: wipe the slate for an unrelated task so old context doesn't leak.
+Reassurance: you don't memorise this, you just reach for the dials when it goes vague. That's the difference between flying the tool and being flown by it.</a:t>
             </a:r>
           </a:p>
         </p:txBody>
@@ -2482,873 +2386,6 @@
 
 <file path=ppt/slides/slide10.xml><?xml version="1.0" encoding="utf-8"?>
 <p:sld xmlns:a="http://schemas.openxmlformats.org/drawingml/2006/main" xmlns:r="http://schemas.openxmlformats.org/officeDocument/2006/relationships" xmlns:p="http://schemas.openxmlformats.org/presentationml/2006/main">
-  <p:cSld name="Slide 10">
-    <p:bg>
-      <p:bgPr>
-        <a:solidFill>
-          <a:srgbClr val="F5F3FF"/>
-        </a:solidFill>
-        <a:effectLst/>
-      </p:bgPr>
-    </p:bg>
-    <p:spTree>
-      <p:nvGrpSpPr>
-        <p:cNvPr id="1" name=""/>
-        <p:cNvGrpSpPr/>
-        <p:nvPr/>
-      </p:nvGrpSpPr>
-      <p:grpSpPr>
-        <a:xfrm>
-          <a:off x="0" y="0"/>
-          <a:ext cx="0" cy="0"/>
-          <a:chOff x="0" y="0"/>
-          <a:chExt cx="0" cy="0"/>
-        </a:xfrm>
-      </p:grpSpPr>
-      <p:sp>
-        <p:nvSpPr>
-          <p:cNvPr id="2" name="Text 0"/>
-          <p:cNvSpPr/>
-          <p:nvPr/>
-        </p:nvSpPr>
-        <p:spPr>
-          <a:xfrm>
-            <a:off x="457200" y="292608"/>
-            <a:ext cx="8229600" cy="566928"/>
-          </a:xfrm>
-          <a:prstGeom prst="rect">
-            <a:avLst/>
-          </a:prstGeom>
-          <a:noFill/>
-          <a:ln/>
-        </p:spPr>
-        <p:txBody>
-          <a:bodyPr wrap="square" rtlCol="0" anchor="ctr"/>
-          <a:lstStyle/>
-          <a:p>
-            <a:pPr marL="0" indent="0" algn="l">
-              <a:buNone/>
-            </a:pPr>
-            <a:r>
-              <a:rPr lang="en-US" sz="2700" b="1" kern="0" spc="100" dirty="0">
-                <a:solidFill>
-                  <a:srgbClr val="2D1155"/>
-                </a:solidFill>
-                <a:latin typeface="Arial Black" pitchFamily="34" charset="0"/>
-                <a:ea typeface="Arial Black" pitchFamily="34" charset="-122"/>
-                <a:cs typeface="Arial Black" pitchFamily="34" charset="-120"/>
-              </a:rPr>
-              <a:t>THE COCKPIT</a:t>
-            </a:r>
-            <a:endParaRPr lang="en-US" sz="2700" dirty="0"/>
-          </a:p>
-        </p:txBody>
-      </p:sp>
-      <p:sp>
-        <p:nvSpPr>
-          <p:cNvPr id="3" name="Text 1"/>
-          <p:cNvSpPr/>
-          <p:nvPr/>
-        </p:nvSpPr>
-        <p:spPr>
-          <a:xfrm>
-            <a:off x="475488" y="896112"/>
-            <a:ext cx="8229600" cy="329184"/>
-          </a:xfrm>
-          <a:prstGeom prst="rect">
-            <a:avLst/>
-          </a:prstGeom>
-          <a:noFill/>
-          <a:ln/>
-        </p:spPr>
-        <p:txBody>
-          <a:bodyPr wrap="square" rtlCol="0" anchor="ctr"/>
-          <a:lstStyle/>
-          <a:p>
-            <a:pPr marL="0" indent="0">
-              <a:buNone/>
-            </a:pPr>
-            <a:r>
-              <a:rPr lang="en-US" sz="1300" i="1" dirty="0">
-                <a:solidFill>
-                  <a:srgbClr val="6E6389"/>
-                </a:solidFill>
-                <a:latin typeface="Calibri" pitchFamily="34" charset="0"/>
-                <a:ea typeface="Calibri" pitchFamily="34" charset="-122"/>
-                <a:cs typeface="Calibri" pitchFamily="34" charset="-120"/>
-              </a:rPr>
-              <a:t>Skill #3 — the handful of commands that put you in control.</a:t>
-            </a:r>
-            <a:endParaRPr lang="en-US" sz="1300" dirty="0"/>
-          </a:p>
-        </p:txBody>
-      </p:sp>
-      <p:pic>
-        <p:nvPicPr>
-          <p:cNvPr id="4" name="Image 0" descr="logo_icon.jpeg"/>
-          <p:cNvPicPr>
-            <a:picLocks noChangeAspect="1"/>
-          </p:cNvPicPr>
-          <p:nvPr/>
-        </p:nvPicPr>
-        <p:blipFill>
-          <a:blip r:embed="rId3"/>
-          <a:stretch>
-            <a:fillRect/>
-          </a:stretch>
-        </p:blipFill>
-        <p:spPr>
-          <a:xfrm>
-            <a:off x="8366760" y="4526280"/>
-            <a:ext cx="411480" cy="411480"/>
-          </a:xfrm>
-          <a:prstGeom prst="ellipse">
-            <a:avLst/>
-          </a:prstGeom>
-        </p:spPr>
-      </p:pic>
-      <p:sp>
-        <p:nvSpPr>
-          <p:cNvPr id="5" name="Text 2"/>
-          <p:cNvSpPr/>
-          <p:nvPr/>
-        </p:nvSpPr>
-        <p:spPr>
-          <a:xfrm>
-            <a:off x="640080" y="1481328"/>
-            <a:ext cx="2926080" cy="274320"/>
-          </a:xfrm>
-          <a:prstGeom prst="rect">
-            <a:avLst/>
-          </a:prstGeom>
-          <a:noFill/>
-          <a:ln/>
-        </p:spPr>
-        <p:txBody>
-          <a:bodyPr wrap="square" rtlCol="0" anchor="ctr"/>
-          <a:lstStyle/>
-          <a:p>
-            <a:pPr marL="0" indent="0">
-              <a:buNone/>
-            </a:pPr>
-            <a:r>
-              <a:rPr lang="en-US" sz="1000" b="1" kern="0" spc="100" dirty="0">
-                <a:solidFill>
-                  <a:srgbClr val="6E6389"/>
-                </a:solidFill>
-                <a:latin typeface="Calibri" pitchFamily="34" charset="0"/>
-                <a:ea typeface="Calibri" pitchFamily="34" charset="-122"/>
-                <a:cs typeface="Calibri" pitchFamily="34" charset="-120"/>
-              </a:rPr>
-              <a:t>WHAT YOU WANT</a:t>
-            </a:r>
-            <a:endParaRPr lang="en-US" sz="1000" dirty="0"/>
-          </a:p>
-        </p:txBody>
-      </p:sp>
-      <p:sp>
-        <p:nvSpPr>
-          <p:cNvPr id="6" name="Text 3"/>
-          <p:cNvSpPr/>
-          <p:nvPr/>
-        </p:nvSpPr>
-        <p:spPr>
-          <a:xfrm>
-            <a:off x="3749040" y="1481328"/>
-            <a:ext cx="2468880" cy="274320"/>
-          </a:xfrm>
-          <a:prstGeom prst="rect">
-            <a:avLst/>
-          </a:prstGeom>
-          <a:noFill/>
-          <a:ln/>
-        </p:spPr>
-        <p:txBody>
-          <a:bodyPr wrap="square" rtlCol="0" anchor="ctr"/>
-          <a:lstStyle/>
-          <a:p>
-            <a:pPr marL="0" indent="0">
-              <a:buNone/>
-            </a:pPr>
-            <a:r>
-              <a:rPr lang="en-US" sz="1000" b="1" kern="0" spc="100" dirty="0">
-                <a:solidFill>
-                  <a:srgbClr val="F59E0B"/>
-                </a:solidFill>
-                <a:latin typeface="Calibri" pitchFamily="34" charset="0"/>
-                <a:ea typeface="Calibri" pitchFamily="34" charset="-122"/>
-                <a:cs typeface="Calibri" pitchFamily="34" charset="-120"/>
-              </a:rPr>
-              <a:t>CLAUDE CODE</a:t>
-            </a:r>
-            <a:endParaRPr lang="en-US" sz="1000" dirty="0"/>
-          </a:p>
-        </p:txBody>
-      </p:sp>
-      <p:sp>
-        <p:nvSpPr>
-          <p:cNvPr id="7" name="Text 4"/>
-          <p:cNvSpPr/>
-          <p:nvPr/>
-        </p:nvSpPr>
-        <p:spPr>
-          <a:xfrm>
-            <a:off x="6355080" y="1481328"/>
-            <a:ext cx="2286000" cy="274320"/>
-          </a:xfrm>
-          <a:prstGeom prst="rect">
-            <a:avLst/>
-          </a:prstGeom>
-          <a:noFill/>
-          <a:ln/>
-        </p:spPr>
-        <p:txBody>
-          <a:bodyPr wrap="square" rtlCol="0" anchor="ctr"/>
-          <a:lstStyle/>
-          <a:p>
-            <a:pPr marL="0" indent="0">
-              <a:buNone/>
-            </a:pPr>
-            <a:r>
-              <a:rPr lang="en-US" sz="1000" b="1" kern="0" spc="100" dirty="0">
-                <a:solidFill>
-                  <a:srgbClr val="7C3AED"/>
-                </a:solidFill>
-                <a:latin typeface="Calibri" pitchFamily="34" charset="0"/>
-                <a:ea typeface="Calibri" pitchFamily="34" charset="-122"/>
-                <a:cs typeface="Calibri" pitchFamily="34" charset="-120"/>
-              </a:rPr>
-              <a:t>CODEX</a:t>
-            </a:r>
-            <a:endParaRPr lang="en-US" sz="1000" dirty="0"/>
-          </a:p>
-        </p:txBody>
-      </p:sp>
-      <p:sp>
-        <p:nvSpPr>
-          <p:cNvPr id="8" name="Shape 5"/>
-          <p:cNvSpPr/>
-          <p:nvPr/>
-        </p:nvSpPr>
-        <p:spPr>
-          <a:xfrm>
-            <a:off x="457200" y="1810512"/>
-            <a:ext cx="8229600" cy="603504"/>
-          </a:xfrm>
-          <a:prstGeom prst="rect">
-            <a:avLst/>
-          </a:prstGeom>
-          <a:solidFill>
-            <a:srgbClr val="DDD6FE"/>
-          </a:solidFill>
-          <a:ln/>
-        </p:spPr>
-        <p:txBody>
-          <a:bodyPr/>
-          <a:lstStyle/>
-          <a:p>
-            <a:endParaRPr lang="en-AU"/>
-          </a:p>
-        </p:txBody>
-      </p:sp>
-      <p:sp>
-        <p:nvSpPr>
-          <p:cNvPr id="9" name="Text 6"/>
-          <p:cNvSpPr/>
-          <p:nvPr/>
-        </p:nvSpPr>
-        <p:spPr>
-          <a:xfrm>
-            <a:off x="640080" y="1810512"/>
-            <a:ext cx="3017520" cy="603504"/>
-          </a:xfrm>
-          <a:prstGeom prst="rect">
-            <a:avLst/>
-          </a:prstGeom>
-          <a:noFill/>
-          <a:ln/>
-        </p:spPr>
-        <p:txBody>
-          <a:bodyPr wrap="square" rtlCol="0" anchor="ctr"/>
-          <a:lstStyle/>
-          <a:p>
-            <a:pPr marL="0" indent="0">
-              <a:buNone/>
-            </a:pPr>
-            <a:r>
-              <a:rPr lang="en-US" sz="1250" dirty="0">
-                <a:solidFill>
-                  <a:srgbClr val="2D1155"/>
-                </a:solidFill>
-                <a:latin typeface="Calibri" pitchFamily="34" charset="0"/>
-                <a:ea typeface="Calibri" pitchFamily="34" charset="-122"/>
-                <a:cs typeface="Calibri" pitchFamily="34" charset="-120"/>
-              </a:rPr>
-              <a:t>Check what it's carrying</a:t>
-            </a:r>
-            <a:endParaRPr lang="en-US" sz="1250" dirty="0"/>
-          </a:p>
-        </p:txBody>
-      </p:sp>
-      <p:sp>
-        <p:nvSpPr>
-          <p:cNvPr id="10" name="Text 7"/>
-          <p:cNvSpPr/>
-          <p:nvPr/>
-        </p:nvSpPr>
-        <p:spPr>
-          <a:xfrm>
-            <a:off x="3749040" y="1810512"/>
-            <a:ext cx="2560320" cy="603504"/>
-          </a:xfrm>
-          <a:prstGeom prst="rect">
-            <a:avLst/>
-          </a:prstGeom>
-          <a:noFill/>
-          <a:ln/>
-        </p:spPr>
-        <p:txBody>
-          <a:bodyPr wrap="square" rtlCol="0" anchor="ctr"/>
-          <a:lstStyle/>
-          <a:p>
-            <a:pPr marL="0" indent="0">
-              <a:buNone/>
-            </a:pPr>
-            <a:r>
-              <a:rPr lang="en-US" sz="1300" b="1" dirty="0">
-                <a:solidFill>
-                  <a:srgbClr val="5B21B6"/>
-                </a:solidFill>
-                <a:latin typeface="Courier New" pitchFamily="34" charset="0"/>
-                <a:ea typeface="Courier New" pitchFamily="34" charset="-122"/>
-                <a:cs typeface="Courier New" pitchFamily="34" charset="-120"/>
-              </a:rPr>
-              <a:t>/context</a:t>
-            </a:r>
-            <a:endParaRPr lang="en-US" sz="1300" dirty="0"/>
-          </a:p>
-        </p:txBody>
-      </p:sp>
-      <p:sp>
-        <p:nvSpPr>
-          <p:cNvPr id="11" name="Text 8"/>
-          <p:cNvSpPr/>
-          <p:nvPr/>
-        </p:nvSpPr>
-        <p:spPr>
-          <a:xfrm>
-            <a:off x="6355080" y="1810512"/>
-            <a:ext cx="2286000" cy="603504"/>
-          </a:xfrm>
-          <a:prstGeom prst="rect">
-            <a:avLst/>
-          </a:prstGeom>
-          <a:noFill/>
-          <a:ln/>
-        </p:spPr>
-        <p:txBody>
-          <a:bodyPr wrap="square" rtlCol="0" anchor="ctr"/>
-          <a:lstStyle/>
-          <a:p>
-            <a:pPr marL="0" indent="0">
-              <a:buNone/>
-            </a:pPr>
-            <a:r>
-              <a:rPr lang="en-US" sz="1300" b="1" dirty="0">
-                <a:solidFill>
-                  <a:srgbClr val="7C3AED"/>
-                </a:solidFill>
-                <a:latin typeface="Courier New" pitchFamily="34" charset="0"/>
-                <a:ea typeface="Courier New" pitchFamily="34" charset="-122"/>
-                <a:cs typeface="Courier New" pitchFamily="34" charset="-120"/>
-              </a:rPr>
-              <a:t>/status</a:t>
-            </a:r>
-            <a:endParaRPr lang="en-US" sz="1300" dirty="0"/>
-          </a:p>
-        </p:txBody>
-      </p:sp>
-      <p:sp>
-        <p:nvSpPr>
-          <p:cNvPr id="12" name="Shape 9"/>
-          <p:cNvSpPr/>
-          <p:nvPr/>
-        </p:nvSpPr>
-        <p:spPr>
-          <a:xfrm>
-            <a:off x="457200" y="2414016"/>
-            <a:ext cx="8229600" cy="603504"/>
-          </a:xfrm>
-          <a:prstGeom prst="rect">
-            <a:avLst/>
-          </a:prstGeom>
-          <a:solidFill>
-            <a:srgbClr val="FFFFFF"/>
-          </a:solidFill>
-          <a:ln/>
-        </p:spPr>
-        <p:txBody>
-          <a:bodyPr/>
-          <a:lstStyle/>
-          <a:p>
-            <a:endParaRPr lang="en-AU"/>
-          </a:p>
-        </p:txBody>
-      </p:sp>
-      <p:sp>
-        <p:nvSpPr>
-          <p:cNvPr id="13" name="Text 10"/>
-          <p:cNvSpPr/>
-          <p:nvPr/>
-        </p:nvSpPr>
-        <p:spPr>
-          <a:xfrm>
-            <a:off x="640080" y="2414016"/>
-            <a:ext cx="3017520" cy="603504"/>
-          </a:xfrm>
-          <a:prstGeom prst="rect">
-            <a:avLst/>
-          </a:prstGeom>
-          <a:noFill/>
-          <a:ln/>
-        </p:spPr>
-        <p:txBody>
-          <a:bodyPr wrap="square" rtlCol="0" anchor="ctr"/>
-          <a:lstStyle/>
-          <a:p>
-            <a:pPr marL="0" indent="0">
-              <a:buNone/>
-            </a:pPr>
-            <a:r>
-              <a:rPr lang="en-US" sz="1250" dirty="0">
-                <a:solidFill>
-                  <a:srgbClr val="2D1155"/>
-                </a:solidFill>
-                <a:latin typeface="Calibri" pitchFamily="34" charset="0"/>
-                <a:ea typeface="Calibri" pitchFamily="34" charset="-122"/>
-                <a:cs typeface="Calibri" pitchFamily="34" charset="-120"/>
-              </a:rPr>
-              <a:t>Pin a file into context</a:t>
-            </a:r>
-            <a:endParaRPr lang="en-US" sz="1250" dirty="0"/>
-          </a:p>
-        </p:txBody>
-      </p:sp>
-      <p:sp>
-        <p:nvSpPr>
-          <p:cNvPr id="14" name="Text 11"/>
-          <p:cNvSpPr/>
-          <p:nvPr/>
-        </p:nvSpPr>
-        <p:spPr>
-          <a:xfrm>
-            <a:off x="3749040" y="2414016"/>
-            <a:ext cx="2560320" cy="603504"/>
-          </a:xfrm>
-          <a:prstGeom prst="rect">
-            <a:avLst/>
-          </a:prstGeom>
-          <a:noFill/>
-          <a:ln/>
-        </p:spPr>
-        <p:txBody>
-          <a:bodyPr wrap="square" rtlCol="0" anchor="ctr"/>
-          <a:lstStyle/>
-          <a:p>
-            <a:pPr marL="0" indent="0">
-              <a:buNone/>
-            </a:pPr>
-            <a:r>
-              <a:rPr lang="en-US" sz="1300" b="1" dirty="0">
-                <a:solidFill>
-                  <a:srgbClr val="5B21B6"/>
-                </a:solidFill>
-                <a:latin typeface="Courier New" pitchFamily="34" charset="0"/>
-                <a:ea typeface="Courier New" pitchFamily="34" charset="-122"/>
-                <a:cs typeface="Courier New" pitchFamily="34" charset="-120"/>
-              </a:rPr>
-              <a:t>@path/to/file</a:t>
-            </a:r>
-            <a:endParaRPr lang="en-US" sz="1300" dirty="0"/>
-          </a:p>
-        </p:txBody>
-      </p:sp>
-      <p:sp>
-        <p:nvSpPr>
-          <p:cNvPr id="15" name="Text 12"/>
-          <p:cNvSpPr/>
-          <p:nvPr/>
-        </p:nvSpPr>
-        <p:spPr>
-          <a:xfrm>
-            <a:off x="6355080" y="2414016"/>
-            <a:ext cx="2286000" cy="603504"/>
-          </a:xfrm>
-          <a:prstGeom prst="rect">
-            <a:avLst/>
-          </a:prstGeom>
-          <a:noFill/>
-          <a:ln/>
-        </p:spPr>
-        <p:txBody>
-          <a:bodyPr wrap="square" rtlCol="0" anchor="ctr"/>
-          <a:lstStyle/>
-          <a:p>
-            <a:pPr marL="0" indent="0">
-              <a:buNone/>
-            </a:pPr>
-            <a:r>
-              <a:rPr lang="en-US" sz="1300" b="1" dirty="0">
-                <a:solidFill>
-                  <a:srgbClr val="7C3AED"/>
-                </a:solidFill>
-                <a:latin typeface="Courier New" pitchFamily="34" charset="0"/>
-                <a:ea typeface="Courier New" pitchFamily="34" charset="-122"/>
-                <a:cs typeface="Courier New" pitchFamily="34" charset="-120"/>
-              </a:rPr>
-              <a:t>@path/to/file</a:t>
-            </a:r>
-            <a:endParaRPr lang="en-US" sz="1300" dirty="0"/>
-          </a:p>
-        </p:txBody>
-      </p:sp>
-      <p:sp>
-        <p:nvSpPr>
-          <p:cNvPr id="16" name="Shape 13"/>
-          <p:cNvSpPr/>
-          <p:nvPr/>
-        </p:nvSpPr>
-        <p:spPr>
-          <a:xfrm>
-            <a:off x="457200" y="3017520"/>
-            <a:ext cx="8229600" cy="603504"/>
-          </a:xfrm>
-          <a:prstGeom prst="rect">
-            <a:avLst/>
-          </a:prstGeom>
-          <a:solidFill>
-            <a:srgbClr val="DDD6FE"/>
-          </a:solidFill>
-          <a:ln/>
-        </p:spPr>
-        <p:txBody>
-          <a:bodyPr/>
-          <a:lstStyle/>
-          <a:p>
-            <a:endParaRPr lang="en-AU"/>
-          </a:p>
-        </p:txBody>
-      </p:sp>
-      <p:sp>
-        <p:nvSpPr>
-          <p:cNvPr id="17" name="Text 14"/>
-          <p:cNvSpPr/>
-          <p:nvPr/>
-        </p:nvSpPr>
-        <p:spPr>
-          <a:xfrm>
-            <a:off x="640080" y="3017520"/>
-            <a:ext cx="3017520" cy="603504"/>
-          </a:xfrm>
-          <a:prstGeom prst="rect">
-            <a:avLst/>
-          </a:prstGeom>
-          <a:noFill/>
-          <a:ln/>
-        </p:spPr>
-        <p:txBody>
-          <a:bodyPr wrap="square" rtlCol="0" anchor="ctr"/>
-          <a:lstStyle/>
-          <a:p>
-            <a:pPr marL="0" indent="0">
-              <a:buNone/>
-            </a:pPr>
-            <a:r>
-              <a:rPr lang="en-US" sz="1250" dirty="0">
-                <a:solidFill>
-                  <a:srgbClr val="2D1155"/>
-                </a:solidFill>
-                <a:latin typeface="Calibri" pitchFamily="34" charset="0"/>
-                <a:ea typeface="Calibri" pitchFamily="34" charset="-122"/>
-                <a:cs typeface="Calibri" pitchFamily="34" charset="-120"/>
-              </a:rPr>
-              <a:t>Trim a bloated context</a:t>
-            </a:r>
-            <a:endParaRPr lang="en-US" sz="1250" dirty="0"/>
-          </a:p>
-        </p:txBody>
-      </p:sp>
-      <p:sp>
-        <p:nvSpPr>
-          <p:cNvPr id="18" name="Text 15"/>
-          <p:cNvSpPr/>
-          <p:nvPr/>
-        </p:nvSpPr>
-        <p:spPr>
-          <a:xfrm>
-            <a:off x="3749040" y="3017520"/>
-            <a:ext cx="2560320" cy="603504"/>
-          </a:xfrm>
-          <a:prstGeom prst="rect">
-            <a:avLst/>
-          </a:prstGeom>
-          <a:noFill/>
-          <a:ln/>
-        </p:spPr>
-        <p:txBody>
-          <a:bodyPr wrap="square" rtlCol="0" anchor="ctr"/>
-          <a:lstStyle/>
-          <a:p>
-            <a:pPr marL="0" indent="0">
-              <a:buNone/>
-            </a:pPr>
-            <a:r>
-              <a:rPr lang="en-US" sz="1300" b="1" dirty="0">
-                <a:solidFill>
-                  <a:srgbClr val="5B21B6"/>
-                </a:solidFill>
-                <a:latin typeface="Courier New" pitchFamily="34" charset="0"/>
-                <a:ea typeface="Courier New" pitchFamily="34" charset="-122"/>
-                <a:cs typeface="Courier New" pitchFamily="34" charset="-120"/>
-              </a:rPr>
-              <a:t>/compact</a:t>
-            </a:r>
-            <a:endParaRPr lang="en-US" sz="1300" dirty="0"/>
-          </a:p>
-        </p:txBody>
-      </p:sp>
-      <p:sp>
-        <p:nvSpPr>
-          <p:cNvPr id="19" name="Text 16"/>
-          <p:cNvSpPr/>
-          <p:nvPr/>
-        </p:nvSpPr>
-        <p:spPr>
-          <a:xfrm>
-            <a:off x="6355080" y="3017520"/>
-            <a:ext cx="2286000" cy="603504"/>
-          </a:xfrm>
-          <a:prstGeom prst="rect">
-            <a:avLst/>
-          </a:prstGeom>
-          <a:noFill/>
-          <a:ln/>
-        </p:spPr>
-        <p:txBody>
-          <a:bodyPr wrap="square" rtlCol="0" anchor="ctr"/>
-          <a:lstStyle/>
-          <a:p>
-            <a:pPr marL="0" indent="0">
-              <a:buNone/>
-            </a:pPr>
-            <a:r>
-              <a:rPr lang="en-US" sz="1300" b="1" dirty="0">
-                <a:solidFill>
-                  <a:srgbClr val="7C3AED"/>
-                </a:solidFill>
-                <a:latin typeface="Courier New" pitchFamily="34" charset="0"/>
-                <a:ea typeface="Courier New" pitchFamily="34" charset="-122"/>
-                <a:cs typeface="Courier New" pitchFamily="34" charset="-120"/>
-              </a:rPr>
-              <a:t>/compact</a:t>
-            </a:r>
-            <a:endParaRPr lang="en-US" sz="1300" dirty="0"/>
-          </a:p>
-        </p:txBody>
-      </p:sp>
-      <p:sp>
-        <p:nvSpPr>
-          <p:cNvPr id="20" name="Shape 17"/>
-          <p:cNvSpPr/>
-          <p:nvPr/>
-        </p:nvSpPr>
-        <p:spPr>
-          <a:xfrm>
-            <a:off x="457200" y="3621024"/>
-            <a:ext cx="8229600" cy="603504"/>
-          </a:xfrm>
-          <a:prstGeom prst="rect">
-            <a:avLst/>
-          </a:prstGeom>
-          <a:solidFill>
-            <a:srgbClr val="FFFFFF"/>
-          </a:solidFill>
-          <a:ln/>
-        </p:spPr>
-        <p:txBody>
-          <a:bodyPr/>
-          <a:lstStyle/>
-          <a:p>
-            <a:endParaRPr lang="en-AU"/>
-          </a:p>
-        </p:txBody>
-      </p:sp>
-      <p:sp>
-        <p:nvSpPr>
-          <p:cNvPr id="21" name="Text 18"/>
-          <p:cNvSpPr/>
-          <p:nvPr/>
-        </p:nvSpPr>
-        <p:spPr>
-          <a:xfrm>
-            <a:off x="640080" y="3621024"/>
-            <a:ext cx="3017520" cy="603504"/>
-          </a:xfrm>
-          <a:prstGeom prst="rect">
-            <a:avLst/>
-          </a:prstGeom>
-          <a:noFill/>
-          <a:ln/>
-        </p:spPr>
-        <p:txBody>
-          <a:bodyPr wrap="square" rtlCol="0" anchor="ctr"/>
-          <a:lstStyle/>
-          <a:p>
-            <a:pPr marL="0" indent="0">
-              <a:buNone/>
-            </a:pPr>
-            <a:r>
-              <a:rPr lang="en-US" sz="1250" dirty="0">
-                <a:solidFill>
-                  <a:srgbClr val="2D1155"/>
-                </a:solidFill>
-                <a:latin typeface="Calibri" pitchFamily="34" charset="0"/>
-                <a:ea typeface="Calibri" pitchFamily="34" charset="-122"/>
-                <a:cs typeface="Calibri" pitchFamily="34" charset="-120"/>
-              </a:rPr>
-              <a:t>Start fresh</a:t>
-            </a:r>
-            <a:endParaRPr lang="en-US" sz="1250" dirty="0"/>
-          </a:p>
-        </p:txBody>
-      </p:sp>
-      <p:sp>
-        <p:nvSpPr>
-          <p:cNvPr id="22" name="Text 19"/>
-          <p:cNvSpPr/>
-          <p:nvPr/>
-        </p:nvSpPr>
-        <p:spPr>
-          <a:xfrm>
-            <a:off x="3749040" y="3621024"/>
-            <a:ext cx="2560320" cy="603504"/>
-          </a:xfrm>
-          <a:prstGeom prst="rect">
-            <a:avLst/>
-          </a:prstGeom>
-          <a:noFill/>
-          <a:ln/>
-        </p:spPr>
-        <p:txBody>
-          <a:bodyPr wrap="square" rtlCol="0" anchor="ctr"/>
-          <a:lstStyle/>
-          <a:p>
-            <a:pPr marL="0" indent="0">
-              <a:buNone/>
-            </a:pPr>
-            <a:r>
-              <a:rPr lang="en-US" sz="1300" b="1" dirty="0">
-                <a:solidFill>
-                  <a:srgbClr val="5B21B6"/>
-                </a:solidFill>
-                <a:latin typeface="Courier New" pitchFamily="34" charset="0"/>
-                <a:ea typeface="Courier New" pitchFamily="34" charset="-122"/>
-                <a:cs typeface="Courier New" pitchFamily="34" charset="-120"/>
-              </a:rPr>
-              <a:t>/clear</a:t>
-            </a:r>
-            <a:endParaRPr lang="en-US" sz="1300" dirty="0"/>
-          </a:p>
-        </p:txBody>
-      </p:sp>
-      <p:sp>
-        <p:nvSpPr>
-          <p:cNvPr id="23" name="Text 20"/>
-          <p:cNvSpPr/>
-          <p:nvPr/>
-        </p:nvSpPr>
-        <p:spPr>
-          <a:xfrm>
-            <a:off x="6355080" y="3621024"/>
-            <a:ext cx="2286000" cy="603504"/>
-          </a:xfrm>
-          <a:prstGeom prst="rect">
-            <a:avLst/>
-          </a:prstGeom>
-          <a:noFill/>
-          <a:ln/>
-        </p:spPr>
-        <p:txBody>
-          <a:bodyPr wrap="square" rtlCol="0" anchor="ctr"/>
-          <a:lstStyle/>
-          <a:p>
-            <a:pPr marL="0" indent="0">
-              <a:buNone/>
-            </a:pPr>
-            <a:r>
-              <a:rPr lang="en-US" sz="1300" b="1" dirty="0">
-                <a:solidFill>
-                  <a:srgbClr val="7C3AED"/>
-                </a:solidFill>
-                <a:latin typeface="Courier New" pitchFamily="34" charset="0"/>
-                <a:ea typeface="Courier New" pitchFamily="34" charset="-122"/>
-                <a:cs typeface="Courier New" pitchFamily="34" charset="-120"/>
-              </a:rPr>
-              <a:t>new session</a:t>
-            </a:r>
-            <a:endParaRPr lang="en-US" sz="1300" dirty="0"/>
-          </a:p>
-        </p:txBody>
-      </p:sp>
-      <p:sp>
-        <p:nvSpPr>
-          <p:cNvPr id="24" name="Text 21"/>
-          <p:cNvSpPr/>
-          <p:nvPr/>
-        </p:nvSpPr>
-        <p:spPr>
-          <a:xfrm>
-            <a:off x="457200" y="4370832"/>
-            <a:ext cx="8229600" cy="320040"/>
-          </a:xfrm>
-          <a:prstGeom prst="rect">
-            <a:avLst/>
-          </a:prstGeom>
-          <a:noFill/>
-          <a:ln/>
-        </p:spPr>
-        <p:txBody>
-          <a:bodyPr wrap="square" rtlCol="0" anchor="ctr"/>
-          <a:lstStyle/>
-          <a:p>
-            <a:pPr marL="0" indent="0">
-              <a:buNone/>
-            </a:pPr>
-            <a:r>
-              <a:rPr lang="en-US" sz="1150" i="1" dirty="0">
-                <a:solidFill>
-                  <a:srgbClr val="6E6389"/>
-                </a:solidFill>
-                <a:latin typeface="Calibri" pitchFamily="34" charset="0"/>
-                <a:ea typeface="Calibri" pitchFamily="34" charset="-122"/>
-                <a:cs typeface="Calibri" pitchFamily="34" charset="-120"/>
-              </a:rPr>
-              <a:t>You don't need to memorise these — just know they exist and reach for them when answers go vague.</a:t>
-            </a:r>
-            <a:endParaRPr lang="en-US" sz="1150" dirty="0"/>
-          </a:p>
-        </p:txBody>
-      </p:sp>
-    </p:spTree>
-  </p:cSld>
-  <p:clrMapOvr>
-    <a:masterClrMapping/>
-  </p:clrMapOvr>
-</p:sld>
-</file>
-
-<file path=ppt/slides/slide11.xml><?xml version="1.0" encoding="utf-8"?>
-<p:sld xmlns:a="http://schemas.openxmlformats.org/drawingml/2006/main" xmlns:r="http://schemas.openxmlformats.org/officeDocument/2006/relationships" xmlns:p="http://schemas.openxmlformats.org/presentationml/2006/main">
   <p:cSld name="Slide 11">
     <p:bg>
       <p:bgPr>
@@ -3818,7 +2855,7 @@
 </p:sld>
 </file>
 
-<file path=ppt/slides/slide12.xml><?xml version="1.0" encoding="utf-8"?>
+<file path=ppt/slides/slide11.xml><?xml version="1.0" encoding="utf-8"?>
 <p:sld xmlns:a="http://schemas.openxmlformats.org/drawingml/2006/main" xmlns:r="http://schemas.openxmlformats.org/officeDocument/2006/relationships" xmlns:p="http://schemas.openxmlformats.org/presentationml/2006/main">
   <p:cSld name="Slide 12">
     <p:bg>
@@ -4401,7 +3438,7 @@
 </p:sld>
 </file>
 
-<file path=ppt/slides/slide13.xml><?xml version="1.0" encoding="utf-8"?>
+<file path=ppt/slides/slide12.xml><?xml version="1.0" encoding="utf-8"?>
 <p:sld xmlns:a="http://schemas.openxmlformats.org/drawingml/2006/main" xmlns:r="http://schemas.openxmlformats.org/officeDocument/2006/relationships" xmlns:p="http://schemas.openxmlformats.org/presentationml/2006/main">
   <p:cSld name="Slide 13">
     <p:bg>
@@ -4811,7 +3848,7 @@
 </p:sld>
 </file>
 
-<file path=ppt/slides/slide14.xml><?xml version="1.0" encoding="utf-8"?>
+<file path=ppt/slides/slide13.xml><?xml version="1.0" encoding="utf-8"?>
 <p:sld xmlns:a="http://schemas.openxmlformats.org/drawingml/2006/main" xmlns:r="http://schemas.openxmlformats.org/officeDocument/2006/relationships" xmlns:p="http://schemas.openxmlformats.org/presentationml/2006/main">
   <p:cSld name="Slide 14">
     <p:bg>
@@ -5644,7 +4681,7 @@
 </p:sld>
 </file>
 
-<file path=ppt/slides/slide15.xml><?xml version="1.0" encoding="utf-8"?>
+<file path=ppt/slides/slide14.xml><?xml version="1.0" encoding="utf-8"?>
 <p:sld xmlns:a="http://schemas.openxmlformats.org/drawingml/2006/main" xmlns:r="http://schemas.openxmlformats.org/officeDocument/2006/relationships" xmlns:p="http://schemas.openxmlformats.org/presentationml/2006/main">
   <p:cSld name="Slide 15">
     <p:bg>
@@ -6217,7 +5254,7 @@
 </p:sld>
 </file>
 
-<file path=ppt/slides/slide16.xml><?xml version="1.0" encoding="utf-8"?>
+<file path=ppt/slides/slide15.xml><?xml version="1.0" encoding="utf-8"?>
 <p:sld xmlns:a="http://schemas.openxmlformats.org/drawingml/2006/main" xmlns:r="http://schemas.openxmlformats.org/officeDocument/2006/relationships" xmlns:p="http://schemas.openxmlformats.org/presentationml/2006/main">
   <p:cSld name="Slide 16">
     <p:bg>
@@ -6932,7 +5969,7 @@
 </p:sld>
 </file>
 
-<file path=ppt/slides/slide17.xml><?xml version="1.0" encoding="utf-8"?>
+<file path=ppt/slides/slide16.xml><?xml version="1.0" encoding="utf-8"?>
 <p:sld xmlns:a="http://schemas.openxmlformats.org/drawingml/2006/main" xmlns:r="http://schemas.openxmlformats.org/officeDocument/2006/relationships" xmlns:p="http://schemas.openxmlformats.org/presentationml/2006/main">
   <p:cSld name="Slide 17">
     <p:bg>
@@ -7252,657 +6289,6 @@
 
 <file path=ppt/slides/slide2.xml><?xml version="1.0" encoding="utf-8"?>
 <p:sld xmlns:a="http://schemas.openxmlformats.org/drawingml/2006/main" xmlns:r="http://schemas.openxmlformats.org/officeDocument/2006/relationships" xmlns:p="http://schemas.openxmlformats.org/presentationml/2006/main">
-  <p:cSld name="Slide 2">
-    <p:bg>
-      <p:bgPr>
-        <a:solidFill>
-          <a:srgbClr val="F5F3FF"/>
-        </a:solidFill>
-        <a:effectLst/>
-      </p:bgPr>
-    </p:bg>
-    <p:spTree>
-      <p:nvGrpSpPr>
-        <p:cNvPr id="1" name=""/>
-        <p:cNvGrpSpPr/>
-        <p:nvPr/>
-      </p:nvGrpSpPr>
-      <p:grpSpPr>
-        <a:xfrm>
-          <a:off x="0" y="0"/>
-          <a:ext cx="0" cy="0"/>
-          <a:chOff x="0" y="0"/>
-          <a:chExt cx="0" cy="0"/>
-        </a:xfrm>
-      </p:grpSpPr>
-      <p:sp>
-        <p:nvSpPr>
-          <p:cNvPr id="2" name="Text 0"/>
-          <p:cNvSpPr/>
-          <p:nvPr/>
-        </p:nvSpPr>
-        <p:spPr>
-          <a:xfrm>
-            <a:off x="457200" y="292608"/>
-            <a:ext cx="8229600" cy="566928"/>
-          </a:xfrm>
-          <a:prstGeom prst="rect">
-            <a:avLst/>
-          </a:prstGeom>
-          <a:noFill/>
-          <a:ln/>
-        </p:spPr>
-        <p:txBody>
-          <a:bodyPr wrap="square" rtlCol="0" anchor="ctr"/>
-          <a:lstStyle/>
-          <a:p>
-            <a:pPr marL="0" indent="0" algn="l">
-              <a:buNone/>
-            </a:pPr>
-            <a:r>
-              <a:rPr lang="en-US" sz="2200" b="1" kern="0" spc="100" dirty="0">
-                <a:solidFill>
-                  <a:srgbClr val="2D1155"/>
-                </a:solidFill>
-                <a:latin typeface="Arial Black" pitchFamily="34" charset="0"/>
-                <a:ea typeface="Arial Black" pitchFamily="34" charset="-122"/>
-                <a:cs typeface="Arial Black" pitchFamily="34" charset="-120"/>
-              </a:rPr>
-              <a:t>TWO KINDS OF ENGINEER</a:t>
-            </a:r>
-            <a:endParaRPr lang="en-US" sz="2200" dirty="0"/>
-          </a:p>
-        </p:txBody>
-      </p:sp>
-      <p:sp>
-        <p:nvSpPr>
-          <p:cNvPr id="3" name="Text 1"/>
-          <p:cNvSpPr/>
-          <p:nvPr/>
-        </p:nvSpPr>
-        <p:spPr>
-          <a:xfrm>
-            <a:off x="475488" y="896112"/>
-            <a:ext cx="8229600" cy="329184"/>
-          </a:xfrm>
-          <a:prstGeom prst="rect">
-            <a:avLst/>
-          </a:prstGeom>
-          <a:noFill/>
-          <a:ln/>
-        </p:spPr>
-        <p:txBody>
-          <a:bodyPr wrap="square" rtlCol="0" anchor="ctr"/>
-          <a:lstStyle/>
-          <a:p>
-            <a:pPr marL="0" indent="0">
-              <a:buNone/>
-            </a:pPr>
-            <a:r>
-              <a:rPr lang="en-US" sz="1300" i="1" dirty="0">
-                <a:solidFill>
-                  <a:srgbClr val="6E6389"/>
-                </a:solidFill>
-                <a:latin typeface="Calibri" pitchFamily="34" charset="0"/>
-                <a:ea typeface="Calibri" pitchFamily="34" charset="-122"/>
-                <a:cs typeface="Calibri" pitchFamily="34" charset="-120"/>
-              </a:rPr>
-              <a:t>Both leave with something new.</a:t>
-            </a:r>
-            <a:endParaRPr lang="en-US" sz="1300" dirty="0"/>
-          </a:p>
-        </p:txBody>
-      </p:sp>
-      <p:pic>
-        <p:nvPicPr>
-          <p:cNvPr id="4" name="Image 0" descr="logo_icon.jpeg"/>
-          <p:cNvPicPr>
-            <a:picLocks noChangeAspect="1"/>
-          </p:cNvPicPr>
-          <p:nvPr/>
-        </p:nvPicPr>
-        <p:blipFill>
-          <a:blip r:embed="rId3"/>
-          <a:stretch>
-            <a:fillRect/>
-          </a:stretch>
-        </p:blipFill>
-        <p:spPr>
-          <a:xfrm>
-            <a:off x="8366760" y="4526280"/>
-            <a:ext cx="411480" cy="411480"/>
-          </a:xfrm>
-          <a:prstGeom prst="ellipse">
-            <a:avLst/>
-          </a:prstGeom>
-        </p:spPr>
-      </p:pic>
-      <p:sp>
-        <p:nvSpPr>
-          <p:cNvPr id="5" name="Shape 2"/>
-          <p:cNvSpPr/>
-          <p:nvPr/>
-        </p:nvSpPr>
-        <p:spPr>
-          <a:xfrm>
-            <a:off x="457200" y="1417320"/>
-            <a:ext cx="3931920" cy="3246120"/>
-          </a:xfrm>
-          <a:prstGeom prst="roundRect">
-            <a:avLst>
-              <a:gd name="adj" fmla="val 2535"/>
-            </a:avLst>
-          </a:prstGeom>
-          <a:solidFill>
-            <a:srgbClr val="2D1155"/>
-          </a:solidFill>
-          <a:ln/>
-        </p:spPr>
-        <p:txBody>
-          <a:bodyPr/>
-          <a:lstStyle/>
-          <a:p>
-            <a:endParaRPr lang="en-AU"/>
-          </a:p>
-        </p:txBody>
-      </p:sp>
-      <p:sp>
-        <p:nvSpPr>
-          <p:cNvPr id="6" name="Shape 3"/>
-          <p:cNvSpPr/>
-          <p:nvPr/>
-        </p:nvSpPr>
-        <p:spPr>
-          <a:xfrm>
-            <a:off x="713232" y="1673352"/>
-            <a:ext cx="566928" cy="566928"/>
-          </a:xfrm>
-          <a:prstGeom prst="ellipse">
-            <a:avLst/>
-          </a:prstGeom>
-          <a:solidFill>
-            <a:srgbClr val="F59E0B"/>
-          </a:solidFill>
-          <a:ln/>
-        </p:spPr>
-        <p:txBody>
-          <a:bodyPr/>
-          <a:lstStyle/>
-          <a:p>
-            <a:endParaRPr lang="en-AU"/>
-          </a:p>
-        </p:txBody>
-      </p:sp>
-      <p:sp>
-        <p:nvSpPr>
-          <p:cNvPr id="7" name="Text 4"/>
-          <p:cNvSpPr/>
-          <p:nvPr/>
-        </p:nvSpPr>
-        <p:spPr>
-          <a:xfrm>
-            <a:off x="713232" y="1673352"/>
-            <a:ext cx="566928" cy="566928"/>
-          </a:xfrm>
-          <a:prstGeom prst="rect">
-            <a:avLst/>
-          </a:prstGeom>
-          <a:noFill/>
-          <a:ln/>
-        </p:spPr>
-        <p:txBody>
-          <a:bodyPr wrap="square" rtlCol="0" anchor="ctr"/>
-          <a:lstStyle/>
-          <a:p>
-            <a:pPr marL="0" indent="0" algn="ctr">
-              <a:buNone/>
-            </a:pPr>
-            <a:r>
-              <a:rPr lang="en-US" sz="1200" b="1" dirty="0">
-                <a:solidFill>
-                  <a:srgbClr val="FFFFFF"/>
-                </a:solidFill>
-                <a:latin typeface="Arial Black" pitchFamily="34" charset="0"/>
-                <a:ea typeface="Arial Black" pitchFamily="34" charset="-122"/>
-                <a:cs typeface="Arial Black" pitchFamily="34" charset="-120"/>
-              </a:rPr>
-              <a:t>R</a:t>
-            </a:r>
-            <a:endParaRPr lang="en-US" sz="1200" dirty="0"/>
-          </a:p>
-        </p:txBody>
-      </p:sp>
-      <p:sp>
-        <p:nvSpPr>
-          <p:cNvPr id="8" name="Text 5"/>
-          <p:cNvSpPr/>
-          <p:nvPr/>
-        </p:nvSpPr>
-        <p:spPr>
-          <a:xfrm>
-            <a:off x="1417320" y="1700784"/>
-            <a:ext cx="2834640" cy="502920"/>
-          </a:xfrm>
-          <a:prstGeom prst="rect">
-            <a:avLst/>
-          </a:prstGeom>
-          <a:noFill/>
-          <a:ln/>
-        </p:spPr>
-        <p:txBody>
-          <a:bodyPr wrap="square" rtlCol="0" anchor="ctr"/>
-          <a:lstStyle/>
-          <a:p>
-            <a:pPr marL="0" indent="0">
-              <a:buNone/>
-            </a:pPr>
-            <a:r>
-              <a:rPr lang="en-US" sz="1600" b="1" dirty="0">
-                <a:solidFill>
-                  <a:srgbClr val="F59E0B"/>
-                </a:solidFill>
-                <a:latin typeface="Arial Black" pitchFamily="34" charset="0"/>
-                <a:ea typeface="Arial Black" pitchFamily="34" charset="-122"/>
-                <a:cs typeface="Arial Black" pitchFamily="34" charset="-120"/>
-              </a:rPr>
-              <a:t>The rusty one</a:t>
-            </a:r>
-            <a:endParaRPr lang="en-US" sz="1600" dirty="0"/>
-          </a:p>
-        </p:txBody>
-      </p:sp>
-      <p:sp>
-        <p:nvSpPr>
-          <p:cNvPr id="9" name="Text 6"/>
-          <p:cNvSpPr/>
-          <p:nvPr/>
-        </p:nvSpPr>
-        <p:spPr>
-          <a:xfrm>
-            <a:off x="731520" y="2331720"/>
-            <a:ext cx="3429000" cy="457200"/>
-          </a:xfrm>
-          <a:prstGeom prst="rect">
-            <a:avLst/>
-          </a:prstGeom>
-          <a:noFill/>
-          <a:ln/>
-        </p:spPr>
-        <p:txBody>
-          <a:bodyPr wrap="square" rtlCol="0" anchor="t"/>
-          <a:lstStyle/>
-          <a:p>
-            <a:pPr marL="0" indent="0">
-              <a:buNone/>
-            </a:pPr>
-            <a:r>
-              <a:rPr lang="en-US" sz="1200" i="1" dirty="0">
-                <a:solidFill>
-                  <a:srgbClr val="DDD6FE"/>
-                </a:solidFill>
-                <a:latin typeface="Calibri" pitchFamily="34" charset="0"/>
-                <a:ea typeface="Calibri" pitchFamily="34" charset="-122"/>
-                <a:cs typeface="Calibri" pitchFamily="34" charset="-120"/>
-              </a:rPr>
-              <a:t>Back from leave. Tooling moved. Feeling behind.</a:t>
-            </a:r>
-            <a:endParaRPr lang="en-US" sz="1200" dirty="0"/>
-          </a:p>
-        </p:txBody>
-      </p:sp>
-      <p:sp>
-        <p:nvSpPr>
-          <p:cNvPr id="10" name="Text 7"/>
-          <p:cNvSpPr/>
-          <p:nvPr/>
-        </p:nvSpPr>
-        <p:spPr>
-          <a:xfrm>
-            <a:off x="731520" y="2852928"/>
-            <a:ext cx="3474720" cy="1691640"/>
-          </a:xfrm>
-          <a:prstGeom prst="rect">
-            <a:avLst/>
-          </a:prstGeom>
-          <a:noFill/>
-          <a:ln/>
-        </p:spPr>
-        <p:txBody>
-          <a:bodyPr wrap="square" rtlCol="0" anchor="t"/>
-          <a:lstStyle/>
-          <a:p>
-            <a:pPr marL="152400" indent="-152400">
-              <a:spcAft>
-                <a:spcPts val="700"/>
-              </a:spcAft>
-              <a:buSzPct val="100000"/>
-              <a:buChar char="•"/>
-            </a:pPr>
-            <a:r>
-              <a:rPr lang="en-US" sz="1200" dirty="0">
-                <a:solidFill>
-                  <a:srgbClr val="FFFFFF"/>
-                </a:solidFill>
-                <a:latin typeface="Calibri" pitchFamily="34" charset="0"/>
-                <a:ea typeface="Calibri" pitchFamily="34" charset="-122"/>
-                <a:cs typeface="Calibri" pitchFamily="34" charset="-120"/>
-              </a:rPr>
-              <a:t>Learns the loop and the tools.</a:t>
-            </a:r>
-            <a:endParaRPr lang="en-US" sz="1200" dirty="0"/>
-          </a:p>
-          <a:p>
-            <a:pPr marL="152400" indent="-152400">
-              <a:spcAft>
-                <a:spcPts val="700"/>
-              </a:spcAft>
-              <a:buSzPct val="100000"/>
-              <a:buChar char="•"/>
-            </a:pPr>
-            <a:r>
-              <a:rPr lang="en-US" sz="1200" dirty="0">
-                <a:solidFill>
-                  <a:srgbClr val="FFFFFF"/>
-                </a:solidFill>
-                <a:latin typeface="Calibri" pitchFamily="34" charset="0"/>
-                <a:ea typeface="Calibri" pitchFamily="34" charset="-122"/>
-                <a:cs typeface="Calibri" pitchFamily="34" charset="-120"/>
-              </a:rPr>
-              <a:t>The mechanical part - typing tokens - is exactly what got automated while you were away.</a:t>
-            </a:r>
-            <a:endParaRPr lang="en-US" sz="1200" dirty="0"/>
-          </a:p>
-          <a:p>
-            <a:pPr marL="152400" indent="-152400">
-              <a:spcAft>
-                <a:spcPts val="700"/>
-              </a:spcAft>
-              <a:buSzPct val="100000"/>
-              <a:buChar char="•"/>
-            </a:pPr>
-            <a:r>
-              <a:rPr lang="en-US" sz="1200" b="1" dirty="0">
-                <a:solidFill>
-                  <a:srgbClr val="F59E0B"/>
-                </a:solidFill>
-                <a:latin typeface="Calibri" pitchFamily="34" charset="0"/>
-                <a:ea typeface="Calibri" pitchFamily="34" charset="-122"/>
-                <a:cs typeface="Calibri" pitchFamily="34" charset="-120"/>
-              </a:rPr>
-              <a:t>Your judgement did not expire.</a:t>
-            </a:r>
-            <a:endParaRPr lang="en-US" sz="1200" dirty="0"/>
-          </a:p>
-        </p:txBody>
-      </p:sp>
-      <p:sp>
-        <p:nvSpPr>
-          <p:cNvPr id="11" name="Shape 8"/>
-          <p:cNvSpPr/>
-          <p:nvPr/>
-        </p:nvSpPr>
-        <p:spPr>
-          <a:xfrm>
-            <a:off x="4754880" y="1417320"/>
-            <a:ext cx="3931920" cy="3246120"/>
-          </a:xfrm>
-          <a:prstGeom prst="roundRect">
-            <a:avLst>
-              <a:gd name="adj" fmla="val 2535"/>
-            </a:avLst>
-          </a:prstGeom>
-          <a:solidFill>
-            <a:srgbClr val="2D1155"/>
-          </a:solidFill>
-          <a:ln/>
-        </p:spPr>
-        <p:txBody>
-          <a:bodyPr/>
-          <a:lstStyle/>
-          <a:p>
-            <a:endParaRPr lang="en-AU"/>
-          </a:p>
-        </p:txBody>
-      </p:sp>
-      <p:sp>
-        <p:nvSpPr>
-          <p:cNvPr id="12" name="Shape 9"/>
-          <p:cNvSpPr/>
-          <p:nvPr/>
-        </p:nvSpPr>
-        <p:spPr>
-          <a:xfrm>
-            <a:off x="5010912" y="1673352"/>
-            <a:ext cx="566928" cy="566928"/>
-          </a:xfrm>
-          <a:prstGeom prst="ellipse">
-            <a:avLst/>
-          </a:prstGeom>
-          <a:solidFill>
-            <a:srgbClr val="7C3AED"/>
-          </a:solidFill>
-          <a:ln/>
-        </p:spPr>
-        <p:txBody>
-          <a:bodyPr/>
-          <a:lstStyle/>
-          <a:p>
-            <a:endParaRPr lang="en-AU"/>
-          </a:p>
-        </p:txBody>
-      </p:sp>
-      <p:sp>
-        <p:nvSpPr>
-          <p:cNvPr id="13" name="Text 10"/>
-          <p:cNvSpPr/>
-          <p:nvPr/>
-        </p:nvSpPr>
-        <p:spPr>
-          <a:xfrm>
-            <a:off x="5010912" y="1673352"/>
-            <a:ext cx="566928" cy="566928"/>
-          </a:xfrm>
-          <a:prstGeom prst="rect">
-            <a:avLst/>
-          </a:prstGeom>
-          <a:noFill/>
-          <a:ln/>
-        </p:spPr>
-        <p:txBody>
-          <a:bodyPr wrap="square" rtlCol="0" anchor="ctr"/>
-          <a:lstStyle/>
-          <a:p>
-            <a:pPr marL="0" indent="0" algn="ctr">
-              <a:buNone/>
-            </a:pPr>
-            <a:r>
-              <a:rPr lang="en-US" sz="1200" b="1" dirty="0">
-                <a:solidFill>
-                  <a:srgbClr val="FFFFFF"/>
-                </a:solidFill>
-                <a:latin typeface="Arial Black" pitchFamily="34" charset="0"/>
-                <a:ea typeface="Arial Black" pitchFamily="34" charset="-122"/>
-                <a:cs typeface="Arial Black" pitchFamily="34" charset="-120"/>
-              </a:rPr>
-              <a:t>C</a:t>
-            </a:r>
-            <a:endParaRPr lang="en-US" sz="1200" dirty="0"/>
-          </a:p>
-        </p:txBody>
-      </p:sp>
-      <p:sp>
-        <p:nvSpPr>
-          <p:cNvPr id="14" name="Text 11"/>
-          <p:cNvSpPr/>
-          <p:nvPr/>
-        </p:nvSpPr>
-        <p:spPr>
-          <a:xfrm>
-            <a:off x="5715000" y="1700784"/>
-            <a:ext cx="2834640" cy="502920"/>
-          </a:xfrm>
-          <a:prstGeom prst="rect">
-            <a:avLst/>
-          </a:prstGeom>
-          <a:noFill/>
-          <a:ln/>
-        </p:spPr>
-        <p:txBody>
-          <a:bodyPr wrap="square" rtlCol="0" anchor="ctr"/>
-          <a:lstStyle/>
-          <a:p>
-            <a:pPr marL="0" indent="0">
-              <a:buNone/>
-            </a:pPr>
-            <a:r>
-              <a:rPr lang="en-US" sz="1600" b="1" dirty="0">
-                <a:solidFill>
-                  <a:srgbClr val="7C3AED"/>
-                </a:solidFill>
-                <a:latin typeface="Arial Black" pitchFamily="34" charset="0"/>
-                <a:ea typeface="Arial Black" pitchFamily="34" charset="-122"/>
-                <a:cs typeface="Arial Black" pitchFamily="34" charset="-120"/>
-              </a:rPr>
-              <a:t>The confident one</a:t>
-            </a:r>
-            <a:endParaRPr lang="en-US" sz="1600" dirty="0"/>
-          </a:p>
-        </p:txBody>
-      </p:sp>
-      <p:sp>
-        <p:nvSpPr>
-          <p:cNvPr id="15" name="Text 12"/>
-          <p:cNvSpPr/>
-          <p:nvPr/>
-        </p:nvSpPr>
-        <p:spPr>
-          <a:xfrm>
-            <a:off x="5029200" y="2331720"/>
-            <a:ext cx="3429000" cy="457200"/>
-          </a:xfrm>
-          <a:prstGeom prst="rect">
-            <a:avLst/>
-          </a:prstGeom>
-          <a:noFill/>
-          <a:ln/>
-        </p:spPr>
-        <p:txBody>
-          <a:bodyPr wrap="square" rtlCol="0" anchor="t"/>
-          <a:lstStyle/>
-          <a:p>
-            <a:pPr marL="0" indent="0">
-              <a:buNone/>
-            </a:pPr>
-            <a:r>
-              <a:rPr lang="en-US" sz="1200" i="1" dirty="0">
-                <a:solidFill>
-                  <a:srgbClr val="DDD6FE"/>
-                </a:solidFill>
-                <a:latin typeface="Calibri" pitchFamily="34" charset="0"/>
-                <a:ea typeface="Calibri" pitchFamily="34" charset="-122"/>
-                <a:cs typeface="Calibri" pitchFamily="34" charset="-120"/>
-              </a:rPr>
-              <a:t>Ships fast by hand. Trusts their own fingers.</a:t>
-            </a:r>
-            <a:endParaRPr lang="en-US" sz="1200" dirty="0"/>
-          </a:p>
-        </p:txBody>
-      </p:sp>
-      <p:sp>
-        <p:nvSpPr>
-          <p:cNvPr id="16" name="Text 13"/>
-          <p:cNvSpPr/>
-          <p:nvPr/>
-        </p:nvSpPr>
-        <p:spPr>
-          <a:xfrm>
-            <a:off x="5029200" y="2852928"/>
-            <a:ext cx="3474720" cy="1691640"/>
-          </a:xfrm>
-          <a:prstGeom prst="rect">
-            <a:avLst/>
-          </a:prstGeom>
-          <a:noFill/>
-          <a:ln/>
-        </p:spPr>
-        <p:txBody>
-          <a:bodyPr wrap="square" rtlCol="0" anchor="t"/>
-          <a:lstStyle/>
-          <a:p>
-            <a:pPr marL="152400" indent="-152400">
-              <a:spcAft>
-                <a:spcPts val="700"/>
-              </a:spcAft>
-              <a:buSzPct val="100000"/>
-              <a:buChar char="•"/>
-            </a:pPr>
-            <a:r>
-              <a:rPr lang="en-US" sz="1200" dirty="0">
-                <a:solidFill>
-                  <a:srgbClr val="FFFFFF"/>
-                </a:solidFill>
-                <a:latin typeface="Calibri" pitchFamily="34" charset="0"/>
-                <a:ea typeface="Calibri" pitchFamily="34" charset="-122"/>
-                <a:cs typeface="Calibri" pitchFamily="34" charset="-120"/>
-              </a:rPr>
-              <a:t>Learns to give up the keyboard.</a:t>
-            </a:r>
-            <a:endParaRPr lang="en-US" sz="1200" dirty="0"/>
-          </a:p>
-          <a:p>
-            <a:pPr marL="152400" indent="-152400">
-              <a:spcAft>
-                <a:spcPts val="700"/>
-              </a:spcAft>
-              <a:buSzPct val="100000"/>
-              <a:buChar char="•"/>
-            </a:pPr>
-            <a:r>
-              <a:rPr lang="en-US" sz="1200" dirty="0">
-                <a:solidFill>
-                  <a:srgbClr val="FFFFFF"/>
-                </a:solidFill>
-                <a:latin typeface="Calibri" pitchFamily="34" charset="0"/>
-                <a:ea typeface="Calibri" pitchFamily="34" charset="-122"/>
-                <a:cs typeface="Calibri" pitchFamily="34" charset="-120"/>
-              </a:rPr>
-              <a:t>Harder for you - more habits to unlearn.</a:t>
-            </a:r>
-            <a:endParaRPr lang="en-US" sz="1200" dirty="0"/>
-          </a:p>
-          <a:p>
-            <a:pPr marL="152400" indent="-152400">
-              <a:spcAft>
-                <a:spcPts val="700"/>
-              </a:spcAft>
-              <a:buSzPct val="100000"/>
-              <a:buChar char="•"/>
-            </a:pPr>
-            <a:r>
-              <a:rPr lang="en-US" sz="1200" b="1" dirty="0">
-                <a:solidFill>
-                  <a:srgbClr val="DDD6FE"/>
-                </a:solidFill>
-                <a:latin typeface="Calibri" pitchFamily="34" charset="0"/>
-                <a:ea typeface="Calibri" pitchFamily="34" charset="-122"/>
-                <a:cs typeface="Calibri" pitchFamily="34" charset="-120"/>
-              </a:rPr>
-              <a:t>Direct the work instead of doing it.</a:t>
-            </a:r>
-            <a:endParaRPr lang="en-US" sz="1200" dirty="0"/>
-          </a:p>
-        </p:txBody>
-      </p:sp>
-    </p:spTree>
-  </p:cSld>
-  <p:clrMapOvr>
-    <a:masterClrMapping/>
-  </p:clrMapOvr>
-</p:sld>
-</file>
-
-<file path=ppt/slides/slide3.xml><?xml version="1.0" encoding="utf-8"?>
-<p:sld xmlns:a="http://schemas.openxmlformats.org/drawingml/2006/main" xmlns:r="http://schemas.openxmlformats.org/officeDocument/2006/relationships" xmlns:p="http://schemas.openxmlformats.org/presentationml/2006/main">
   <p:cSld name="Slide 3">
     <p:bg>
       <p:bgPr>
@@ -8557,7 +6943,7 @@
 </p:sld>
 </file>
 
-<file path=ppt/slides/slide4.xml><?xml version="1.0" encoding="utf-8"?>
+<file path=ppt/slides/slide3.xml><?xml version="1.0" encoding="utf-8"?>
 <p:sld xmlns:a="http://schemas.openxmlformats.org/drawingml/2006/main" xmlns:r="http://schemas.openxmlformats.org/officeDocument/2006/relationships" xmlns:p="http://schemas.openxmlformats.org/presentationml/2006/main">
   <p:cSld name="Slide 4">
     <p:bg>
@@ -8949,7 +7335,7 @@
 </p:sld>
 </file>
 
-<file path=ppt/slides/slide5.xml><?xml version="1.0" encoding="utf-8"?>
+<file path=ppt/slides/slide4.xml><?xml version="1.0" encoding="utf-8"?>
 <p:sld xmlns:a="http://schemas.openxmlformats.org/drawingml/2006/main" xmlns:r="http://schemas.openxmlformats.org/officeDocument/2006/relationships" xmlns:p="http://schemas.openxmlformats.org/presentationml/2006/main">
   <p:cSld name="Slide 5">
     <p:bg>
@@ -10049,7 +8435,7 @@
 </p:sld>
 </file>
 
-<file path=ppt/slides/slide6.xml><?xml version="1.0" encoding="utf-8"?>
+<file path=ppt/slides/slide5.xml><?xml version="1.0" encoding="utf-8"?>
 <p:sld xmlns:a="http://schemas.openxmlformats.org/drawingml/2006/main" xmlns:r="http://schemas.openxmlformats.org/officeDocument/2006/relationships" xmlns:p="http://schemas.openxmlformats.org/presentationml/2006/main">
   <p:cSld name="Slide 6">
     <p:bg>
@@ -10926,7 +9312,7 @@
 </p:sld>
 </file>
 
-<file path=ppt/slides/slide7.xml><?xml version="1.0" encoding="utf-8"?>
+<file path=ppt/slides/slide6.xml><?xml version="1.0" encoding="utf-8"?>
 <p:sld xmlns:a="http://schemas.openxmlformats.org/drawingml/2006/main" xmlns:r="http://schemas.openxmlformats.org/officeDocument/2006/relationships" xmlns:p="http://schemas.openxmlformats.org/presentationml/2006/main">
   <p:cSld name="Slide 7">
     <p:bg>
@@ -11320,7 +9706,7 @@
 </p:sld>
 </file>
 
-<file path=ppt/slides/slide8.xml><?xml version="1.0" encoding="utf-8"?>
+<file path=ppt/slides/slide7.xml><?xml version="1.0" encoding="utf-8"?>
 <p:sld xmlns:a="http://schemas.openxmlformats.org/drawingml/2006/main" xmlns:r="http://schemas.openxmlformats.org/officeDocument/2006/relationships" xmlns:p="http://schemas.openxmlformats.org/presentationml/2006/main">
   <p:cSld name="Slide 8">
     <p:bg>
@@ -11947,7 +10333,7 @@
 </p:sld>
 </file>
 
-<file path=ppt/slides/slide9.xml><?xml version="1.0" encoding="utf-8"?>
+<file path=ppt/slides/slide8.xml><?xml version="1.0" encoding="utf-8"?>
 <p:sld xmlns:a="http://schemas.openxmlformats.org/drawingml/2006/main" xmlns:r="http://schemas.openxmlformats.org/officeDocument/2006/relationships" xmlns:p="http://schemas.openxmlformats.org/presentationml/2006/main">
   <p:cSld name="Slide 9">
     <p:bg>
@@ -12520,6 +10906,873 @@
               <a:t>Codex: /plan</a:t>
             </a:r>
             <a:endParaRPr lang="en-US" sz="1200" dirty="0"/>
+          </a:p>
+        </p:txBody>
+      </p:sp>
+    </p:spTree>
+  </p:cSld>
+  <p:clrMapOvr>
+    <a:masterClrMapping/>
+  </p:clrMapOvr>
+</p:sld>
+</file>
+
+<file path=ppt/slides/slide9.xml><?xml version="1.0" encoding="utf-8"?>
+<p:sld xmlns:a="http://schemas.openxmlformats.org/drawingml/2006/main" xmlns:r="http://schemas.openxmlformats.org/officeDocument/2006/relationships" xmlns:p="http://schemas.openxmlformats.org/presentationml/2006/main">
+  <p:cSld name="Slide 10">
+    <p:bg>
+      <p:bgPr>
+        <a:solidFill>
+          <a:srgbClr val="F5F3FF"/>
+        </a:solidFill>
+        <a:effectLst/>
+      </p:bgPr>
+    </p:bg>
+    <p:spTree>
+      <p:nvGrpSpPr>
+        <p:cNvPr id="1" name=""/>
+        <p:cNvGrpSpPr/>
+        <p:nvPr/>
+      </p:nvGrpSpPr>
+      <p:grpSpPr>
+        <a:xfrm>
+          <a:off x="0" y="0"/>
+          <a:ext cx="0" cy="0"/>
+          <a:chOff x="0" y="0"/>
+          <a:chExt cx="0" cy="0"/>
+        </a:xfrm>
+      </p:grpSpPr>
+      <p:sp>
+        <p:nvSpPr>
+          <p:cNvPr id="2" name="Text 0"/>
+          <p:cNvSpPr/>
+          <p:nvPr/>
+        </p:nvSpPr>
+        <p:spPr>
+          <a:xfrm>
+            <a:off x="457200" y="292608"/>
+            <a:ext cx="8229600" cy="566928"/>
+          </a:xfrm>
+          <a:prstGeom prst="rect">
+            <a:avLst/>
+          </a:prstGeom>
+          <a:noFill/>
+          <a:ln/>
+        </p:spPr>
+        <p:txBody>
+          <a:bodyPr wrap="square" rtlCol="0" anchor="ctr"/>
+          <a:lstStyle/>
+          <a:p>
+            <a:pPr marL="0" indent="0" algn="l">
+              <a:buNone/>
+            </a:pPr>
+            <a:r>
+              <a:rPr lang="en-US" sz="2700" b="1" kern="0" spc="100" dirty="0">
+                <a:solidFill>
+                  <a:srgbClr val="2D1155"/>
+                </a:solidFill>
+                <a:latin typeface="Arial Black" pitchFamily="34" charset="0"/>
+                <a:ea typeface="Arial Black" pitchFamily="34" charset="-122"/>
+                <a:cs typeface="Arial Black" pitchFamily="34" charset="-120"/>
+              </a:rPr>
+              <a:t>THE COCKPIT</a:t>
+            </a:r>
+            <a:endParaRPr lang="en-US" sz="2700" dirty="0"/>
+          </a:p>
+        </p:txBody>
+      </p:sp>
+      <p:sp>
+        <p:nvSpPr>
+          <p:cNvPr id="3" name="Text 1"/>
+          <p:cNvSpPr/>
+          <p:nvPr/>
+        </p:nvSpPr>
+        <p:spPr>
+          <a:xfrm>
+            <a:off x="475488" y="896112"/>
+            <a:ext cx="8229600" cy="329184"/>
+          </a:xfrm>
+          <a:prstGeom prst="rect">
+            <a:avLst/>
+          </a:prstGeom>
+          <a:noFill/>
+          <a:ln/>
+        </p:spPr>
+        <p:txBody>
+          <a:bodyPr wrap="square" rtlCol="0" anchor="ctr"/>
+          <a:lstStyle/>
+          <a:p>
+            <a:pPr marL="0" indent="0">
+              <a:buNone/>
+            </a:pPr>
+            <a:r>
+              <a:rPr lang="en-US" sz="1300" i="1" dirty="0">
+                <a:solidFill>
+                  <a:srgbClr val="6E6389"/>
+                </a:solidFill>
+                <a:latin typeface="Calibri" pitchFamily="34" charset="0"/>
+                <a:ea typeface="Calibri" pitchFamily="34" charset="-122"/>
+                <a:cs typeface="Calibri" pitchFamily="34" charset="-120"/>
+              </a:rPr>
+              <a:t>Skill #3 — the handful of commands that put you in control.</a:t>
+            </a:r>
+            <a:endParaRPr lang="en-US" sz="1300" dirty="0"/>
+          </a:p>
+        </p:txBody>
+      </p:sp>
+      <p:pic>
+        <p:nvPicPr>
+          <p:cNvPr id="4" name="Image 0" descr="logo_icon.jpeg"/>
+          <p:cNvPicPr>
+            <a:picLocks noChangeAspect="1"/>
+          </p:cNvPicPr>
+          <p:nvPr/>
+        </p:nvPicPr>
+        <p:blipFill>
+          <a:blip r:embed="rId3"/>
+          <a:stretch>
+            <a:fillRect/>
+          </a:stretch>
+        </p:blipFill>
+        <p:spPr>
+          <a:xfrm>
+            <a:off x="8366760" y="4526280"/>
+            <a:ext cx="411480" cy="411480"/>
+          </a:xfrm>
+          <a:prstGeom prst="ellipse">
+            <a:avLst/>
+          </a:prstGeom>
+        </p:spPr>
+      </p:pic>
+      <p:sp>
+        <p:nvSpPr>
+          <p:cNvPr id="5" name="Text 2"/>
+          <p:cNvSpPr/>
+          <p:nvPr/>
+        </p:nvSpPr>
+        <p:spPr>
+          <a:xfrm>
+            <a:off x="640080" y="1481328"/>
+            <a:ext cx="2926080" cy="274320"/>
+          </a:xfrm>
+          <a:prstGeom prst="rect">
+            <a:avLst/>
+          </a:prstGeom>
+          <a:noFill/>
+          <a:ln/>
+        </p:spPr>
+        <p:txBody>
+          <a:bodyPr wrap="square" rtlCol="0" anchor="ctr"/>
+          <a:lstStyle/>
+          <a:p>
+            <a:pPr marL="0" indent="0">
+              <a:buNone/>
+            </a:pPr>
+            <a:r>
+              <a:rPr lang="en-US" sz="1000" b="1" kern="0" spc="100" dirty="0">
+                <a:solidFill>
+                  <a:srgbClr val="6E6389"/>
+                </a:solidFill>
+                <a:latin typeface="Calibri" pitchFamily="34" charset="0"/>
+                <a:ea typeface="Calibri" pitchFamily="34" charset="-122"/>
+                <a:cs typeface="Calibri" pitchFamily="34" charset="-120"/>
+              </a:rPr>
+              <a:t>WHAT YOU WANT</a:t>
+            </a:r>
+            <a:endParaRPr lang="en-US" sz="1000" dirty="0"/>
+          </a:p>
+        </p:txBody>
+      </p:sp>
+      <p:sp>
+        <p:nvSpPr>
+          <p:cNvPr id="6" name="Text 3"/>
+          <p:cNvSpPr/>
+          <p:nvPr/>
+        </p:nvSpPr>
+        <p:spPr>
+          <a:xfrm>
+            <a:off x="3749040" y="1481328"/>
+            <a:ext cx="2468880" cy="274320"/>
+          </a:xfrm>
+          <a:prstGeom prst="rect">
+            <a:avLst/>
+          </a:prstGeom>
+          <a:noFill/>
+          <a:ln/>
+        </p:spPr>
+        <p:txBody>
+          <a:bodyPr wrap="square" rtlCol="0" anchor="ctr"/>
+          <a:lstStyle/>
+          <a:p>
+            <a:pPr marL="0" indent="0">
+              <a:buNone/>
+            </a:pPr>
+            <a:r>
+              <a:rPr lang="en-US" sz="1000" b="1" kern="0" spc="100" dirty="0">
+                <a:solidFill>
+                  <a:srgbClr val="F59E0B"/>
+                </a:solidFill>
+                <a:latin typeface="Calibri" pitchFamily="34" charset="0"/>
+                <a:ea typeface="Calibri" pitchFamily="34" charset="-122"/>
+                <a:cs typeface="Calibri" pitchFamily="34" charset="-120"/>
+              </a:rPr>
+              <a:t>CLAUDE CODE</a:t>
+            </a:r>
+            <a:endParaRPr lang="en-US" sz="1000" dirty="0"/>
+          </a:p>
+        </p:txBody>
+      </p:sp>
+      <p:sp>
+        <p:nvSpPr>
+          <p:cNvPr id="7" name="Text 4"/>
+          <p:cNvSpPr/>
+          <p:nvPr/>
+        </p:nvSpPr>
+        <p:spPr>
+          <a:xfrm>
+            <a:off x="6355080" y="1481328"/>
+            <a:ext cx="2286000" cy="274320"/>
+          </a:xfrm>
+          <a:prstGeom prst="rect">
+            <a:avLst/>
+          </a:prstGeom>
+          <a:noFill/>
+          <a:ln/>
+        </p:spPr>
+        <p:txBody>
+          <a:bodyPr wrap="square" rtlCol="0" anchor="ctr"/>
+          <a:lstStyle/>
+          <a:p>
+            <a:pPr marL="0" indent="0">
+              <a:buNone/>
+            </a:pPr>
+            <a:r>
+              <a:rPr lang="en-US" sz="1000" b="1" kern="0" spc="100" dirty="0">
+                <a:solidFill>
+                  <a:srgbClr val="7C3AED"/>
+                </a:solidFill>
+                <a:latin typeface="Calibri" pitchFamily="34" charset="0"/>
+                <a:ea typeface="Calibri" pitchFamily="34" charset="-122"/>
+                <a:cs typeface="Calibri" pitchFamily="34" charset="-120"/>
+              </a:rPr>
+              <a:t>CODEX</a:t>
+            </a:r>
+            <a:endParaRPr lang="en-US" sz="1000" dirty="0"/>
+          </a:p>
+        </p:txBody>
+      </p:sp>
+      <p:sp>
+        <p:nvSpPr>
+          <p:cNvPr id="8" name="Shape 5"/>
+          <p:cNvSpPr/>
+          <p:nvPr/>
+        </p:nvSpPr>
+        <p:spPr>
+          <a:xfrm>
+            <a:off x="457200" y="1810512"/>
+            <a:ext cx="8229600" cy="603504"/>
+          </a:xfrm>
+          <a:prstGeom prst="rect">
+            <a:avLst/>
+          </a:prstGeom>
+          <a:solidFill>
+            <a:srgbClr val="DDD6FE"/>
+          </a:solidFill>
+          <a:ln/>
+        </p:spPr>
+        <p:txBody>
+          <a:bodyPr/>
+          <a:lstStyle/>
+          <a:p>
+            <a:endParaRPr lang="en-AU"/>
+          </a:p>
+        </p:txBody>
+      </p:sp>
+      <p:sp>
+        <p:nvSpPr>
+          <p:cNvPr id="9" name="Text 6"/>
+          <p:cNvSpPr/>
+          <p:nvPr/>
+        </p:nvSpPr>
+        <p:spPr>
+          <a:xfrm>
+            <a:off x="640080" y="1810512"/>
+            <a:ext cx="3017520" cy="603504"/>
+          </a:xfrm>
+          <a:prstGeom prst="rect">
+            <a:avLst/>
+          </a:prstGeom>
+          <a:noFill/>
+          <a:ln/>
+        </p:spPr>
+        <p:txBody>
+          <a:bodyPr wrap="square" rtlCol="0" anchor="ctr"/>
+          <a:lstStyle/>
+          <a:p>
+            <a:pPr marL="0" indent="0">
+              <a:buNone/>
+            </a:pPr>
+            <a:r>
+              <a:rPr lang="en-US" sz="1250" dirty="0">
+                <a:solidFill>
+                  <a:srgbClr val="2D1155"/>
+                </a:solidFill>
+                <a:latin typeface="Calibri" pitchFamily="34" charset="0"/>
+                <a:ea typeface="Calibri" pitchFamily="34" charset="-122"/>
+                <a:cs typeface="Calibri" pitchFamily="34" charset="-120"/>
+              </a:rPr>
+              <a:t>Check what it's carrying</a:t>
+            </a:r>
+            <a:endParaRPr lang="en-US" sz="1250" dirty="0"/>
+          </a:p>
+        </p:txBody>
+      </p:sp>
+      <p:sp>
+        <p:nvSpPr>
+          <p:cNvPr id="10" name="Text 7"/>
+          <p:cNvSpPr/>
+          <p:nvPr/>
+        </p:nvSpPr>
+        <p:spPr>
+          <a:xfrm>
+            <a:off x="3749040" y="1810512"/>
+            <a:ext cx="2560320" cy="603504"/>
+          </a:xfrm>
+          <a:prstGeom prst="rect">
+            <a:avLst/>
+          </a:prstGeom>
+          <a:noFill/>
+          <a:ln/>
+        </p:spPr>
+        <p:txBody>
+          <a:bodyPr wrap="square" rtlCol="0" anchor="ctr"/>
+          <a:lstStyle/>
+          <a:p>
+            <a:pPr marL="0" indent="0">
+              <a:buNone/>
+            </a:pPr>
+            <a:r>
+              <a:rPr lang="en-US" sz="1300" b="1" dirty="0">
+                <a:solidFill>
+                  <a:srgbClr val="5B21B6"/>
+                </a:solidFill>
+                <a:latin typeface="Courier New" pitchFamily="34" charset="0"/>
+                <a:ea typeface="Courier New" pitchFamily="34" charset="-122"/>
+                <a:cs typeface="Courier New" pitchFamily="34" charset="-120"/>
+              </a:rPr>
+              <a:t>/context</a:t>
+            </a:r>
+            <a:endParaRPr lang="en-US" sz="1300" dirty="0"/>
+          </a:p>
+        </p:txBody>
+      </p:sp>
+      <p:sp>
+        <p:nvSpPr>
+          <p:cNvPr id="11" name="Text 8"/>
+          <p:cNvSpPr/>
+          <p:nvPr/>
+        </p:nvSpPr>
+        <p:spPr>
+          <a:xfrm>
+            <a:off x="6355080" y="1810512"/>
+            <a:ext cx="2286000" cy="603504"/>
+          </a:xfrm>
+          <a:prstGeom prst="rect">
+            <a:avLst/>
+          </a:prstGeom>
+          <a:noFill/>
+          <a:ln/>
+        </p:spPr>
+        <p:txBody>
+          <a:bodyPr wrap="square" rtlCol="0" anchor="ctr"/>
+          <a:lstStyle/>
+          <a:p>
+            <a:pPr marL="0" indent="0">
+              <a:buNone/>
+            </a:pPr>
+            <a:r>
+              <a:rPr lang="en-US" sz="1300" b="1" dirty="0">
+                <a:solidFill>
+                  <a:srgbClr val="7C3AED"/>
+                </a:solidFill>
+                <a:latin typeface="Courier New" pitchFamily="34" charset="0"/>
+                <a:ea typeface="Courier New" pitchFamily="34" charset="-122"/>
+                <a:cs typeface="Courier New" pitchFamily="34" charset="-120"/>
+              </a:rPr>
+              <a:t>/status</a:t>
+            </a:r>
+            <a:endParaRPr lang="en-US" sz="1300" dirty="0"/>
+          </a:p>
+        </p:txBody>
+      </p:sp>
+      <p:sp>
+        <p:nvSpPr>
+          <p:cNvPr id="12" name="Shape 9"/>
+          <p:cNvSpPr/>
+          <p:nvPr/>
+        </p:nvSpPr>
+        <p:spPr>
+          <a:xfrm>
+            <a:off x="457200" y="2414016"/>
+            <a:ext cx="8229600" cy="603504"/>
+          </a:xfrm>
+          <a:prstGeom prst="rect">
+            <a:avLst/>
+          </a:prstGeom>
+          <a:solidFill>
+            <a:srgbClr val="FFFFFF"/>
+          </a:solidFill>
+          <a:ln/>
+        </p:spPr>
+        <p:txBody>
+          <a:bodyPr/>
+          <a:lstStyle/>
+          <a:p>
+            <a:endParaRPr lang="en-AU"/>
+          </a:p>
+        </p:txBody>
+      </p:sp>
+      <p:sp>
+        <p:nvSpPr>
+          <p:cNvPr id="13" name="Text 10"/>
+          <p:cNvSpPr/>
+          <p:nvPr/>
+        </p:nvSpPr>
+        <p:spPr>
+          <a:xfrm>
+            <a:off x="640080" y="2414016"/>
+            <a:ext cx="3017520" cy="603504"/>
+          </a:xfrm>
+          <a:prstGeom prst="rect">
+            <a:avLst/>
+          </a:prstGeom>
+          <a:noFill/>
+          <a:ln/>
+        </p:spPr>
+        <p:txBody>
+          <a:bodyPr wrap="square" rtlCol="0" anchor="ctr"/>
+          <a:lstStyle/>
+          <a:p>
+            <a:pPr marL="0" indent="0">
+              <a:buNone/>
+            </a:pPr>
+            <a:r>
+              <a:rPr lang="en-US" sz="1250" dirty="0">
+                <a:solidFill>
+                  <a:srgbClr val="2D1155"/>
+                </a:solidFill>
+                <a:latin typeface="Calibri" pitchFamily="34" charset="0"/>
+                <a:ea typeface="Calibri" pitchFamily="34" charset="-122"/>
+                <a:cs typeface="Calibri" pitchFamily="34" charset="-120"/>
+              </a:rPr>
+              <a:t>Pin a file into context</a:t>
+            </a:r>
+            <a:endParaRPr lang="en-US" sz="1250" dirty="0"/>
+          </a:p>
+        </p:txBody>
+      </p:sp>
+      <p:sp>
+        <p:nvSpPr>
+          <p:cNvPr id="14" name="Text 11"/>
+          <p:cNvSpPr/>
+          <p:nvPr/>
+        </p:nvSpPr>
+        <p:spPr>
+          <a:xfrm>
+            <a:off x="3749040" y="2414016"/>
+            <a:ext cx="2560320" cy="603504"/>
+          </a:xfrm>
+          <a:prstGeom prst="rect">
+            <a:avLst/>
+          </a:prstGeom>
+          <a:noFill/>
+          <a:ln/>
+        </p:spPr>
+        <p:txBody>
+          <a:bodyPr wrap="square" rtlCol="0" anchor="ctr"/>
+          <a:lstStyle/>
+          <a:p>
+            <a:pPr marL="0" indent="0">
+              <a:buNone/>
+            </a:pPr>
+            <a:r>
+              <a:rPr lang="en-US" sz="1300" b="1" dirty="0">
+                <a:solidFill>
+                  <a:srgbClr val="5B21B6"/>
+                </a:solidFill>
+                <a:latin typeface="Courier New" pitchFamily="34" charset="0"/>
+                <a:ea typeface="Courier New" pitchFamily="34" charset="-122"/>
+                <a:cs typeface="Courier New" pitchFamily="34" charset="-120"/>
+              </a:rPr>
+              <a:t>@path/to/file</a:t>
+            </a:r>
+            <a:endParaRPr lang="en-US" sz="1300" dirty="0"/>
+          </a:p>
+        </p:txBody>
+      </p:sp>
+      <p:sp>
+        <p:nvSpPr>
+          <p:cNvPr id="15" name="Text 12"/>
+          <p:cNvSpPr/>
+          <p:nvPr/>
+        </p:nvSpPr>
+        <p:spPr>
+          <a:xfrm>
+            <a:off x="6355080" y="2414016"/>
+            <a:ext cx="2286000" cy="603504"/>
+          </a:xfrm>
+          <a:prstGeom prst="rect">
+            <a:avLst/>
+          </a:prstGeom>
+          <a:noFill/>
+          <a:ln/>
+        </p:spPr>
+        <p:txBody>
+          <a:bodyPr wrap="square" rtlCol="0" anchor="ctr"/>
+          <a:lstStyle/>
+          <a:p>
+            <a:pPr marL="0" indent="0">
+              <a:buNone/>
+            </a:pPr>
+            <a:r>
+              <a:rPr lang="en-US" sz="1300" b="1" dirty="0">
+                <a:solidFill>
+                  <a:srgbClr val="7C3AED"/>
+                </a:solidFill>
+                <a:latin typeface="Courier New" pitchFamily="34" charset="0"/>
+                <a:ea typeface="Courier New" pitchFamily="34" charset="-122"/>
+                <a:cs typeface="Courier New" pitchFamily="34" charset="-120"/>
+              </a:rPr>
+              <a:t>@path/to/file</a:t>
+            </a:r>
+            <a:endParaRPr lang="en-US" sz="1300" dirty="0"/>
+          </a:p>
+        </p:txBody>
+      </p:sp>
+      <p:sp>
+        <p:nvSpPr>
+          <p:cNvPr id="16" name="Shape 13"/>
+          <p:cNvSpPr/>
+          <p:nvPr/>
+        </p:nvSpPr>
+        <p:spPr>
+          <a:xfrm>
+            <a:off x="457200" y="3017520"/>
+            <a:ext cx="8229600" cy="603504"/>
+          </a:xfrm>
+          <a:prstGeom prst="rect">
+            <a:avLst/>
+          </a:prstGeom>
+          <a:solidFill>
+            <a:srgbClr val="DDD6FE"/>
+          </a:solidFill>
+          <a:ln/>
+        </p:spPr>
+        <p:txBody>
+          <a:bodyPr/>
+          <a:lstStyle/>
+          <a:p>
+            <a:endParaRPr lang="en-AU"/>
+          </a:p>
+        </p:txBody>
+      </p:sp>
+      <p:sp>
+        <p:nvSpPr>
+          <p:cNvPr id="17" name="Text 14"/>
+          <p:cNvSpPr/>
+          <p:nvPr/>
+        </p:nvSpPr>
+        <p:spPr>
+          <a:xfrm>
+            <a:off x="640080" y="3017520"/>
+            <a:ext cx="3017520" cy="603504"/>
+          </a:xfrm>
+          <a:prstGeom prst="rect">
+            <a:avLst/>
+          </a:prstGeom>
+          <a:noFill/>
+          <a:ln/>
+        </p:spPr>
+        <p:txBody>
+          <a:bodyPr wrap="square" rtlCol="0" anchor="ctr"/>
+          <a:lstStyle/>
+          <a:p>
+            <a:pPr marL="0" indent="0">
+              <a:buNone/>
+            </a:pPr>
+            <a:r>
+              <a:rPr lang="en-US" sz="1250" dirty="0">
+                <a:solidFill>
+                  <a:srgbClr val="2D1155"/>
+                </a:solidFill>
+                <a:latin typeface="Calibri" pitchFamily="34" charset="0"/>
+                <a:ea typeface="Calibri" pitchFamily="34" charset="-122"/>
+                <a:cs typeface="Calibri" pitchFamily="34" charset="-120"/>
+              </a:rPr>
+              <a:t>Trim a bloated context</a:t>
+            </a:r>
+            <a:endParaRPr lang="en-US" sz="1250" dirty="0"/>
+          </a:p>
+        </p:txBody>
+      </p:sp>
+      <p:sp>
+        <p:nvSpPr>
+          <p:cNvPr id="18" name="Text 15"/>
+          <p:cNvSpPr/>
+          <p:nvPr/>
+        </p:nvSpPr>
+        <p:spPr>
+          <a:xfrm>
+            <a:off x="3749040" y="3017520"/>
+            <a:ext cx="2560320" cy="603504"/>
+          </a:xfrm>
+          <a:prstGeom prst="rect">
+            <a:avLst/>
+          </a:prstGeom>
+          <a:noFill/>
+          <a:ln/>
+        </p:spPr>
+        <p:txBody>
+          <a:bodyPr wrap="square" rtlCol="0" anchor="ctr"/>
+          <a:lstStyle/>
+          <a:p>
+            <a:pPr marL="0" indent="0">
+              <a:buNone/>
+            </a:pPr>
+            <a:r>
+              <a:rPr lang="en-US" sz="1300" b="1" dirty="0">
+                <a:solidFill>
+                  <a:srgbClr val="5B21B6"/>
+                </a:solidFill>
+                <a:latin typeface="Courier New" pitchFamily="34" charset="0"/>
+                <a:ea typeface="Courier New" pitchFamily="34" charset="-122"/>
+                <a:cs typeface="Courier New" pitchFamily="34" charset="-120"/>
+              </a:rPr>
+              <a:t>/compact</a:t>
+            </a:r>
+            <a:endParaRPr lang="en-US" sz="1300" dirty="0"/>
+          </a:p>
+        </p:txBody>
+      </p:sp>
+      <p:sp>
+        <p:nvSpPr>
+          <p:cNvPr id="19" name="Text 16"/>
+          <p:cNvSpPr/>
+          <p:nvPr/>
+        </p:nvSpPr>
+        <p:spPr>
+          <a:xfrm>
+            <a:off x="6355080" y="3017520"/>
+            <a:ext cx="2286000" cy="603504"/>
+          </a:xfrm>
+          <a:prstGeom prst="rect">
+            <a:avLst/>
+          </a:prstGeom>
+          <a:noFill/>
+          <a:ln/>
+        </p:spPr>
+        <p:txBody>
+          <a:bodyPr wrap="square" rtlCol="0" anchor="ctr"/>
+          <a:lstStyle/>
+          <a:p>
+            <a:pPr marL="0" indent="0">
+              <a:buNone/>
+            </a:pPr>
+            <a:r>
+              <a:rPr lang="en-US" sz="1300" b="1" dirty="0">
+                <a:solidFill>
+                  <a:srgbClr val="7C3AED"/>
+                </a:solidFill>
+                <a:latin typeface="Courier New" pitchFamily="34" charset="0"/>
+                <a:ea typeface="Courier New" pitchFamily="34" charset="-122"/>
+                <a:cs typeface="Courier New" pitchFamily="34" charset="-120"/>
+              </a:rPr>
+              <a:t>/compact</a:t>
+            </a:r>
+            <a:endParaRPr lang="en-US" sz="1300" dirty="0"/>
+          </a:p>
+        </p:txBody>
+      </p:sp>
+      <p:sp>
+        <p:nvSpPr>
+          <p:cNvPr id="20" name="Shape 17"/>
+          <p:cNvSpPr/>
+          <p:nvPr/>
+        </p:nvSpPr>
+        <p:spPr>
+          <a:xfrm>
+            <a:off x="457200" y="3621024"/>
+            <a:ext cx="8229600" cy="603504"/>
+          </a:xfrm>
+          <a:prstGeom prst="rect">
+            <a:avLst/>
+          </a:prstGeom>
+          <a:solidFill>
+            <a:srgbClr val="FFFFFF"/>
+          </a:solidFill>
+          <a:ln/>
+        </p:spPr>
+        <p:txBody>
+          <a:bodyPr/>
+          <a:lstStyle/>
+          <a:p>
+            <a:endParaRPr lang="en-AU"/>
+          </a:p>
+        </p:txBody>
+      </p:sp>
+      <p:sp>
+        <p:nvSpPr>
+          <p:cNvPr id="21" name="Text 18"/>
+          <p:cNvSpPr/>
+          <p:nvPr/>
+        </p:nvSpPr>
+        <p:spPr>
+          <a:xfrm>
+            <a:off x="640080" y="3621024"/>
+            <a:ext cx="3017520" cy="603504"/>
+          </a:xfrm>
+          <a:prstGeom prst="rect">
+            <a:avLst/>
+          </a:prstGeom>
+          <a:noFill/>
+          <a:ln/>
+        </p:spPr>
+        <p:txBody>
+          <a:bodyPr wrap="square" rtlCol="0" anchor="ctr"/>
+          <a:lstStyle/>
+          <a:p>
+            <a:pPr marL="0" indent="0">
+              <a:buNone/>
+            </a:pPr>
+            <a:r>
+              <a:rPr lang="en-US" sz="1250" dirty="0">
+                <a:solidFill>
+                  <a:srgbClr val="2D1155"/>
+                </a:solidFill>
+                <a:latin typeface="Calibri" pitchFamily="34" charset="0"/>
+                <a:ea typeface="Calibri" pitchFamily="34" charset="-122"/>
+                <a:cs typeface="Calibri" pitchFamily="34" charset="-120"/>
+              </a:rPr>
+              <a:t>Start fresh</a:t>
+            </a:r>
+            <a:endParaRPr lang="en-US" sz="1250" dirty="0"/>
+          </a:p>
+        </p:txBody>
+      </p:sp>
+      <p:sp>
+        <p:nvSpPr>
+          <p:cNvPr id="22" name="Text 19"/>
+          <p:cNvSpPr/>
+          <p:nvPr/>
+        </p:nvSpPr>
+        <p:spPr>
+          <a:xfrm>
+            <a:off x="3749040" y="3621024"/>
+            <a:ext cx="2560320" cy="603504"/>
+          </a:xfrm>
+          <a:prstGeom prst="rect">
+            <a:avLst/>
+          </a:prstGeom>
+          <a:noFill/>
+          <a:ln/>
+        </p:spPr>
+        <p:txBody>
+          <a:bodyPr wrap="square" rtlCol="0" anchor="ctr"/>
+          <a:lstStyle/>
+          <a:p>
+            <a:pPr marL="0" indent="0">
+              <a:buNone/>
+            </a:pPr>
+            <a:r>
+              <a:rPr lang="en-US" sz="1300" b="1" dirty="0">
+                <a:solidFill>
+                  <a:srgbClr val="5B21B6"/>
+                </a:solidFill>
+                <a:latin typeface="Courier New" pitchFamily="34" charset="0"/>
+                <a:ea typeface="Courier New" pitchFamily="34" charset="-122"/>
+                <a:cs typeface="Courier New" pitchFamily="34" charset="-120"/>
+              </a:rPr>
+              <a:t>/clear</a:t>
+            </a:r>
+            <a:endParaRPr lang="en-US" sz="1300" dirty="0"/>
+          </a:p>
+        </p:txBody>
+      </p:sp>
+      <p:sp>
+        <p:nvSpPr>
+          <p:cNvPr id="23" name="Text 20"/>
+          <p:cNvSpPr/>
+          <p:nvPr/>
+        </p:nvSpPr>
+        <p:spPr>
+          <a:xfrm>
+            <a:off x="6355080" y="3621024"/>
+            <a:ext cx="2286000" cy="603504"/>
+          </a:xfrm>
+          <a:prstGeom prst="rect">
+            <a:avLst/>
+          </a:prstGeom>
+          <a:noFill/>
+          <a:ln/>
+        </p:spPr>
+        <p:txBody>
+          <a:bodyPr wrap="square" rtlCol="0" anchor="ctr"/>
+          <a:lstStyle/>
+          <a:p>
+            <a:pPr marL="0" indent="0">
+              <a:buNone/>
+            </a:pPr>
+            <a:r>
+              <a:rPr lang="en-US" sz="1300" b="1" dirty="0">
+                <a:solidFill>
+                  <a:srgbClr val="7C3AED"/>
+                </a:solidFill>
+                <a:latin typeface="Courier New" pitchFamily="34" charset="0"/>
+                <a:ea typeface="Courier New" pitchFamily="34" charset="-122"/>
+                <a:cs typeface="Courier New" pitchFamily="34" charset="-120"/>
+              </a:rPr>
+              <a:t>new session</a:t>
+            </a:r>
+            <a:endParaRPr lang="en-US" sz="1300" dirty="0"/>
+          </a:p>
+        </p:txBody>
+      </p:sp>
+      <p:sp>
+        <p:nvSpPr>
+          <p:cNvPr id="24" name="Text 21"/>
+          <p:cNvSpPr/>
+          <p:nvPr/>
+        </p:nvSpPr>
+        <p:spPr>
+          <a:xfrm>
+            <a:off x="457200" y="4370832"/>
+            <a:ext cx="8229600" cy="320040"/>
+          </a:xfrm>
+          <a:prstGeom prst="rect">
+            <a:avLst/>
+          </a:prstGeom>
+          <a:noFill/>
+          <a:ln/>
+        </p:spPr>
+        <p:txBody>
+          <a:bodyPr wrap="square" rtlCol="0" anchor="ctr"/>
+          <a:lstStyle/>
+          <a:p>
+            <a:pPr marL="0" indent="0">
+              <a:buNone/>
+            </a:pPr>
+            <a:r>
+              <a:rPr lang="en-US" sz="1150" i="1" dirty="0">
+                <a:solidFill>
+                  <a:srgbClr val="6E6389"/>
+                </a:solidFill>
+                <a:latin typeface="Calibri" pitchFamily="34" charset="0"/>
+                <a:ea typeface="Calibri" pitchFamily="34" charset="-122"/>
+                <a:cs typeface="Calibri" pitchFamily="34" charset="-120"/>
+              </a:rPr>
+              <a:t>You don't need to memorise these — just know they exist and reach for them when answers go vague.</a:t>
+            </a:r>
+            <a:endParaRPr lang="en-US" sz="1150" dirty="0"/>
           </a:p>
         </p:txBody>
       </p:sp>

--- a/docs/TCA-Vibe-Coding.pptx
+++ b/docs/TCA-Vibe-Coding.pptx
@@ -5,25 +5,27 @@
     <p:sldMasterId id="2147483648" r:id="rId1"/>
   </p:sldMasterIdLst>
   <p:notesMasterIdLst>
-    <p:notesMasterId r:id="rId18"/>
+    <p:notesMasterId r:id="rId20"/>
   </p:notesMasterIdLst>
   <p:sldIdLst>
     <p:sldId id="256" r:id="rId2"/>
-    <p:sldId id="258" r:id="rId3"/>
-    <p:sldId id="259" r:id="rId4"/>
-    <p:sldId id="260" r:id="rId5"/>
-    <p:sldId id="261" r:id="rId6"/>
-    <p:sldId id="262" r:id="rId7"/>
-    <p:sldId id="263" r:id="rId8"/>
-    <p:sldId id="264" r:id="rId9"/>
-    <p:sldId id="265" r:id="rId10"/>
-    <p:sldId id="266" r:id="rId11"/>
-    <p:sldId id="267" r:id="rId12"/>
-    <p:sldId id="268" r:id="rId13"/>
-    <p:sldId id="269" r:id="rId14"/>
-    <p:sldId id="270" r:id="rId15"/>
-    <p:sldId id="271" r:id="rId16"/>
-    <p:sldId id="272" r:id="rId17"/>
+    <p:sldId id="274" r:id="rId3"/>
+    <p:sldId id="275" r:id="rId4"/>
+    <p:sldId id="258" r:id="rId5"/>
+    <p:sldId id="259" r:id="rId6"/>
+    <p:sldId id="260" r:id="rId7"/>
+    <p:sldId id="261" r:id="rId8"/>
+    <p:sldId id="262" r:id="rId9"/>
+    <p:sldId id="263" r:id="rId10"/>
+    <p:sldId id="264" r:id="rId11"/>
+    <p:sldId id="265" r:id="rId12"/>
+    <p:sldId id="266" r:id="rId13"/>
+    <p:sldId id="267" r:id="rId14"/>
+    <p:sldId id="268" r:id="rId15"/>
+    <p:sldId id="269" r:id="rId16"/>
+    <p:sldId id="270" r:id="rId17"/>
+    <p:sldId id="271" r:id="rId18"/>
+    <p:sldId id="272" r:id="rId19"/>
   </p:sldIdLst>
   <p:sldSz cx="9144000" cy="5143500" type="screen16x9"/>
   <p:notesSz cx="5143500" cy="9144000"/>
@@ -388,11 +390,12 @@
           <a:p>
             <a:r>
               <a:rPr lang="en-US" dirty="0"/>
-              <a:t>CONTEXT (2:00). Metaphor: context is fuel, with a gauge. Three states.
-Too little: not told enough, so it guesses - wrong file, invented convention, confident nonsense. Fix by pinning with @ and stating the goal.
-Just right: the files that matter are pinned, the task is in view, nothing extra. Live here.
-Too much: long rambling session, old unrelated stuff still in the window, slow and leaking into answers. Fix with /compact, or /clear and start fresh.
-Tie back: the cockpit commands keep the gauge in the green. When an answer goes vague or off-topic, 90% of the time it's context, not intelligence.</a:t>
+              <a:t>SKILL #2 (2:30). Lead with the "what changed" - half the room learned the old way.
+A year ago, plan mode was about MECHANICS: you forced a plan because left alone it charged in and made a mess, and you read for dumb structural mistakes. 2025 models genuinely planned clumsily.
+That's mostly over. Modern agents decompose and sequence well. If you're still checking whether it put the loop in the right file, you're auditing a problem it rarely has.
+The risk FLIPPED. The dangerous plan today isn't messy - it's clean, confident, and aimed at slightly the wrong target. A tidy plan for the wrong problem is more dangerous than an obviously bad one - it doesn't trip your alarm.
+So the review moved UP: read for INTENT and SCOPE. Did it get the real goal? Touching more than it should? What did it assume that I never said?
+Confident engineers: a good-looking plan lulls you. Rusty: good news - "is this even the right problem" is exactly your strength, and it's what matters most now. Keys unchanged.</a:t>
             </a:r>
           </a:p>
         </p:txBody>
@@ -479,10 +482,11 @@
           <a:p>
             <a:r>
               <a:rPr lang="en-US" dirty="0"/>
-              <a:t>SKILL #4 (2:00). Set expectations: it WILL break. The first build won't be perfect. Normal, not failure.
-Wrong instinct (left): open the file, read the trace, start fixing. Two problems - you grabbed the keyboard, and the agent's mental model is now stale because you changed things behind its back. You made it worse.
-Right move (right): treat it like a colleague on a call who can't see your screen. Paste the exact error. Describe the behaviour: "streak shows 3, ticked it, still 3." Describe what you SAW, not what to CHANGE. The moment you say "change line 40" you're micromanaging again.
-You are the eyes; it is the hands. Report what the eyes see.</a:t>
+              <a:t>SKILL #3 (2:30). "The cockpit" - not the whole plane, just the dials a pilot actually watches. Lean on the top three (context); move fast on the rest.
+/context (Claude) or /status (Codex): shows what it's holding in its head right now. Context is finite. When answers drift, check this first.
+@path: pins an exact file so it stops guessing which file you mean. Keeps context lean. Identical in both tools.
+/compact: summarise and trim a bloated conversation. /clear or fresh session: wipe the slate for an unrelated task so old context doesn't leak.
+Reassurance: you don't memorise this, you just reach for the dials when it goes vague. That's the difference between flying the tool and being flown by it.</a:t>
             </a:r>
           </a:p>
         </p:txBody>
@@ -569,8 +573,11 @@
           <a:p>
             <a:r>
               <a:rPr lang="en-US" dirty="0"/>
-              <a:t>SKILL #5 (1:00). Fast. You never touched git by hand - you asked, the agent did it. "You just shipped without writing a line."
-Two nets, name both - they'll rely on them in the lab. Small commits = personal undo; a bad turn is one revert away, so you can be brave. Checkpoints = OUR net for the day (known-good tags). Fall behind or make a mess, reset and rejoin. Say it clearly: reaching for a checkpoint is expected and fine. Nobody gets stranded.</a:t>
+              <a:t>CONTEXT (2:00). Metaphor: context is fuel, with a gauge. Three states.
+Too little: not told enough, so it guesses - wrong file, invented convention, confident nonsense. Fix by pinning with @ and stating the goal.
+Just right: the files that matter are pinned, the task is in view, nothing extra. Live here.
+Too much: long rambling session, old unrelated stuff still in the window, slow and leaking into answers. Fix with /compact, or /clear and start fresh.
+Tie back: the cockpit commands keep the gauge in the green. When an answer goes vague or off-topic, 90% of the time it's context, not intelligence.</a:t>
             </a:r>
           </a:p>
         </p:txBody>
@@ -657,11 +664,12 @@
           <a:p>
             <a:r>
               <a:rPr lang="en-US" dirty="0"/>
-              <a:t>WHAT CHANGED (2:30). Zoom out - the VP-in-the-room slide, and for anyone who's been away: here's how the ground shifted.
-PLANNING - just covered: from "make it plan, check the steps" to "it plans fine, check it understood the right problem." Anchor, don't re-teach.
-CONTEXT - a year ago windows were small and you pruned constantly to stop it forgetting. Now windows are repo-scale and memory persists. But that made context ENGINEERING the discipline, not an afterthought. Most agent failures in the field now trace to context drift and stale memory, not the model being dim. (If asked for a number: industry write-ups put the majority of enterprise agent failures on context, not capability - directional, not gospel.)
-AGENTS - a year ago it was you and one chat. Now both tools run teams: Codex spins up parallel subagents; Claude Code runs Agent Teams sharing a task list and messaging each other. That's your Section 3 this afternoon - plant it.
-Close line - the through-thread of the whole day: the mechanical part got automated, so the human skill moved UP - intent, context, verification. Same reason the returning engineer isn't behind.</a:t>
+              <a:t>SKILL #3 (2:30). "The cockpit" - not the whole plane, just the dials a pilot actually watches. Frame it as four verbs, not a list of commands to memorise: SEE, LOAD, TRIM, RESET. Those four are the entire discipline of managing the window.
+SEE - /context (Claude) or /status (Codex). Shows what it is holding right now, and how full the window is. When answers drift, check this first, before you re-explain anything.
+LOAD - @path. This is the half people skip. It is not a file-picker convenience: it is you deciding what goes in the window instead of letting the agent search and guess. Cheapest fix for a vague answer is usually loading the right file, not writing a longer prompt. Identical in both tools.
+TRIM - /compact. Summarises the conversation so far and drops the stale detail, keeping the thread but reclaiming space. RESET - /clear, or a fresh session in Codex. Use it whenever you change task, so nothing leaks across.
+The rule of thumb to say out loud: new task means new window. Most people never reset, then blame the model.
+Reassurance: you do not memorise this, you reach for a dial when it goes vague. That is the difference between flying the tool and being flown by it.</a:t>
             </a:r>
           </a:p>
         </p:txBody>
@@ -748,10 +756,11 @@
           <a:p>
             <a:r>
               <a:rPr lang="en-US" dirty="0"/>
-              <a:t>TAKEAWAYS (1:30). Mirror of slide 2, now as outcomes.
-Rusty: the win is confidence. You'll feel the loop, the tools stop being scary, and you'll rediscover that your judgement is the valuable part.
-Confident: the win is restraint. You'll feel the tension of directing, catch your keyboard reflex, and - the surprise - get further by doing less.
-Lab reflection prompts: "Where did you reach for the keyboard, and what happened when you didn't?" "Where did you accept output without reading it - what risk did you take?"</a:t>
+              <a:t>CONTEXT (2:00). Context is fuel and there is a gauge. Three states, and each one has a move attached - this slide is the diagnostic for the cockpit you just showed them.
+Too little: it was never told enough, so it fills the gap by guessing - wrong file, invented convention, confident nonsense. The move is LOAD. Point out that this failure looks like stupidity and is actually starvation.
+Just right: one task, only the files that task touches, nothing left over. The move is HOLD - stay here. This is the state you are trying to keep them in all morning.
+Too much: the window is full, it is slow, and unrelated old threads bleed into new answers. The move is TRIM, then RESET if that is not enough.
+Tie back hard: when an answer goes vague or off-topic, it is a context problem about 90% of the time, not an intelligence problem. Check the gauge before you argue with the model.</a:t>
             </a:r>
           </a:p>
         </p:txBody>
@@ -838,9 +847,11 @@
           <a:p>
             <a:r>
               <a:rPr lang="en-US" dirty="0"/>
-              <a:t>GOLDEN RULES (1:30). Leave this up while they open terminals. Read briskly - they've heard them all.
-1 Resist the keyboard. 2 Prompt by outcome. 3 Plan review not writing. 4 Report symptoms. 5 Commit small, use checkpoints.
-Then bridge to the close.</a:t>
+              <a:t>WHAT CHANGED (2:30). Zoom out - the VP-in-the-room slide, and for anyone who's been away: here's how the ground shifted.
+PLANNING - just covered: from "make it plan, check the steps" to "it plans fine, check it understood the right problem." Anchor, don't re-teach.
+CONTEXT - a year ago windows were small and you pruned constantly to stop it forgetting. Now windows are repo-scale and memory persists. But that made context ENGINEERING the discipline, not an afterthought. Most agent failures in the field now trace to context drift and stale memory, not the model being dim. (If asked for a number: industry write-ups put the majority of enterprise agent failures on context, not capability - directional, not gospel.)
+AGENTS - a year ago it was you and one chat. Now both tools run teams: Codex spins up parallel subagents; Claude Code runs Agent Teams sharing a task list and messaging each other. That's your Section 3 this afternoon - plant it.
+Close line - the through-thread of the whole day: the mechanical part got automated, so the human skill moved UP - intent, context, verification. Same reason the returning engineer isn't behind.</a:t>
             </a:r>
           </a:p>
         </p:txBody>
@@ -925,7 +936,13 @@
           <a:bodyPr/>
           <a:lstStyle/>
           <a:p>
-            <a:endParaRPr lang="en-US" dirty="0"/>
+            <a:r>
+              <a:rPr lang="en-US" dirty="0"/>
+              <a:t>TAKEAWAYS (1:30). Mirror of slide 2, now as outcomes.
+Rusty: the win is confidence. You'll feel the loop, the tools stop being scary, and you'll rediscover that your judgement is the valuable part.
+Confident: the win is restraint. You'll feel the tension of directing, catch your keyboard reflex, and - the surprise - get further by doing less.
+Lab reflection prompts: "Where did you reach for the keyboard, and what happened when you didn't?" "Where did you accept output without reading it - what risk did you take?"</a:t>
+            </a:r>
           </a:p>
         </p:txBody>
       </p:sp>
@@ -947,6 +964,179 @@
             <a:fld id="{F7021451-1387-4CA6-816F-3879F97B5CBC}" type="slidenum">
               <a:rPr lang="en-US"/>
               <a:t>16</a:t>
+            </a:fld>
+            <a:endParaRPr lang="en-US"/>
+          </a:p>
+        </p:txBody>
+      </p:sp>
+    </p:spTree>
+    <p:extLst>
+      <p:ext uri="{BB962C8B-B14F-4D97-AF65-F5344CB8AC3E}">
+        <p14:creationId xmlns:p14="http://schemas.microsoft.com/office/powerpoint/2010/main" val="1024086991"/>
+      </p:ext>
+    </p:extLst>
+  </p:cSld>
+  <p:clrMapOvr>
+    <a:masterClrMapping/>
+  </p:clrMapOvr>
+</p:notes>
+</file>
+
+<file path=ppt/notesSlides/notesSlide17.xml><?xml version="1.0" encoding="utf-8"?>
+<p:notes xmlns:a="http://schemas.openxmlformats.org/drawingml/2006/main" xmlns:r="http://schemas.openxmlformats.org/officeDocument/2006/relationships" xmlns:p="http://schemas.openxmlformats.org/presentationml/2006/main">
+  <p:cSld>
+    <p:spTree>
+      <p:nvGrpSpPr>
+        <p:cNvPr id="1" name=""/>
+        <p:cNvGrpSpPr/>
+        <p:nvPr/>
+      </p:nvGrpSpPr>
+      <p:grpSpPr>
+        <a:xfrm>
+          <a:off x="0" y="0"/>
+          <a:ext cx="0" cy="0"/>
+          <a:chOff x="0" y="0"/>
+          <a:chExt cx="0" cy="0"/>
+        </a:xfrm>
+      </p:grpSpPr>
+      <p:sp>
+        <p:nvSpPr>
+          <p:cNvPr id="2" name="Slide Image Placeholder 1"/>
+          <p:cNvSpPr>
+            <a:spLocks noGrp="1" noRot="1" noChangeAspect="1"/>
+          </p:cNvSpPr>
+          <p:nvPr>
+            <p:ph type="sldImg"/>
+          </p:nvPr>
+        </p:nvSpPr>
+        <p:spPr/>
+      </p:sp>
+      <p:sp>
+        <p:nvSpPr>
+          <p:cNvPr id="3" name="Notes Placeholder 2"/>
+          <p:cNvSpPr>
+            <a:spLocks noGrp="1"/>
+          </p:cNvSpPr>
+          <p:nvPr>
+            <p:ph type="body" idx="1"/>
+          </p:nvPr>
+        </p:nvSpPr>
+        <p:spPr/>
+        <p:txBody>
+          <a:bodyPr/>
+          <a:lstStyle/>
+          <a:p>
+            <a:r>
+              <a:rPr lang="en-US" dirty="0"/>
+              <a:t>GOLDEN RULES (1:30). Leave this up while they open terminals. Read briskly - they've heard them all.
+1 Resist the keyboard. 2 Prompt by outcome. 3 Plan review not writing. 4 Report symptoms. 5 Commit small, use checkpoints.
+Then bridge to the close.</a:t>
+            </a:r>
+          </a:p>
+        </p:txBody>
+      </p:sp>
+      <p:sp>
+        <p:nvSpPr>
+          <p:cNvPr id="4" name="Slide Number Placeholder 3"/>
+          <p:cNvSpPr>
+            <a:spLocks noGrp="1"/>
+          </p:cNvSpPr>
+          <p:nvPr>
+            <p:ph type="sldNum" sz="quarter" idx="10"/>
+          </p:nvPr>
+        </p:nvSpPr>
+        <p:spPr/>
+        <p:txBody>
+          <a:bodyPr/>
+          <a:lstStyle/>
+          <a:p>
+            <a:fld id="{F7021451-1387-4CA6-816F-3879F97B5CBC}" type="slidenum">
+              <a:rPr lang="en-US"/>
+              <a:t>17</a:t>
+            </a:fld>
+            <a:endParaRPr lang="en-US"/>
+          </a:p>
+        </p:txBody>
+      </p:sp>
+    </p:spTree>
+    <p:extLst>
+      <p:ext uri="{BB962C8B-B14F-4D97-AF65-F5344CB8AC3E}">
+        <p14:creationId xmlns:p14="http://schemas.microsoft.com/office/powerpoint/2010/main" val="1024086991"/>
+      </p:ext>
+    </p:extLst>
+  </p:cSld>
+  <p:clrMapOvr>
+    <a:masterClrMapping/>
+  </p:clrMapOvr>
+</p:notes>
+</file>
+
+<file path=ppt/notesSlides/notesSlide18.xml><?xml version="1.0" encoding="utf-8"?>
+<p:notes xmlns:a="http://schemas.openxmlformats.org/drawingml/2006/main" xmlns:r="http://schemas.openxmlformats.org/officeDocument/2006/relationships" xmlns:p="http://schemas.openxmlformats.org/presentationml/2006/main">
+  <p:cSld>
+    <p:spTree>
+      <p:nvGrpSpPr>
+        <p:cNvPr id="1" name=""/>
+        <p:cNvGrpSpPr/>
+        <p:nvPr/>
+      </p:nvGrpSpPr>
+      <p:grpSpPr>
+        <a:xfrm>
+          <a:off x="0" y="0"/>
+          <a:ext cx="0" cy="0"/>
+          <a:chOff x="0" y="0"/>
+          <a:chExt cx="0" cy="0"/>
+        </a:xfrm>
+      </p:grpSpPr>
+      <p:sp>
+        <p:nvSpPr>
+          <p:cNvPr id="2" name="Slide Image Placeholder 1"/>
+          <p:cNvSpPr>
+            <a:spLocks noGrp="1" noRot="1" noChangeAspect="1"/>
+          </p:cNvSpPr>
+          <p:nvPr>
+            <p:ph type="sldImg"/>
+          </p:nvPr>
+        </p:nvSpPr>
+        <p:spPr/>
+      </p:sp>
+      <p:sp>
+        <p:nvSpPr>
+          <p:cNvPr id="3" name="Notes Placeholder 2"/>
+          <p:cNvSpPr>
+            <a:spLocks noGrp="1"/>
+          </p:cNvSpPr>
+          <p:nvPr>
+            <p:ph type="body" idx="1"/>
+          </p:nvPr>
+        </p:nvSpPr>
+        <p:spPr/>
+        <p:txBody>
+          <a:bodyPr/>
+          <a:lstStyle/>
+          <a:p>
+            <a:endParaRPr lang="en-US" dirty="0"/>
+          </a:p>
+        </p:txBody>
+      </p:sp>
+      <p:sp>
+        <p:nvSpPr>
+          <p:cNvPr id="4" name="Slide Number Placeholder 3"/>
+          <p:cNvSpPr>
+            <a:spLocks noGrp="1"/>
+          </p:cNvSpPr>
+          <p:nvPr>
+            <p:ph type="sldNum" sz="quarter" idx="10"/>
+          </p:nvPr>
+        </p:nvSpPr>
+        <p:spPr/>
+        <p:txBody>
+          <a:bodyPr/>
+          <a:lstStyle/>
+          <a:p>
+            <a:fld id="{F7021451-1387-4CA6-816F-3879F97B5CBC}" type="slidenum">
+              <a:rPr lang="en-US"/>
+              <a:t>18</a:t>
             </a:fld>
             <a:endParaRPr lang="en-US"/>
           </a:p>
@@ -1011,8 +1201,10 @@
           <a:p>
             <a:r>
               <a:rPr lang="en-US" dirty="0"/>
-              <a:t>THE LADDER (1:15). Each rung removes a different crutch. Rung 1 (now): lean fully on the agent, ugly is fine. Rung 2: make it behave the same tomorrow. Rung 3: stop trusting it, build harnesses.
-The point of the day is the change in your RELATIONSHIP to the code, not the app. This morning: "you drive, I direct." Don't over-explain 2 and 3.</a:t>
+              <a:t>THE REVEAL (1:30). Ask first: "Who here thinks a prompt is the thing you type?" Let them nod, then show the right-hand side.
+ChatGPT's breakthrough wasn't a smarter model - GPT-3 could already do this. It was the interface trick: split one text stream into two authored halves. The builder writes one half, you write the other, and the model reads them stapled together as a single block.
+Land the bottom line hard: the model has no idea which words came from whom. There is no privileged channel. It is one box, read top to bottom. Every safety, persona and tool behaviour you have ever seen is just text someone put above your line.
+Don't take questions on jailbreaks or prompt injection here - say "that's exactly why this matters" and move on. Next slide opens the box up.</a:t>
             </a:r>
           </a:p>
         </p:txBody>
@@ -1032,7 +1224,7 @@
           <a:bodyPr/>
           <a:lstStyle/>
           <a:p>
-            <a:fld id="{F7021451-1387-4CA6-816F-3879F97B5CBC}" type="slidenum">
+            <a:fld id="{F2809971-C818-43DD-B517-2093CF415FE7}" type="slidenum">
               <a:rPr lang="en-US"/>
               <a:t>2</a:t>
             </a:fld>
@@ -1043,7 +1235,7 @@
     </p:spTree>
     <p:extLst>
       <p:ext uri="{BB962C8B-B14F-4D97-AF65-F5344CB8AC3E}">
-        <p14:creationId xmlns:p14="http://schemas.microsoft.com/office/powerpoint/2010/main" val="1024086991"/>
+        <p14:creationId xmlns:p14="http://schemas.microsoft.com/office/powerpoint/2010/main" val="1500142542"/>
       </p:ext>
     </p:extLst>
   </p:cSld>
@@ -1099,8 +1291,11 @@
           <a:p>
             <a:r>
               <a:rPr lang="en-US" dirty="0"/>
-              <a:t>DEFINITION (1:15). Vibe coding = using the tool. That's the whole definition today.
-The mindset shift is the money line. Read both quotes aloud. Old question = implementation. New question = outcome. All day we push from "how" to "what". For the confident engineers this is the uncomfortable one - you're good at "how".</a:t>
+              <a:t>CONTEXT ENGINEERING (2:00 - core slide). Point at the stack, bottom to top. The only bar they control by typing is the amber one. Everything above it was assembled for them, before they hit enter.
+Now do the demystifying: walk the two violet bars. RAG is not a technology the model knows about - it's a search that runs first and pastes results into the stack. MCP is not the model reaching out - it's a tool call whose output gets pasted into the stack. Memory files are the same move, pasted from disk.
+The money line: every fancy acronym is an automated way to write a better system prompt. That's it. If they remember one thing from this slide, that's the one.
+Then the constraint on the right - the window is finite. This is the hook into /context later this morning, and into 'CONTEXT IS THE FUEL'. Most agent failures they'll hit today are context problems, not intelligence problems.
+Ask the room: "So what's the skill?" (Answer: deciding what goes in, in what order, and what stays out.) That's the whole discipline, and it's why we're not teaching you to type code.</a:t>
             </a:r>
           </a:p>
         </p:txBody>
@@ -1120,7 +1315,7 @@
           <a:bodyPr/>
           <a:lstStyle/>
           <a:p>
-            <a:fld id="{F7021451-1387-4CA6-816F-3879F97B5CBC}" type="slidenum">
+            <a:fld id="{A7ED5826-E960-41A7-9F26-56D1AFDE46B4}" type="slidenum">
               <a:rPr lang="en-US"/>
               <a:t>3</a:t>
             </a:fld>
@@ -1131,7 +1326,7 @@
     </p:spTree>
     <p:extLst>
       <p:ext uri="{BB962C8B-B14F-4D97-AF65-F5344CB8AC3E}">
-        <p14:creationId xmlns:p14="http://schemas.microsoft.com/office/powerpoint/2010/main" val="1024086991"/>
+        <p14:creationId xmlns:p14="http://schemas.microsoft.com/office/powerpoint/2010/main" val="1500150461"/>
       </p:ext>
     </p:extLst>
   </p:cSld>
@@ -1187,10 +1382,8 @@
           <a:p>
             <a:r>
               <a:rPr lang="en-US" dirty="0"/>
-              <a:t>THE LOOP (2:45 - core slide). Walk left to right. 1 PROMPT you say what you want. 2 GENERATE it writes. 3 RUN it executes/tests. 4 OBSERVE you look at what actually happened. 5 REACT you respond, go again.
-Most important point: your work is 1, 4, 5 - prompt, observe, react. Steps 2 and 3 belong to the agent. Every time you grab the keyboard to do step 2, you break the loop.
-Second point: small turns. Don't ask for the whole app and disappear. Small loop, look, react.
-Ask the room: "Which step do people get wrong most?" (Answer: they skip OBSERVE - accept output without looking.)</a:t>
+              <a:t>THE LADDER (1:15). Each rung removes a different crutch. Rung 1 (now): lean fully on the agent, ugly is fine. Rung 2: make it behave the same tomorrow. Rung 3: stop trusting it, build harnesses.
+The point of the day is the change in your RELATIONSHIP to the code, not the app. This morning: "you drive, I direct." Don't over-explain 2 and 3.</a:t>
             </a:r>
           </a:p>
         </p:txBody>
@@ -1277,12 +1470,8 @@
           <a:p>
             <a:r>
               <a:rPr lang="en-US" dirty="0"/>
-              <a:t>ANATOMY (2:00 - technical grounding). Vocabulary for the juniors, precise model for the seniors.
-CONTEXT WINDOW - the agent's short-term memory: your prompt, open files, the conversation, every command's output. Finite, and it fills up. Nearly every "it went stupid" moment is really "context is full or polluted." Remember this two slides on.
-TOOLS - it doesn't just emit text. It calls tools: read/write a file, run the shell, run tests, git, search, MCP servers. Tools make it an agent, not a chatbot.
-THE LOOP - pick a tool, run it, READ the result, decide, repeat. Same loop as before, machinery visible.
-PERMISSIONS - what it may do without asking. Both tools have approval modes: ask-every-time, ask-for-risky, or full-auto in a sandbox. The most important safety dial; most people never touch it.
-Say it: not autocomplete - it reasons, acts through tools, checks its own results.</a:t>
+              <a:t>DEFINITION (1:15). Vibe coding = using the tool. That's the whole definition today.
+The mindset shift is the money line. Read both quotes aloud. Old question = implementation. New question = outcome. All day we push from "how" to "what". For the confident engineers this is the uncomfortable one - you're good at "how".</a:t>
             </a:r>
           </a:p>
         </p:txBody>
@@ -1369,10 +1558,10 @@
           <a:p>
             <a:r>
               <a:rPr lang="en-US" dirty="0"/>
-              <a:t>THE RULE (1:45). Slow down - emotional anchor of the session. Say it plainly, let it sit: "Resist the keyboard."
-Every workshop someone opens the file and hand-edits the moment the agent stumbles. It feels productive; it's the habit we're breaking. The struggle of NOT touching it is the lesson.
-Reframe the twitch: the urge to fix it means you know what's wrong - so say what's wrong in a prompt. You still use your expertise, just in words not keystrokes.
-Lab note: we don't help for the first three minutes of any block. Same principle.</a:t>
+              <a:t>THE LOOP (2:45 - core slide). Walk left to right. 1 PROMPT you say what you want. 2 GENERATE it writes. 3 RUN it executes/tests. 4 OBSERVE you look at what actually happened. 5 REACT you respond, go again.
+Most important point: your work is 1, 4, 5 - prompt, observe, react. Steps 2 and 3 belong to the agent. Every time you grab the keyboard to do step 2, you break the loop.
+Second point: small turns. Don't ask for the whole app and disappear. Small loop, look, react.
+Ask the room: "Which step do people get wrong most?" (Answer: they skip OBSERVE - accept output without looking.)</a:t>
             </a:r>
           </a:p>
         </p:txBody>
@@ -1459,10 +1648,12 @@
           <a:p>
             <a:r>
               <a:rPr lang="en-US" dirty="0"/>
-              <a:t>SKILL #1 (2:30). Read the left box in a tedious voice - feel how exhausting it is. That's hand-coding through a straw: you did the thinking AND you carry the risk of being wrong.
-Right box: two changes - OUTCOME (streak grows, miss resets) plus a CONSTRAINT ("show me a plan first"). You never named a file or said "how". The agent can choose a better implementation than you'd type.
-The tell you're doing it right: the same prompt works verbatim in Claude Code or Codex. Implementation-free prompts are portable.
-Seniors: you often DO know the best implementation - bank it for OBSERVE and REACT, don't type it. This is the habit they take back to work Monday.</a:t>
+              <a:t>ANATOMY (2:00 - technical grounding). Vocabulary for the juniors, precise model for the seniors.
+CONTEXT WINDOW - the agent's short-term memory: your prompt, open files, the conversation, every command's output. Finite, and it fills up. Nearly every "it went stupid" moment is really "context is full or polluted." Remember this two slides on.
+TOOLS - it doesn't just emit text. It calls tools: read/write a file, run the shell, run tests, git, search, MCP servers. Tools make it an agent, not a chatbot.
+THE LOOP - pick a tool, run it, READ the result, decide, repeat. Same loop as before, machinery visible.
+PERMISSIONS - what it may do without asking. Both tools have approval modes: ask-every-time, ask-for-risky, or full-auto in a sandbox. The most important safety dial; most people never touch it.
+Say it: not autocomplete - it reasons, acts through tools, checks its own results.</a:t>
             </a:r>
           </a:p>
         </p:txBody>
@@ -1549,12 +1740,10 @@
           <a:p>
             <a:r>
               <a:rPr lang="en-US" dirty="0"/>
-              <a:t>SKILL #2 (2:30). Lead with the "what changed" - half the room learned the old way.
-A year ago, plan mode was about MECHANICS: you forced a plan because left alone it charged in and made a mess, and you read for dumb structural mistakes. 2025 models genuinely planned clumsily.
-That's mostly over. Modern agents decompose and sequence well. If you're still checking whether it put the loop in the right file, you're auditing a problem it rarely has.
-The risk FLIPPED. The dangerous plan today isn't messy - it's clean, confident, and aimed at slightly the wrong target. A tidy plan for the wrong problem is more dangerous than an obviously bad one - it doesn't trip your alarm.
-So the review moved UP: read for INTENT and SCOPE. Did it get the real goal? Touching more than it should? What did it assume that I never said?
-Confident engineers: a good-looking plan lulls you. Rusty: good news - "is this even the right problem" is exactly your strength, and it's what matters most now. Keys unchanged.</a:t>
+              <a:t>THE RULE (1:45). Slow down - emotional anchor of the session. Say it plainly, let it sit: "Resist the keyboard."
+Every workshop someone opens the file and hand-edits the moment the agent stumbles. It feels productive; it's the habit we're breaking. The struggle of NOT touching it is the lesson.
+Reframe the twitch: the urge to fix it means you know what's wrong - so say what's wrong in a prompt. You still use your expertise, just in words not keystrokes.
+Lab note: we don't help for the first three minutes of any block. Same principle.</a:t>
             </a:r>
           </a:p>
         </p:txBody>
@@ -1641,11 +1830,10 @@
           <a:p>
             <a:r>
               <a:rPr lang="en-US" dirty="0"/>
-              <a:t>SKILL #3 (2:30). "The cockpit" - not the whole plane, just the dials a pilot actually watches. Lean on the top three (context); move fast on the rest.
-/context (Claude) or /status (Codex): shows what it's holding in its head right now. Context is finite. When answers drift, check this first.
-@path: pins an exact file so it stops guessing which file you mean. Keeps context lean. Identical in both tools.
-/compact: summarise and trim a bloated conversation. /clear or fresh session: wipe the slate for an unrelated task so old context doesn't leak.
-Reassurance: you don't memorise this, you just reach for the dials when it goes vague. That's the difference between flying the tool and being flown by it.</a:t>
+              <a:t>SKILL #1 (2:30). Read the left box in a tedious voice - feel how exhausting it is. That's hand-coding through a straw: you did the thinking AND you carry the risk of being wrong.
+Right box: two changes - OUTCOME (streak grows, miss resets) plus a CONSTRAINT ("show me a plan first"). You never named a file or said "how". The agent can choose a better implementation than you'd type.
+The tell you're doing it right: the same prompt works verbatim in Claude Code or Codex. Implementation-free prompts are portable.
+Seniors: you often DO know the best implementation - bank it for OBSERVE and REACT, don't type it. This is the habit they take back to work Monday.</a:t>
             </a:r>
           </a:p>
         </p:txBody>
@@ -2199,7 +2387,7 @@
         </p:nvSpPr>
         <p:spPr>
           <a:xfrm>
-            <a:off x="457200" y="1325880"/>
+            <a:off x="635508" y="1325880"/>
             <a:ext cx="5669280" cy="274320"/>
           </a:xfrm>
           <a:prstGeom prst="rect">
@@ -2385,6 +2573,1512 @@
 </file>
 
 <file path=ppt/slides/slide10.xml><?xml version="1.0" encoding="utf-8"?>
+<p:sld xmlns:a="http://schemas.openxmlformats.org/drawingml/2006/main" xmlns:r="http://schemas.openxmlformats.org/officeDocument/2006/relationships" xmlns:p="http://schemas.openxmlformats.org/presentationml/2006/main">
+  <p:cSld name="Slide 9">
+    <p:bg>
+      <p:bgPr>
+        <a:solidFill>
+          <a:srgbClr val="F5F3FF"/>
+        </a:solidFill>
+        <a:effectLst/>
+      </p:bgPr>
+    </p:bg>
+    <p:spTree>
+      <p:nvGrpSpPr>
+        <p:cNvPr id="1" name=""/>
+        <p:cNvGrpSpPr/>
+        <p:nvPr/>
+      </p:nvGrpSpPr>
+      <p:grpSpPr>
+        <a:xfrm>
+          <a:off x="0" y="0"/>
+          <a:ext cx="0" cy="0"/>
+          <a:chOff x="0" y="0"/>
+          <a:chExt cx="0" cy="0"/>
+        </a:xfrm>
+      </p:grpSpPr>
+      <p:sp>
+        <p:nvSpPr>
+          <p:cNvPr id="2" name="Text 0"/>
+          <p:cNvSpPr/>
+          <p:nvPr/>
+        </p:nvSpPr>
+        <p:spPr>
+          <a:xfrm>
+            <a:off x="457200" y="292608"/>
+            <a:ext cx="8229600" cy="566928"/>
+          </a:xfrm>
+          <a:prstGeom prst="rect">
+            <a:avLst/>
+          </a:prstGeom>
+          <a:noFill/>
+          <a:ln/>
+        </p:spPr>
+        <p:txBody>
+          <a:bodyPr wrap="square" rtlCol="0" anchor="ctr"/>
+          <a:lstStyle/>
+          <a:p>
+            <a:pPr marL="0" indent="0" algn="l">
+              <a:buNone/>
+            </a:pPr>
+            <a:r>
+              <a:rPr lang="en-US" sz="1900" b="1" kern="0" spc="100" dirty="0">
+                <a:solidFill>
+                  <a:srgbClr val="2D1155"/>
+                </a:solidFill>
+                <a:latin typeface="Arial Black" pitchFamily="34" charset="0"/>
+                <a:ea typeface="Arial Black" pitchFamily="34" charset="-122"/>
+                <a:cs typeface="Arial Black" pitchFamily="34" charset="-120"/>
+              </a:rPr>
+              <a:t>PLAN REVIEW, NOT PLAN WRITING</a:t>
+            </a:r>
+            <a:endParaRPr lang="en-US" sz="1900" dirty="0"/>
+          </a:p>
+        </p:txBody>
+      </p:sp>
+      <p:sp>
+        <p:nvSpPr>
+          <p:cNvPr id="3" name="Text 1"/>
+          <p:cNvSpPr/>
+          <p:nvPr/>
+        </p:nvSpPr>
+        <p:spPr>
+          <a:xfrm>
+            <a:off x="475488" y="896112"/>
+            <a:ext cx="8229600" cy="329184"/>
+          </a:xfrm>
+          <a:prstGeom prst="rect">
+            <a:avLst/>
+          </a:prstGeom>
+          <a:noFill/>
+          <a:ln/>
+        </p:spPr>
+        <p:txBody>
+          <a:bodyPr wrap="square" rtlCol="0" anchor="ctr"/>
+          <a:lstStyle/>
+          <a:p>
+            <a:pPr marL="0" indent="0">
+              <a:buNone/>
+            </a:pPr>
+            <a:r>
+              <a:rPr lang="en-US" sz="1300" i="1" dirty="0">
+                <a:solidFill>
+                  <a:srgbClr val="6E6389"/>
+                </a:solidFill>
+                <a:latin typeface="Calibri" pitchFamily="34" charset="0"/>
+                <a:ea typeface="Calibri" pitchFamily="34" charset="-122"/>
+                <a:cs typeface="Calibri" pitchFamily="34" charset="-120"/>
+              </a:rPr>
+              <a:t>Skill #2 — what changed this year.</a:t>
+            </a:r>
+            <a:endParaRPr lang="en-US" sz="1300" dirty="0"/>
+          </a:p>
+        </p:txBody>
+      </p:sp>
+      <p:pic>
+        <p:nvPicPr>
+          <p:cNvPr id="4" name="Image 0" descr="logo_icon.jpeg"/>
+          <p:cNvPicPr>
+            <a:picLocks noChangeAspect="1"/>
+          </p:cNvPicPr>
+          <p:nvPr/>
+        </p:nvPicPr>
+        <p:blipFill>
+          <a:blip r:embed="rId3"/>
+          <a:stretch>
+            <a:fillRect/>
+          </a:stretch>
+        </p:blipFill>
+        <p:spPr>
+          <a:xfrm>
+            <a:off x="8366760" y="4526280"/>
+            <a:ext cx="411480" cy="411480"/>
+          </a:xfrm>
+          <a:prstGeom prst="ellipse">
+            <a:avLst/>
+          </a:prstGeom>
+        </p:spPr>
+      </p:pic>
+      <p:sp>
+        <p:nvSpPr>
+          <p:cNvPr id="5" name="Shape 2"/>
+          <p:cNvSpPr/>
+          <p:nvPr/>
+        </p:nvSpPr>
+        <p:spPr>
+          <a:xfrm>
+            <a:off x="457200" y="1417320"/>
+            <a:ext cx="3931920" cy="1097280"/>
+          </a:xfrm>
+          <a:prstGeom prst="roundRect">
+            <a:avLst>
+              <a:gd name="adj" fmla="val 6667"/>
+            </a:avLst>
+          </a:prstGeom>
+          <a:solidFill>
+            <a:srgbClr val="FFFFFF"/>
+          </a:solidFill>
+          <a:ln w="12700">
+            <a:solidFill>
+              <a:srgbClr val="DDD6FE"/>
+            </a:solidFill>
+            <a:prstDash val="solid"/>
+          </a:ln>
+        </p:spPr>
+        <p:txBody>
+          <a:bodyPr/>
+          <a:lstStyle/>
+          <a:p>
+            <a:endParaRPr lang="en-AU"/>
+          </a:p>
+        </p:txBody>
+      </p:sp>
+      <p:sp>
+        <p:nvSpPr>
+          <p:cNvPr id="6" name="Text 3"/>
+          <p:cNvSpPr/>
+          <p:nvPr/>
+        </p:nvSpPr>
+        <p:spPr>
+          <a:xfrm>
+            <a:off x="658368" y="1536192"/>
+            <a:ext cx="3566160" cy="274320"/>
+          </a:xfrm>
+          <a:prstGeom prst="rect">
+            <a:avLst/>
+          </a:prstGeom>
+          <a:noFill/>
+          <a:ln/>
+        </p:spPr>
+        <p:txBody>
+          <a:bodyPr wrap="square" rtlCol="0" anchor="ctr"/>
+          <a:lstStyle/>
+          <a:p>
+            <a:pPr marL="0" indent="0">
+              <a:buNone/>
+            </a:pPr>
+            <a:r>
+              <a:rPr lang="en-US" sz="1000" b="1" kern="0" spc="200" dirty="0">
+                <a:solidFill>
+                  <a:srgbClr val="6E6389"/>
+                </a:solidFill>
+                <a:latin typeface="Calibri" pitchFamily="34" charset="0"/>
+                <a:ea typeface="Calibri" pitchFamily="34" charset="-122"/>
+                <a:cs typeface="Calibri" pitchFamily="34" charset="-120"/>
+              </a:rPr>
+              <a:t>THEN · 2025</a:t>
+            </a:r>
+            <a:endParaRPr lang="en-US" sz="1000" dirty="0"/>
+          </a:p>
+        </p:txBody>
+      </p:sp>
+      <p:sp>
+        <p:nvSpPr>
+          <p:cNvPr id="7" name="Text 4"/>
+          <p:cNvSpPr/>
+          <p:nvPr/>
+        </p:nvSpPr>
+        <p:spPr>
+          <a:xfrm>
+            <a:off x="658368" y="1810512"/>
+            <a:ext cx="3566160" cy="640080"/>
+          </a:xfrm>
+          <a:prstGeom prst="rect">
+            <a:avLst/>
+          </a:prstGeom>
+          <a:noFill/>
+          <a:ln/>
+        </p:spPr>
+        <p:txBody>
+          <a:bodyPr wrap="square" rtlCol="0" anchor="t"/>
+          <a:lstStyle/>
+          <a:p>
+            <a:pPr marL="0" indent="0">
+              <a:buNone/>
+            </a:pPr>
+            <a:r>
+              <a:rPr lang="en-US" sz="1150" dirty="0">
+                <a:solidFill>
+                  <a:srgbClr val="6E6389"/>
+                </a:solidFill>
+                <a:latin typeface="Calibri" pitchFamily="34" charset="0"/>
+                <a:ea typeface="Calibri" pitchFamily="34" charset="-122"/>
+                <a:cs typeface="Calibri" pitchFamily="34" charset="-120"/>
+              </a:rPr>
+              <a:t>Force a plan. Check the steps — right file, sane order. It often planned clumsily.</a:t>
+            </a:r>
+            <a:endParaRPr lang="en-US" sz="1150" dirty="0"/>
+          </a:p>
+        </p:txBody>
+      </p:sp>
+      <p:sp>
+        <p:nvSpPr>
+          <p:cNvPr id="8" name="Shape 5"/>
+          <p:cNvSpPr/>
+          <p:nvPr/>
+        </p:nvSpPr>
+        <p:spPr>
+          <a:xfrm>
+            <a:off x="4754880" y="1417320"/>
+            <a:ext cx="3931920" cy="1097280"/>
+          </a:xfrm>
+          <a:prstGeom prst="roundRect">
+            <a:avLst>
+              <a:gd name="adj" fmla="val 6667"/>
+            </a:avLst>
+          </a:prstGeom>
+          <a:solidFill>
+            <a:srgbClr val="2D1155"/>
+          </a:solidFill>
+          <a:ln w="19050">
+            <a:solidFill>
+              <a:srgbClr val="F59E0B"/>
+            </a:solidFill>
+            <a:prstDash val="solid"/>
+          </a:ln>
+        </p:spPr>
+        <p:txBody>
+          <a:bodyPr/>
+          <a:lstStyle/>
+          <a:p>
+            <a:endParaRPr lang="en-AU"/>
+          </a:p>
+        </p:txBody>
+      </p:sp>
+      <p:sp>
+        <p:nvSpPr>
+          <p:cNvPr id="9" name="Text 6"/>
+          <p:cNvSpPr/>
+          <p:nvPr/>
+        </p:nvSpPr>
+        <p:spPr>
+          <a:xfrm>
+            <a:off x="4956048" y="1536192"/>
+            <a:ext cx="3566160" cy="274320"/>
+          </a:xfrm>
+          <a:prstGeom prst="rect">
+            <a:avLst/>
+          </a:prstGeom>
+          <a:noFill/>
+          <a:ln/>
+        </p:spPr>
+        <p:txBody>
+          <a:bodyPr wrap="square" rtlCol="0" anchor="ctr"/>
+          <a:lstStyle/>
+          <a:p>
+            <a:pPr marL="0" indent="0">
+              <a:buNone/>
+            </a:pPr>
+            <a:r>
+              <a:rPr lang="en-US" sz="1000" b="1" kern="0" spc="200" dirty="0">
+                <a:solidFill>
+                  <a:srgbClr val="F59E0B"/>
+                </a:solidFill>
+                <a:latin typeface="Calibri" pitchFamily="34" charset="0"/>
+                <a:ea typeface="Calibri" pitchFamily="34" charset="-122"/>
+                <a:cs typeface="Calibri" pitchFamily="34" charset="-120"/>
+              </a:rPr>
+              <a:t>NOW · 2026</a:t>
+            </a:r>
+            <a:endParaRPr lang="en-US" sz="1000" dirty="0"/>
+          </a:p>
+        </p:txBody>
+      </p:sp>
+      <p:sp>
+        <p:nvSpPr>
+          <p:cNvPr id="10" name="Text 7"/>
+          <p:cNvSpPr/>
+          <p:nvPr/>
+        </p:nvSpPr>
+        <p:spPr>
+          <a:xfrm>
+            <a:off x="4956048" y="1810512"/>
+            <a:ext cx="3566160" cy="640080"/>
+          </a:xfrm>
+          <a:prstGeom prst="rect">
+            <a:avLst/>
+          </a:prstGeom>
+          <a:noFill/>
+          <a:ln/>
+        </p:spPr>
+        <p:txBody>
+          <a:bodyPr wrap="square" rtlCol="0" anchor="t"/>
+          <a:lstStyle/>
+          <a:p>
+            <a:pPr marL="0" indent="0">
+              <a:buNone/>
+            </a:pPr>
+            <a:r>
+              <a:rPr lang="en-US" sz="1150" dirty="0">
+                <a:solidFill>
+                  <a:srgbClr val="FFFFFF"/>
+                </a:solidFill>
+                <a:latin typeface="Calibri" pitchFamily="34" charset="0"/>
+                <a:ea typeface="Calibri" pitchFamily="34" charset="-122"/>
+                <a:cs typeface="Calibri" pitchFamily="34" charset="-120"/>
+              </a:rPr>
+              <a:t>Decomposition is solid. The risk flips: a clean, confident plan for slightly the wrong problem.</a:t>
+            </a:r>
+            <a:endParaRPr lang="en-US" sz="1150" dirty="0"/>
+          </a:p>
+        </p:txBody>
+      </p:sp>
+      <p:sp>
+        <p:nvSpPr>
+          <p:cNvPr id="11" name="Shape 8"/>
+          <p:cNvSpPr/>
+          <p:nvPr/>
+        </p:nvSpPr>
+        <p:spPr>
+          <a:xfrm>
+            <a:off x="457200" y="2697480"/>
+            <a:ext cx="8229600" cy="1371600"/>
+          </a:xfrm>
+          <a:prstGeom prst="roundRect">
+            <a:avLst>
+              <a:gd name="adj" fmla="val 5333"/>
+            </a:avLst>
+          </a:prstGeom>
+          <a:solidFill>
+            <a:srgbClr val="DDD6FE"/>
+          </a:solidFill>
+          <a:ln/>
+        </p:spPr>
+        <p:txBody>
+          <a:bodyPr/>
+          <a:lstStyle/>
+          <a:p>
+            <a:endParaRPr lang="en-AU"/>
+          </a:p>
+        </p:txBody>
+      </p:sp>
+      <p:sp>
+        <p:nvSpPr>
+          <p:cNvPr id="12" name="Text 9"/>
+          <p:cNvSpPr/>
+          <p:nvPr/>
+        </p:nvSpPr>
+        <p:spPr>
+          <a:xfrm>
+            <a:off x="731520" y="2816352"/>
+            <a:ext cx="7680960" cy="292608"/>
+          </a:xfrm>
+          <a:prstGeom prst="rect">
+            <a:avLst/>
+          </a:prstGeom>
+          <a:noFill/>
+          <a:ln/>
+        </p:spPr>
+        <p:txBody>
+          <a:bodyPr wrap="square" rtlCol="0" anchor="ctr"/>
+          <a:lstStyle/>
+          <a:p>
+            <a:pPr marL="0" indent="0">
+              <a:buNone/>
+            </a:pPr>
+            <a:r>
+              <a:rPr lang="en-US" sz="1250" b="1" dirty="0">
+                <a:solidFill>
+                  <a:srgbClr val="2D1155"/>
+                </a:solidFill>
+                <a:latin typeface="Calibri" pitchFamily="34" charset="0"/>
+                <a:ea typeface="Calibri" pitchFamily="34" charset="-122"/>
+                <a:cs typeface="Calibri" pitchFamily="34" charset="-120"/>
+              </a:rPr>
+              <a:t>So read for intent and scope, not mechanics:</a:t>
+            </a:r>
+            <a:endParaRPr lang="en-US" sz="1250" dirty="0"/>
+          </a:p>
+        </p:txBody>
+      </p:sp>
+      <p:sp>
+        <p:nvSpPr>
+          <p:cNvPr id="13" name="Text 10"/>
+          <p:cNvSpPr/>
+          <p:nvPr/>
+        </p:nvSpPr>
+        <p:spPr>
+          <a:xfrm>
+            <a:off x="731520" y="3127248"/>
+            <a:ext cx="7680960" cy="896112"/>
+          </a:xfrm>
+          <a:prstGeom prst="rect">
+            <a:avLst/>
+          </a:prstGeom>
+          <a:noFill/>
+          <a:ln/>
+        </p:spPr>
+        <p:txBody>
+          <a:bodyPr wrap="square" rtlCol="0" anchor="ctr"/>
+          <a:lstStyle/>
+          <a:p>
+            <a:pPr marL="152400" indent="-152400">
+              <a:spcAft>
+                <a:spcPts val="200"/>
+              </a:spcAft>
+              <a:buSzPct val="100000"/>
+              <a:buChar char="•"/>
+            </a:pPr>
+            <a:r>
+              <a:rPr lang="en-US" sz="1200" dirty="0">
+                <a:solidFill>
+                  <a:srgbClr val="2D1155"/>
+                </a:solidFill>
+                <a:latin typeface="Calibri" pitchFamily="34" charset="0"/>
+                <a:ea typeface="Calibri" pitchFamily="34" charset="-122"/>
+                <a:cs typeface="Calibri" pitchFamily="34" charset="-120"/>
+              </a:rPr>
+              <a:t>Did it understand the real goal, or a plausible lookalike?</a:t>
+            </a:r>
+            <a:endParaRPr lang="en-US" sz="1200" dirty="0"/>
+          </a:p>
+          <a:p>
+            <a:pPr marL="152400" indent="-152400">
+              <a:spcAft>
+                <a:spcPts val="200"/>
+              </a:spcAft>
+              <a:buSzPct val="100000"/>
+              <a:buChar char="•"/>
+            </a:pPr>
+            <a:r>
+              <a:rPr lang="en-US" sz="1200" dirty="0">
+                <a:solidFill>
+                  <a:srgbClr val="2D1155"/>
+                </a:solidFill>
+                <a:latin typeface="Calibri" pitchFamily="34" charset="0"/>
+                <a:ea typeface="Calibri" pitchFamily="34" charset="-122"/>
+                <a:cs typeface="Calibri" pitchFamily="34" charset="-120"/>
+              </a:rPr>
+              <a:t>Is it about to touch more than it should?</a:t>
+            </a:r>
+            <a:endParaRPr lang="en-US" sz="1200" dirty="0"/>
+          </a:p>
+          <a:p>
+            <a:pPr marL="152400" indent="-152400">
+              <a:spcAft>
+                <a:spcPts val="200"/>
+              </a:spcAft>
+              <a:buSzPct val="100000"/>
+              <a:buChar char="•"/>
+            </a:pPr>
+            <a:r>
+              <a:rPr lang="en-US" sz="1200" dirty="0">
+                <a:solidFill>
+                  <a:srgbClr val="2D1155"/>
+                </a:solidFill>
+                <a:latin typeface="Calibri" pitchFamily="34" charset="0"/>
+                <a:ea typeface="Calibri" pitchFamily="34" charset="-122"/>
+                <a:cs typeface="Calibri" pitchFamily="34" charset="-120"/>
+              </a:rPr>
+              <a:t>What did it assume that you never said?</a:t>
+            </a:r>
+            <a:endParaRPr lang="en-US" sz="1200" dirty="0"/>
+          </a:p>
+        </p:txBody>
+      </p:sp>
+      <p:sp>
+        <p:nvSpPr>
+          <p:cNvPr id="14" name="Text 11"/>
+          <p:cNvSpPr/>
+          <p:nvPr/>
+        </p:nvSpPr>
+        <p:spPr>
+          <a:xfrm>
+            <a:off x="457200" y="4206240"/>
+            <a:ext cx="8229600" cy="320040"/>
+          </a:xfrm>
+          <a:prstGeom prst="rect">
+            <a:avLst/>
+          </a:prstGeom>
+          <a:noFill/>
+          <a:ln/>
+        </p:spPr>
+        <p:txBody>
+          <a:bodyPr wrap="square" rtlCol="0" anchor="ctr"/>
+          <a:lstStyle/>
+          <a:p>
+            <a:pPr marL="0" indent="0">
+              <a:buNone/>
+            </a:pPr>
+            <a:r>
+              <a:rPr lang="en-US" sz="1200" dirty="0">
+                <a:solidFill>
+                  <a:srgbClr val="6E6389"/>
+                </a:solidFill>
+                <a:latin typeface="Calibri" pitchFamily="34" charset="0"/>
+                <a:ea typeface="Calibri" pitchFamily="34" charset="-122"/>
+                <a:cs typeface="Calibri" pitchFamily="34" charset="-120"/>
+              </a:rPr>
+              <a:t>Turn it on —  </a:t>
+            </a:r>
+            <a:r>
+              <a:rPr lang="en-US" sz="1200" b="1" dirty="0">
+                <a:solidFill>
+                  <a:srgbClr val="5B21B6"/>
+                </a:solidFill>
+                <a:latin typeface="Courier New" pitchFamily="34" charset="0"/>
+                <a:ea typeface="Courier New" pitchFamily="34" charset="-122"/>
+                <a:cs typeface="Courier New" pitchFamily="34" charset="-120"/>
+              </a:rPr>
+              <a:t>Claude Code: Shift+Tab</a:t>
+            </a:r>
+            <a:r>
+              <a:rPr lang="en-US" sz="1200" dirty="0">
+                <a:solidFill>
+                  <a:srgbClr val="DDD6FE"/>
+                </a:solidFill>
+                <a:latin typeface="Calibri" pitchFamily="34" charset="0"/>
+                <a:ea typeface="Calibri" pitchFamily="34" charset="-122"/>
+                <a:cs typeface="Calibri" pitchFamily="34" charset="-120"/>
+              </a:rPr>
+              <a:t>     ·     </a:t>
+            </a:r>
+            <a:r>
+              <a:rPr lang="en-US" sz="1200" b="1" dirty="0">
+                <a:solidFill>
+                  <a:srgbClr val="7C3AED"/>
+                </a:solidFill>
+                <a:latin typeface="Courier New" pitchFamily="34" charset="0"/>
+                <a:ea typeface="Courier New" pitchFamily="34" charset="-122"/>
+                <a:cs typeface="Courier New" pitchFamily="34" charset="-120"/>
+              </a:rPr>
+              <a:t>Codex: /plan</a:t>
+            </a:r>
+            <a:endParaRPr lang="en-US" sz="1200" dirty="0"/>
+          </a:p>
+        </p:txBody>
+      </p:sp>
+    </p:spTree>
+  </p:cSld>
+  <p:clrMapOvr>
+    <a:masterClrMapping/>
+  </p:clrMapOvr>
+</p:sld>
+</file>
+
+<file path=ppt/slides/slide11.xml><?xml version="1.0" encoding="utf-8"?>
+<p:sld xmlns:a="http://schemas.openxmlformats.org/drawingml/2006/main" xmlns:r="http://schemas.openxmlformats.org/officeDocument/2006/relationships" xmlns:p="http://schemas.openxmlformats.org/presentationml/2006/main">
+  <p:cSld name="Slide 10">
+    <p:bg>
+      <p:bgPr>
+        <a:solidFill>
+          <a:srgbClr val="F5F3FF"/>
+        </a:solidFill>
+        <a:effectLst/>
+      </p:bgPr>
+    </p:bg>
+    <p:spTree>
+      <p:nvGrpSpPr>
+        <p:cNvPr id="1" name=""/>
+        <p:cNvGrpSpPr/>
+        <p:nvPr/>
+      </p:nvGrpSpPr>
+      <p:grpSpPr>
+        <a:xfrm>
+          <a:off x="0" y="0"/>
+          <a:ext cx="0" cy="0"/>
+          <a:chOff x="0" y="0"/>
+          <a:chExt cx="0" cy="0"/>
+        </a:xfrm>
+      </p:grpSpPr>
+      <p:sp>
+        <p:nvSpPr>
+          <p:cNvPr id="2" name="Text 0"/>
+          <p:cNvSpPr/>
+          <p:nvPr/>
+        </p:nvSpPr>
+        <p:spPr>
+          <a:xfrm>
+            <a:off x="457200" y="292608"/>
+            <a:ext cx="8229600" cy="566928"/>
+          </a:xfrm>
+          <a:prstGeom prst="rect">
+            <a:avLst/>
+          </a:prstGeom>
+          <a:noFill/>
+          <a:ln/>
+        </p:spPr>
+        <p:txBody>
+          <a:bodyPr wrap="square" rtlCol="0" anchor="ctr"/>
+          <a:lstStyle/>
+          <a:p>
+            <a:pPr marL="0" indent="0" algn="l">
+              <a:buNone/>
+            </a:pPr>
+            <a:r>
+              <a:rPr lang="en-US" sz="2700" b="1" kern="0" spc="100" dirty="0">
+                <a:solidFill>
+                  <a:srgbClr val="2D1155"/>
+                </a:solidFill>
+                <a:latin typeface="Arial Black" pitchFamily="34" charset="0"/>
+                <a:ea typeface="Arial Black" pitchFamily="34" charset="-122"/>
+                <a:cs typeface="Arial Black" pitchFamily="34" charset="-120"/>
+              </a:rPr>
+              <a:t>THE COCKPIT</a:t>
+            </a:r>
+            <a:endParaRPr lang="en-US" sz="2700" dirty="0"/>
+          </a:p>
+        </p:txBody>
+      </p:sp>
+      <p:sp>
+        <p:nvSpPr>
+          <p:cNvPr id="3" name="Text 1"/>
+          <p:cNvSpPr/>
+          <p:nvPr/>
+        </p:nvSpPr>
+        <p:spPr>
+          <a:xfrm>
+            <a:off x="475488" y="896112"/>
+            <a:ext cx="8229600" cy="329184"/>
+          </a:xfrm>
+          <a:prstGeom prst="rect">
+            <a:avLst/>
+          </a:prstGeom>
+          <a:noFill/>
+          <a:ln/>
+        </p:spPr>
+        <p:txBody>
+          <a:bodyPr wrap="square" rtlCol="0" anchor="ctr"/>
+          <a:lstStyle/>
+          <a:p>
+            <a:pPr marL="0" indent="0">
+              <a:buNone/>
+            </a:pPr>
+            <a:r>
+              <a:rPr lang="en-US" sz="1300" i="1" dirty="0">
+                <a:solidFill>
+                  <a:srgbClr val="6E6389"/>
+                </a:solidFill>
+                <a:latin typeface="Calibri" pitchFamily="34" charset="0"/>
+                <a:ea typeface="Calibri" pitchFamily="34" charset="-122"/>
+                <a:cs typeface="Calibri" pitchFamily="34" charset="-120"/>
+              </a:rPr>
+              <a:t>Skill #3 — four moves on the context window. That is the entire cockpit.</a:t>
+            </a:r>
+            <a:endParaRPr lang="en-US" sz="1300" dirty="0"/>
+          </a:p>
+        </p:txBody>
+      </p:sp>
+      <p:pic>
+        <p:nvPicPr>
+          <p:cNvPr id="4" name="Image 0" descr="logo_icon.jpeg"/>
+          <p:cNvPicPr>
+            <a:picLocks noChangeAspect="1"/>
+          </p:cNvPicPr>
+          <p:nvPr/>
+        </p:nvPicPr>
+        <p:blipFill>
+          <a:blip r:embed="rId3"/>
+          <a:stretch>
+            <a:fillRect/>
+          </a:stretch>
+        </p:blipFill>
+        <p:spPr>
+          <a:xfrm>
+            <a:off x="8366760" y="4526280"/>
+            <a:ext cx="411480" cy="411480"/>
+          </a:xfrm>
+          <a:prstGeom prst="ellipse">
+            <a:avLst/>
+          </a:prstGeom>
+        </p:spPr>
+      </p:pic>
+      <p:sp>
+        <p:nvSpPr>
+          <p:cNvPr id="5" name="Text 2"/>
+          <p:cNvSpPr/>
+          <p:nvPr/>
+        </p:nvSpPr>
+        <p:spPr>
+          <a:xfrm>
+            <a:off x="640080" y="1481328"/>
+            <a:ext cx="2926080" cy="274320"/>
+          </a:xfrm>
+          <a:prstGeom prst="rect">
+            <a:avLst/>
+          </a:prstGeom>
+          <a:noFill/>
+          <a:ln/>
+        </p:spPr>
+        <p:txBody>
+          <a:bodyPr wrap="square" rtlCol="0" anchor="ctr"/>
+          <a:lstStyle/>
+          <a:p>
+            <a:pPr marL="0" indent="0">
+              <a:buNone/>
+            </a:pPr>
+            <a:r>
+              <a:rPr lang="en-US" sz="1000" b="1" dirty="0">
+                <a:solidFill>
+                  <a:srgbClr val="6E6389"/>
+                </a:solidFill>
+                <a:latin typeface="Calibri" pitchFamily="34" charset="0"/>
+                <a:ea typeface="Calibri" pitchFamily="34" charset="-122"/>
+                <a:cs typeface="Calibri" pitchFamily="34" charset="-120"/>
+              </a:rPr>
+              <a:t>THE MOVE</a:t>
+            </a:r>
+            <a:endParaRPr lang="en-US" sz="1000" dirty="0"/>
+          </a:p>
+        </p:txBody>
+      </p:sp>
+      <p:sp>
+        <p:nvSpPr>
+          <p:cNvPr id="6" name="Text 3"/>
+          <p:cNvSpPr/>
+          <p:nvPr/>
+        </p:nvSpPr>
+        <p:spPr>
+          <a:xfrm>
+            <a:off x="3749040" y="1481328"/>
+            <a:ext cx="2468880" cy="274320"/>
+          </a:xfrm>
+          <a:prstGeom prst="rect">
+            <a:avLst/>
+          </a:prstGeom>
+          <a:noFill/>
+          <a:ln/>
+        </p:spPr>
+        <p:txBody>
+          <a:bodyPr wrap="square" rtlCol="0" anchor="ctr"/>
+          <a:lstStyle/>
+          <a:p>
+            <a:pPr marL="0" indent="0">
+              <a:buNone/>
+            </a:pPr>
+            <a:r>
+              <a:rPr lang="en-US" sz="1000" b="1" kern="0" spc="100" dirty="0">
+                <a:solidFill>
+                  <a:srgbClr val="F59E0B"/>
+                </a:solidFill>
+                <a:latin typeface="Calibri" pitchFamily="34" charset="0"/>
+                <a:ea typeface="Calibri" pitchFamily="34" charset="-122"/>
+                <a:cs typeface="Calibri" pitchFamily="34" charset="-120"/>
+              </a:rPr>
+              <a:t>CLAUDE CODE</a:t>
+            </a:r>
+            <a:endParaRPr lang="en-US" sz="1000" dirty="0"/>
+          </a:p>
+        </p:txBody>
+      </p:sp>
+      <p:sp>
+        <p:nvSpPr>
+          <p:cNvPr id="7" name="Text 4"/>
+          <p:cNvSpPr/>
+          <p:nvPr/>
+        </p:nvSpPr>
+        <p:spPr>
+          <a:xfrm>
+            <a:off x="6355080" y="1481328"/>
+            <a:ext cx="2286000" cy="274320"/>
+          </a:xfrm>
+          <a:prstGeom prst="rect">
+            <a:avLst/>
+          </a:prstGeom>
+          <a:noFill/>
+          <a:ln/>
+        </p:spPr>
+        <p:txBody>
+          <a:bodyPr wrap="square" rtlCol="0" anchor="ctr"/>
+          <a:lstStyle/>
+          <a:p>
+            <a:pPr marL="0" indent="0">
+              <a:buNone/>
+            </a:pPr>
+            <a:r>
+              <a:rPr lang="en-US" sz="1000" b="1" kern="0" spc="100" dirty="0">
+                <a:solidFill>
+                  <a:srgbClr val="7C3AED"/>
+                </a:solidFill>
+                <a:latin typeface="Calibri" pitchFamily="34" charset="0"/>
+                <a:ea typeface="Calibri" pitchFamily="34" charset="-122"/>
+                <a:cs typeface="Calibri" pitchFamily="34" charset="-120"/>
+              </a:rPr>
+              <a:t>CODEX</a:t>
+            </a:r>
+            <a:endParaRPr lang="en-US" sz="1000" dirty="0"/>
+          </a:p>
+        </p:txBody>
+      </p:sp>
+      <p:sp>
+        <p:nvSpPr>
+          <p:cNvPr id="8" name="Shape 5"/>
+          <p:cNvSpPr/>
+          <p:nvPr/>
+        </p:nvSpPr>
+        <p:spPr>
+          <a:xfrm>
+            <a:off x="457200" y="1810512"/>
+            <a:ext cx="8229600" cy="603504"/>
+          </a:xfrm>
+          <a:prstGeom prst="rect">
+            <a:avLst/>
+          </a:prstGeom>
+          <a:solidFill>
+            <a:srgbClr val="DDD6FE"/>
+          </a:solidFill>
+          <a:ln/>
+        </p:spPr>
+        <p:txBody>
+          <a:bodyPr/>
+          <a:lstStyle/>
+          <a:p>
+            <a:endParaRPr lang="en-AU"/>
+          </a:p>
+        </p:txBody>
+      </p:sp>
+      <p:sp>
+        <p:nvSpPr>
+          <p:cNvPr id="9" name="Text 6"/>
+          <p:cNvSpPr/>
+          <p:nvPr/>
+        </p:nvSpPr>
+        <p:spPr>
+          <a:xfrm>
+            <a:off x="640080" y="1810512"/>
+            <a:ext cx="3017520" cy="603504"/>
+          </a:xfrm>
+          <a:prstGeom prst="rect">
+            <a:avLst/>
+          </a:prstGeom>
+          <a:noFill/>
+          <a:ln/>
+        </p:spPr>
+        <p:txBody>
+          <a:bodyPr wrap="square" rtlCol="0" anchor="ctr"/>
+          <a:lstStyle/>
+          <a:p>
+            <a:pPr marL="0" indent="0">
+              <a:buNone/>
+            </a:pPr>
+            <a:r>
+              <a:rPr lang="en-US" sz="1250" b="1" dirty="0">
+                <a:solidFill>
+                  <a:srgbClr val="7C3AED"/>
+                </a:solidFill>
+                <a:latin typeface="Calibri" pitchFamily="34" charset="0"/>
+                <a:ea typeface="Calibri" pitchFamily="34" charset="-122"/>
+                <a:cs typeface="Calibri" pitchFamily="34" charset="-120"/>
+              </a:rPr>
+              <a:t>SEE  </a:t>
+            </a:r>
+            <a:r>
+              <a:rPr lang="en-US" sz="1250" dirty="0">
+                <a:solidFill>
+                  <a:srgbClr val="2D1155"/>
+                </a:solidFill>
+                <a:latin typeface="Calibri" pitchFamily="34" charset="0"/>
+                <a:ea typeface="Calibri" pitchFamily="34" charset="-122"/>
+                <a:cs typeface="Calibri" pitchFamily="34" charset="-120"/>
+              </a:rPr>
+              <a:t>what it is holding right now</a:t>
+            </a:r>
+            <a:endParaRPr lang="en-US" sz="1250" dirty="0"/>
+          </a:p>
+        </p:txBody>
+      </p:sp>
+      <p:sp>
+        <p:nvSpPr>
+          <p:cNvPr id="10" name="Text 7"/>
+          <p:cNvSpPr/>
+          <p:nvPr/>
+        </p:nvSpPr>
+        <p:spPr>
+          <a:xfrm>
+            <a:off x="3749040" y="1810512"/>
+            <a:ext cx="2560320" cy="603504"/>
+          </a:xfrm>
+          <a:prstGeom prst="rect">
+            <a:avLst/>
+          </a:prstGeom>
+          <a:noFill/>
+          <a:ln/>
+        </p:spPr>
+        <p:txBody>
+          <a:bodyPr wrap="square" rtlCol="0" anchor="ctr"/>
+          <a:lstStyle/>
+          <a:p>
+            <a:pPr marL="0" indent="0">
+              <a:buNone/>
+            </a:pPr>
+            <a:r>
+              <a:rPr lang="en-US" sz="1300" b="1" dirty="0">
+                <a:solidFill>
+                  <a:srgbClr val="5B21B6"/>
+                </a:solidFill>
+                <a:latin typeface="Courier New" pitchFamily="34" charset="0"/>
+                <a:ea typeface="Courier New" pitchFamily="34" charset="-122"/>
+                <a:cs typeface="Courier New" pitchFamily="34" charset="-120"/>
+              </a:rPr>
+              <a:t>/context</a:t>
+            </a:r>
+            <a:endParaRPr lang="en-US" sz="1300" dirty="0"/>
+          </a:p>
+        </p:txBody>
+      </p:sp>
+      <p:sp>
+        <p:nvSpPr>
+          <p:cNvPr id="11" name="Text 8"/>
+          <p:cNvSpPr/>
+          <p:nvPr/>
+        </p:nvSpPr>
+        <p:spPr>
+          <a:xfrm>
+            <a:off x="6355080" y="1810512"/>
+            <a:ext cx="2286000" cy="603504"/>
+          </a:xfrm>
+          <a:prstGeom prst="rect">
+            <a:avLst/>
+          </a:prstGeom>
+          <a:noFill/>
+          <a:ln/>
+        </p:spPr>
+        <p:txBody>
+          <a:bodyPr wrap="square" rtlCol="0" anchor="ctr"/>
+          <a:lstStyle/>
+          <a:p>
+            <a:pPr marL="0" indent="0">
+              <a:buNone/>
+            </a:pPr>
+            <a:r>
+              <a:rPr lang="en-US" sz="1300" b="1" dirty="0">
+                <a:solidFill>
+                  <a:srgbClr val="7C3AED"/>
+                </a:solidFill>
+                <a:latin typeface="Courier New" pitchFamily="34" charset="0"/>
+                <a:ea typeface="Courier New" pitchFamily="34" charset="-122"/>
+                <a:cs typeface="Courier New" pitchFamily="34" charset="-120"/>
+              </a:rPr>
+              <a:t>/status</a:t>
+            </a:r>
+            <a:endParaRPr lang="en-US" sz="1300" dirty="0"/>
+          </a:p>
+        </p:txBody>
+      </p:sp>
+      <p:sp>
+        <p:nvSpPr>
+          <p:cNvPr id="12" name="Shape 9"/>
+          <p:cNvSpPr/>
+          <p:nvPr/>
+        </p:nvSpPr>
+        <p:spPr>
+          <a:xfrm>
+            <a:off x="457200" y="2414016"/>
+            <a:ext cx="8229600" cy="603504"/>
+          </a:xfrm>
+          <a:prstGeom prst="rect">
+            <a:avLst/>
+          </a:prstGeom>
+          <a:solidFill>
+            <a:srgbClr val="FFFFFF"/>
+          </a:solidFill>
+          <a:ln/>
+        </p:spPr>
+        <p:txBody>
+          <a:bodyPr/>
+          <a:lstStyle/>
+          <a:p>
+            <a:endParaRPr lang="en-AU"/>
+          </a:p>
+        </p:txBody>
+      </p:sp>
+      <p:sp>
+        <p:nvSpPr>
+          <p:cNvPr id="13" name="Text 10"/>
+          <p:cNvSpPr/>
+          <p:nvPr/>
+        </p:nvSpPr>
+        <p:spPr>
+          <a:xfrm>
+            <a:off x="640080" y="2414016"/>
+            <a:ext cx="3017520" cy="603504"/>
+          </a:xfrm>
+          <a:prstGeom prst="rect">
+            <a:avLst/>
+          </a:prstGeom>
+          <a:noFill/>
+          <a:ln/>
+        </p:spPr>
+        <p:txBody>
+          <a:bodyPr wrap="square" rtlCol="0" anchor="ctr"/>
+          <a:lstStyle/>
+          <a:p>
+            <a:pPr marL="0" indent="0">
+              <a:buNone/>
+            </a:pPr>
+            <a:r>
+              <a:rPr lang="en-US" sz="1250" b="1" dirty="0">
+                <a:solidFill>
+                  <a:srgbClr val="7C3AED"/>
+                </a:solidFill>
+                <a:latin typeface="Calibri" pitchFamily="34" charset="0"/>
+                <a:ea typeface="Calibri" pitchFamily="34" charset="-122"/>
+                <a:cs typeface="Calibri" pitchFamily="34" charset="-120"/>
+              </a:rPr>
+              <a:t>LOAD  </a:t>
+            </a:r>
+            <a:r>
+              <a:rPr lang="en-US" sz="1250" dirty="0">
+                <a:solidFill>
+                  <a:srgbClr val="2D1155"/>
+                </a:solidFill>
+                <a:latin typeface="Calibri" pitchFamily="34" charset="0"/>
+                <a:ea typeface="Calibri" pitchFamily="34" charset="-122"/>
+                <a:cs typeface="Calibri" pitchFamily="34" charset="-120"/>
+              </a:rPr>
+              <a:t>the exact files the task touches</a:t>
+            </a:r>
+            <a:endParaRPr lang="en-US" sz="1250" dirty="0"/>
+          </a:p>
+        </p:txBody>
+      </p:sp>
+      <p:sp>
+        <p:nvSpPr>
+          <p:cNvPr id="14" name="Text 11"/>
+          <p:cNvSpPr/>
+          <p:nvPr/>
+        </p:nvSpPr>
+        <p:spPr>
+          <a:xfrm>
+            <a:off x="3749040" y="2414016"/>
+            <a:ext cx="2560320" cy="603504"/>
+          </a:xfrm>
+          <a:prstGeom prst="rect">
+            <a:avLst/>
+          </a:prstGeom>
+          <a:noFill/>
+          <a:ln/>
+        </p:spPr>
+        <p:txBody>
+          <a:bodyPr wrap="square" rtlCol="0" anchor="ctr"/>
+          <a:lstStyle/>
+          <a:p>
+            <a:pPr marL="0" indent="0">
+              <a:buNone/>
+            </a:pPr>
+            <a:r>
+              <a:rPr lang="en-US" sz="1300" b="1" dirty="0">
+                <a:solidFill>
+                  <a:srgbClr val="5B21B6"/>
+                </a:solidFill>
+                <a:latin typeface="Courier New" pitchFamily="34" charset="0"/>
+                <a:ea typeface="Courier New" pitchFamily="34" charset="-122"/>
+                <a:cs typeface="Courier New" pitchFamily="34" charset="-120"/>
+              </a:rPr>
+              <a:t>@path/to/file</a:t>
+            </a:r>
+            <a:endParaRPr lang="en-US" sz="1300" dirty="0"/>
+          </a:p>
+        </p:txBody>
+      </p:sp>
+      <p:sp>
+        <p:nvSpPr>
+          <p:cNvPr id="15" name="Text 12"/>
+          <p:cNvSpPr/>
+          <p:nvPr/>
+        </p:nvSpPr>
+        <p:spPr>
+          <a:xfrm>
+            <a:off x="6355080" y="2414016"/>
+            <a:ext cx="2286000" cy="603504"/>
+          </a:xfrm>
+          <a:prstGeom prst="rect">
+            <a:avLst/>
+          </a:prstGeom>
+          <a:noFill/>
+          <a:ln/>
+        </p:spPr>
+        <p:txBody>
+          <a:bodyPr wrap="square" rtlCol="0" anchor="ctr"/>
+          <a:lstStyle/>
+          <a:p>
+            <a:pPr marL="0" indent="0">
+              <a:buNone/>
+            </a:pPr>
+            <a:r>
+              <a:rPr lang="en-US" sz="1300" b="1" dirty="0">
+                <a:solidFill>
+                  <a:srgbClr val="7C3AED"/>
+                </a:solidFill>
+                <a:latin typeface="Courier New" pitchFamily="34" charset="0"/>
+                <a:ea typeface="Courier New" pitchFamily="34" charset="-122"/>
+                <a:cs typeface="Courier New" pitchFamily="34" charset="-120"/>
+              </a:rPr>
+              <a:t>@path/to/file</a:t>
+            </a:r>
+            <a:endParaRPr lang="en-US" sz="1300" dirty="0"/>
+          </a:p>
+        </p:txBody>
+      </p:sp>
+      <p:sp>
+        <p:nvSpPr>
+          <p:cNvPr id="16" name="Shape 13"/>
+          <p:cNvSpPr/>
+          <p:nvPr/>
+        </p:nvSpPr>
+        <p:spPr>
+          <a:xfrm>
+            <a:off x="457200" y="3017520"/>
+            <a:ext cx="8229600" cy="603504"/>
+          </a:xfrm>
+          <a:prstGeom prst="rect">
+            <a:avLst/>
+          </a:prstGeom>
+          <a:solidFill>
+            <a:srgbClr val="DDD6FE"/>
+          </a:solidFill>
+          <a:ln/>
+        </p:spPr>
+        <p:txBody>
+          <a:bodyPr/>
+          <a:lstStyle/>
+          <a:p>
+            <a:endParaRPr lang="en-AU"/>
+          </a:p>
+        </p:txBody>
+      </p:sp>
+      <p:sp>
+        <p:nvSpPr>
+          <p:cNvPr id="17" name="Text 14"/>
+          <p:cNvSpPr/>
+          <p:nvPr/>
+        </p:nvSpPr>
+        <p:spPr>
+          <a:xfrm>
+            <a:off x="640080" y="3017520"/>
+            <a:ext cx="3017520" cy="603504"/>
+          </a:xfrm>
+          <a:prstGeom prst="rect">
+            <a:avLst/>
+          </a:prstGeom>
+          <a:noFill/>
+          <a:ln/>
+        </p:spPr>
+        <p:txBody>
+          <a:bodyPr wrap="square" rtlCol="0" anchor="ctr"/>
+          <a:lstStyle/>
+          <a:p>
+            <a:pPr marL="0" indent="0">
+              <a:buNone/>
+            </a:pPr>
+            <a:r>
+              <a:rPr lang="en-US" sz="1250" b="1" dirty="0">
+                <a:solidFill>
+                  <a:srgbClr val="7C3AED"/>
+                </a:solidFill>
+                <a:latin typeface="Calibri" pitchFamily="34" charset="0"/>
+                <a:ea typeface="Calibri" pitchFamily="34" charset="-122"/>
+                <a:cs typeface="Calibri" pitchFamily="34" charset="-120"/>
+              </a:rPr>
+              <a:t>TRIM  </a:t>
+            </a:r>
+            <a:r>
+              <a:rPr lang="en-US" sz="1250" dirty="0">
+                <a:solidFill>
+                  <a:srgbClr val="2D1155"/>
+                </a:solidFill>
+                <a:latin typeface="Calibri" pitchFamily="34" charset="0"/>
+                <a:ea typeface="Calibri" pitchFamily="34" charset="-122"/>
+                <a:cs typeface="Calibri" pitchFamily="34" charset="-120"/>
+              </a:rPr>
+              <a:t>summarise away what is stale</a:t>
+            </a:r>
+            <a:endParaRPr lang="en-US" sz="1250" dirty="0"/>
+          </a:p>
+        </p:txBody>
+      </p:sp>
+      <p:sp>
+        <p:nvSpPr>
+          <p:cNvPr id="18" name="Text 15"/>
+          <p:cNvSpPr/>
+          <p:nvPr/>
+        </p:nvSpPr>
+        <p:spPr>
+          <a:xfrm>
+            <a:off x="3749040" y="3017520"/>
+            <a:ext cx="2560320" cy="603504"/>
+          </a:xfrm>
+          <a:prstGeom prst="rect">
+            <a:avLst/>
+          </a:prstGeom>
+          <a:noFill/>
+          <a:ln/>
+        </p:spPr>
+        <p:txBody>
+          <a:bodyPr wrap="square" rtlCol="0" anchor="ctr"/>
+          <a:lstStyle/>
+          <a:p>
+            <a:pPr marL="0" indent="0">
+              <a:buNone/>
+            </a:pPr>
+            <a:r>
+              <a:rPr lang="en-US" sz="1300" b="1" dirty="0">
+                <a:solidFill>
+                  <a:srgbClr val="5B21B6"/>
+                </a:solidFill>
+                <a:latin typeface="Courier New" pitchFamily="34" charset="0"/>
+                <a:ea typeface="Courier New" pitchFamily="34" charset="-122"/>
+                <a:cs typeface="Courier New" pitchFamily="34" charset="-120"/>
+              </a:rPr>
+              <a:t>/compact</a:t>
+            </a:r>
+            <a:endParaRPr lang="en-US" sz="1300" dirty="0"/>
+          </a:p>
+        </p:txBody>
+      </p:sp>
+      <p:sp>
+        <p:nvSpPr>
+          <p:cNvPr id="19" name="Text 16"/>
+          <p:cNvSpPr/>
+          <p:nvPr/>
+        </p:nvSpPr>
+        <p:spPr>
+          <a:xfrm>
+            <a:off x="6355080" y="3017520"/>
+            <a:ext cx="2286000" cy="603504"/>
+          </a:xfrm>
+          <a:prstGeom prst="rect">
+            <a:avLst/>
+          </a:prstGeom>
+          <a:noFill/>
+          <a:ln/>
+        </p:spPr>
+        <p:txBody>
+          <a:bodyPr wrap="square" rtlCol="0" anchor="ctr"/>
+          <a:lstStyle/>
+          <a:p>
+            <a:pPr marL="0" indent="0">
+              <a:buNone/>
+            </a:pPr>
+            <a:r>
+              <a:rPr lang="en-US" sz="1300" b="1" dirty="0">
+                <a:solidFill>
+                  <a:srgbClr val="7C3AED"/>
+                </a:solidFill>
+                <a:latin typeface="Courier New" pitchFamily="34" charset="0"/>
+                <a:ea typeface="Courier New" pitchFamily="34" charset="-122"/>
+                <a:cs typeface="Courier New" pitchFamily="34" charset="-120"/>
+              </a:rPr>
+              <a:t>/compact</a:t>
+            </a:r>
+            <a:endParaRPr lang="en-US" sz="1300" dirty="0"/>
+          </a:p>
+        </p:txBody>
+      </p:sp>
+      <p:sp>
+        <p:nvSpPr>
+          <p:cNvPr id="20" name="Shape 17"/>
+          <p:cNvSpPr/>
+          <p:nvPr/>
+        </p:nvSpPr>
+        <p:spPr>
+          <a:xfrm>
+            <a:off x="457200" y="3621024"/>
+            <a:ext cx="8229600" cy="603504"/>
+          </a:xfrm>
+          <a:prstGeom prst="rect">
+            <a:avLst/>
+          </a:prstGeom>
+          <a:solidFill>
+            <a:srgbClr val="FFFFFF"/>
+          </a:solidFill>
+          <a:ln/>
+        </p:spPr>
+        <p:txBody>
+          <a:bodyPr/>
+          <a:lstStyle/>
+          <a:p>
+            <a:endParaRPr lang="en-AU"/>
+          </a:p>
+        </p:txBody>
+      </p:sp>
+      <p:sp>
+        <p:nvSpPr>
+          <p:cNvPr id="21" name="Text 18"/>
+          <p:cNvSpPr/>
+          <p:nvPr/>
+        </p:nvSpPr>
+        <p:spPr>
+          <a:xfrm>
+            <a:off x="640080" y="3621024"/>
+            <a:ext cx="3017520" cy="603504"/>
+          </a:xfrm>
+          <a:prstGeom prst="rect">
+            <a:avLst/>
+          </a:prstGeom>
+          <a:noFill/>
+          <a:ln/>
+        </p:spPr>
+        <p:txBody>
+          <a:bodyPr wrap="square" rtlCol="0" anchor="ctr"/>
+          <a:lstStyle/>
+          <a:p>
+            <a:pPr marL="0" indent="0">
+              <a:buNone/>
+            </a:pPr>
+            <a:r>
+              <a:rPr lang="en-US" sz="1250" b="1" dirty="0">
+                <a:solidFill>
+                  <a:srgbClr val="7C3AED"/>
+                </a:solidFill>
+                <a:latin typeface="Calibri" pitchFamily="34" charset="0"/>
+                <a:ea typeface="Calibri" pitchFamily="34" charset="-122"/>
+                <a:cs typeface="Calibri" pitchFamily="34" charset="-120"/>
+              </a:rPr>
+              <a:t>RESET  </a:t>
+            </a:r>
+            <a:r>
+              <a:rPr lang="en-US" sz="1250" dirty="0">
+                <a:solidFill>
+                  <a:srgbClr val="2D1155"/>
+                </a:solidFill>
+                <a:latin typeface="Calibri" pitchFamily="34" charset="0"/>
+                <a:ea typeface="Calibri" pitchFamily="34" charset="-122"/>
+                <a:cs typeface="Calibri" pitchFamily="34" charset="-120"/>
+              </a:rPr>
+              <a:t>new task, clean window</a:t>
+            </a:r>
+            <a:endParaRPr lang="en-US" sz="1250" dirty="0"/>
+          </a:p>
+        </p:txBody>
+      </p:sp>
+      <p:sp>
+        <p:nvSpPr>
+          <p:cNvPr id="22" name="Text 19"/>
+          <p:cNvSpPr/>
+          <p:nvPr/>
+        </p:nvSpPr>
+        <p:spPr>
+          <a:xfrm>
+            <a:off x="3749040" y="3621024"/>
+            <a:ext cx="2560320" cy="603504"/>
+          </a:xfrm>
+          <a:prstGeom prst="rect">
+            <a:avLst/>
+          </a:prstGeom>
+          <a:noFill/>
+          <a:ln/>
+        </p:spPr>
+        <p:txBody>
+          <a:bodyPr wrap="square" rtlCol="0" anchor="ctr"/>
+          <a:lstStyle/>
+          <a:p>
+            <a:pPr marL="0" indent="0">
+              <a:buNone/>
+            </a:pPr>
+            <a:r>
+              <a:rPr lang="en-US" sz="1300" b="1" dirty="0">
+                <a:solidFill>
+                  <a:srgbClr val="5B21B6"/>
+                </a:solidFill>
+                <a:latin typeface="Courier New" pitchFamily="34" charset="0"/>
+                <a:ea typeface="Courier New" pitchFamily="34" charset="-122"/>
+                <a:cs typeface="Courier New" pitchFamily="34" charset="-120"/>
+              </a:rPr>
+              <a:t>/clear</a:t>
+            </a:r>
+            <a:endParaRPr lang="en-US" sz="1300" dirty="0"/>
+          </a:p>
+        </p:txBody>
+      </p:sp>
+      <p:sp>
+        <p:nvSpPr>
+          <p:cNvPr id="23" name="Text 20"/>
+          <p:cNvSpPr/>
+          <p:nvPr/>
+        </p:nvSpPr>
+        <p:spPr>
+          <a:xfrm>
+            <a:off x="6355080" y="3621024"/>
+            <a:ext cx="2286000" cy="603504"/>
+          </a:xfrm>
+          <a:prstGeom prst="rect">
+            <a:avLst/>
+          </a:prstGeom>
+          <a:noFill/>
+          <a:ln/>
+        </p:spPr>
+        <p:txBody>
+          <a:bodyPr wrap="square" rtlCol="0" anchor="ctr"/>
+          <a:lstStyle/>
+          <a:p>
+            <a:pPr marL="0" indent="0">
+              <a:buNone/>
+            </a:pPr>
+            <a:r>
+              <a:rPr lang="en-US" sz="1300" b="1" dirty="0">
+                <a:solidFill>
+                  <a:srgbClr val="7C3AED"/>
+                </a:solidFill>
+                <a:latin typeface="Courier New" pitchFamily="34" charset="0"/>
+                <a:ea typeface="Courier New" pitchFamily="34" charset="-122"/>
+                <a:cs typeface="Courier New" pitchFamily="34" charset="-120"/>
+              </a:rPr>
+              <a:t>new session</a:t>
+            </a:r>
+            <a:endParaRPr lang="en-US" sz="1300" dirty="0"/>
+          </a:p>
+        </p:txBody>
+      </p:sp>
+      <p:sp>
+        <p:nvSpPr>
+          <p:cNvPr id="24" name="Text 21"/>
+          <p:cNvSpPr/>
+          <p:nvPr/>
+        </p:nvSpPr>
+        <p:spPr>
+          <a:xfrm>
+            <a:off x="457200" y="4370832"/>
+            <a:ext cx="8229600" cy="320040"/>
+          </a:xfrm>
+          <a:prstGeom prst="rect">
+            <a:avLst/>
+          </a:prstGeom>
+          <a:noFill/>
+          <a:ln/>
+        </p:spPr>
+        <p:txBody>
+          <a:bodyPr wrap="square" rtlCol="0" anchor="ctr"/>
+          <a:lstStyle/>
+          <a:p>
+            <a:pPr marL="0" indent="0">
+              <a:buNone/>
+            </a:pPr>
+            <a:r>
+              <a:rPr lang="en-US" sz="1150" b="1" i="1" dirty="0">
+                <a:solidFill>
+                  <a:srgbClr val="7C3AED"/>
+                </a:solidFill>
+                <a:latin typeface="Calibri" pitchFamily="34" charset="0"/>
+                <a:ea typeface="Calibri" pitchFamily="34" charset="-122"/>
+                <a:cs typeface="Calibri" pitchFamily="34" charset="-120"/>
+              </a:rPr>
+              <a:t>See, load, trim, reset. </a:t>
+            </a:r>
+            <a:r>
+              <a:rPr lang="en-US" sz="1150" i="1" dirty="0">
+                <a:solidFill>
+                  <a:srgbClr val="6E6389"/>
+                </a:solidFill>
+                <a:latin typeface="Calibri" pitchFamily="34" charset="0"/>
+                <a:ea typeface="Calibri" pitchFamily="34" charset="-122"/>
+                <a:cs typeface="Calibri" pitchFamily="34" charset="-120"/>
+              </a:rPr>
+              <a:t>Nothing to memorise — but every context problem you hit today is one of these four.</a:t>
+            </a:r>
+            <a:endParaRPr lang="en-US" sz="1150" dirty="0"/>
+          </a:p>
+        </p:txBody>
+      </p:sp>
+    </p:spTree>
+  </p:cSld>
+  <p:clrMapOvr>
+    <a:masterClrMapping/>
+  </p:clrMapOvr>
+</p:sld>
+</file>
+
+<file path=ppt/slides/slide12.xml><?xml version="1.0" encoding="utf-8"?>
 <p:sld xmlns:a="http://schemas.openxmlformats.org/drawingml/2006/main" xmlns:r="http://schemas.openxmlformats.org/officeDocument/2006/relationships" xmlns:p="http://schemas.openxmlformats.org/presentationml/2006/main">
   <p:cSld name="Slide 11">
     <p:bg>
@@ -2481,7 +4175,7 @@
                 <a:ea typeface="Calibri" pitchFamily="34" charset="-122"/>
                 <a:cs typeface="Calibri" pitchFamily="34" charset="-120"/>
               </a:rPr>
-              <a:t>Watch the gauge — it's why the cockpit matters.</a:t>
+              <a:t>The gauge tells you which of the four moves to reach for.</a:t>
             </a:r>
             <a:endParaRPr lang="en-US" sz="1300" dirty="0"/>
           </a:p>
@@ -2617,7 +4311,7 @@
                 <a:ea typeface="Calibri" pitchFamily="34" charset="-122"/>
                 <a:cs typeface="Calibri" pitchFamily="34" charset="-120"/>
               </a:rPr>
-              <a:t>It guesses. Wrong file, wrong convention, confident nonsense.</a:t>
+              <a:t>It was never told enough. So it guesses — wrong file, invented convention, confident nonsense.</a:t>
             </a:r>
             <a:endParaRPr lang="en-US" sz="1250" dirty="0"/>
           </a:p>
@@ -2729,7 +4423,7 @@
                 <a:ea typeface="Calibri" pitchFamily="34" charset="-122"/>
                 <a:cs typeface="Calibri" pitchFamily="34" charset="-120"/>
               </a:rPr>
-              <a:t>Pin the files that matter with @. Keep the task in view. Sharp answers.</a:t>
+              <a:t>One task. Only what that task touches. Nothing left over from an hour ago.</a:t>
             </a:r>
             <a:endParaRPr lang="en-US" sz="1250" dirty="0"/>
           </a:p>
@@ -2841,9 +4535,159 @@
                 <a:ea typeface="Calibri" pitchFamily="34" charset="-122"/>
                 <a:cs typeface="Calibri" pitchFamily="34" charset="-120"/>
               </a:rPr>
-              <a:t>Cluttered and slow. Old threads leak in. /compact or start fresh.</a:t>
+              <a:t>Slow, and old threads leak into new answers. The window is full, so it starts forgetting.</a:t>
             </a:r>
             <a:endParaRPr lang="en-US" sz="1250" dirty="0"/>
+          </a:p>
+        </p:txBody>
+      </p:sp>
+      <p:sp>
+        <p:nvSpPr>
+          <p:cNvPr id="14" name="Text 14"/>
+          <p:cNvSpPr/>
+          <p:nvPr/>
+        </p:nvSpPr>
+        <p:spPr>
+          <a:xfrm>
+            <a:off x="658368" y="3803904"/>
+            <a:ext cx="2240280" cy="384048"/>
+          </a:xfrm>
+          <a:prstGeom prst="rect">
+            <a:avLst/>
+          </a:prstGeom>
+          <a:noFill/>
+          <a:ln/>
+        </p:spPr>
+        <p:txBody>
+          <a:bodyPr wrap="square" lIns="0" rIns="0" rtlCol="0" anchor="ctr"/>
+          <a:lstStyle/>
+          <a:p>
+            <a:pPr marL="0" indent="0">
+              <a:buNone/>
+            </a:pPr>
+            <a:r>
+              <a:rPr lang="en-US" sz="1150" b="1" dirty="0">
+                <a:solidFill>
+                  <a:srgbClr val="7C3AED"/>
+                </a:solidFill>
+                <a:latin typeface="Calibri" pitchFamily="34" charset="0"/>
+                <a:ea typeface="Calibri" pitchFamily="34" charset="-122"/>
+                <a:cs typeface="Calibri" pitchFamily="34" charset="-120"/>
+              </a:rPr>
+              <a:t>→ LOAD </a:t>
+            </a:r>
+            <a:r>
+              <a:rPr lang="en-US" sz="1100" i="1" dirty="0">
+                <a:solidFill>
+                  <a:srgbClr val="6E6389"/>
+                </a:solidFill>
+                <a:latin typeface="Calibri" pitchFamily="34" charset="0"/>
+                <a:ea typeface="Calibri" pitchFamily="34" charset="-122"/>
+                <a:cs typeface="Calibri" pitchFamily="34" charset="-120"/>
+              </a:rPr>
+              <a:t>more of the right thing</a:t>
+            </a:r>
+            <a:endParaRPr lang="en-US" sz="1150" dirty="0"/>
+          </a:p>
+        </p:txBody>
+      </p:sp>
+      <p:sp>
+        <p:nvSpPr>
+          <p:cNvPr id="15" name="Text 15"/>
+          <p:cNvSpPr/>
+          <p:nvPr/>
+        </p:nvSpPr>
+        <p:spPr>
+          <a:xfrm>
+            <a:off x="3429000" y="3803904"/>
+            <a:ext cx="2240280" cy="384048"/>
+          </a:xfrm>
+          <a:prstGeom prst="rect">
+            <a:avLst/>
+          </a:prstGeom>
+          <a:noFill/>
+          <a:ln/>
+        </p:spPr>
+        <p:txBody>
+          <a:bodyPr wrap="square" lIns="0" rIns="0" rtlCol="0" anchor="ctr"/>
+          <a:lstStyle/>
+          <a:p>
+            <a:pPr marL="0" indent="0">
+              <a:buNone/>
+            </a:pPr>
+            <a:r>
+              <a:rPr lang="en-US" sz="1150" b="1" dirty="0">
+                <a:solidFill>
+                  <a:srgbClr val="F59E0B"/>
+                </a:solidFill>
+                <a:latin typeface="Calibri" pitchFamily="34" charset="0"/>
+                <a:ea typeface="Calibri" pitchFamily="34" charset="-122"/>
+                <a:cs typeface="Calibri" pitchFamily="34" charset="-120"/>
+              </a:rPr>
+              <a:t>→ HOLD </a:t>
+            </a:r>
+            <a:r>
+              <a:rPr lang="en-US" sz="1100" i="1" dirty="0">
+                <a:solidFill>
+                  <a:srgbClr val="DDD6FE"/>
+                </a:solidFill>
+                <a:latin typeface="Calibri" pitchFamily="34" charset="0"/>
+                <a:ea typeface="Calibri" pitchFamily="34" charset="-122"/>
+                <a:cs typeface="Calibri" pitchFamily="34" charset="-120"/>
+              </a:rPr>
+              <a:t>live here</a:t>
+            </a:r>
+            <a:endParaRPr lang="en-US" sz="1150" dirty="0"/>
+          </a:p>
+        </p:txBody>
+      </p:sp>
+      <p:sp>
+        <p:nvSpPr>
+          <p:cNvPr id="16" name="Text 16"/>
+          <p:cNvSpPr/>
+          <p:nvPr/>
+        </p:nvSpPr>
+        <p:spPr>
+          <a:xfrm>
+            <a:off x="6208776" y="3803904"/>
+            <a:ext cx="2240280" cy="384048"/>
+          </a:xfrm>
+          <a:prstGeom prst="rect">
+            <a:avLst/>
+          </a:prstGeom>
+          <a:noFill/>
+          <a:ln/>
+        </p:spPr>
+        <p:txBody>
+          <a:bodyPr wrap="square" lIns="0" rIns="0" rtlCol="0" anchor="ctr"/>
+          <a:lstStyle/>
+          <a:p>
+            <a:pPr marL="0" indent="0">
+              <a:buNone/>
+            </a:pPr>
+            <a:r>
+              <a:rPr lang="en-US" sz="1150" b="1" dirty="0">
+                <a:solidFill>
+                  <a:srgbClr val="7C3AED"/>
+                </a:solidFill>
+                <a:latin typeface="Calibri" pitchFamily="34" charset="0"/>
+                <a:ea typeface="Calibri" pitchFamily="34" charset="-122"/>
+                <a:cs typeface="Calibri" pitchFamily="34" charset="-120"/>
+              </a:rPr>
+              <a:t>→ TRIM </a:t>
+            </a:r>
+            <a:r>
+              <a:rPr lang="en-US" sz="1100" i="1" dirty="0">
+                <a:solidFill>
+                  <a:srgbClr val="6E6389"/>
+                </a:solidFill>
+                <a:latin typeface="Calibri" pitchFamily="34" charset="0"/>
+                <a:ea typeface="Calibri" pitchFamily="34" charset="-122"/>
+                <a:cs typeface="Calibri" pitchFamily="34" charset="-120"/>
+              </a:rPr>
+              <a:t>then RESET</a:t>
+            </a:r>
+            <a:endParaRPr lang="en-US" sz="1150" dirty="0"/>
           </a:p>
         </p:txBody>
       </p:sp>
@@ -2855,7 +4699,7 @@
 </p:sld>
 </file>
 
-<file path=ppt/slides/slide11.xml><?xml version="1.0" encoding="utf-8"?>
+<file path=ppt/slides/slide13.xml><?xml version="1.0" encoding="utf-8"?>
 <p:sld xmlns:a="http://schemas.openxmlformats.org/drawingml/2006/main" xmlns:r="http://schemas.openxmlformats.org/officeDocument/2006/relationships" xmlns:p="http://schemas.openxmlformats.org/presentationml/2006/main">
   <p:cSld name="Slide 12">
     <p:bg>
@@ -3438,7 +5282,7 @@
 </p:sld>
 </file>
 
-<file path=ppt/slides/slide12.xml><?xml version="1.0" encoding="utf-8"?>
+<file path=ppt/slides/slide14.xml><?xml version="1.0" encoding="utf-8"?>
 <p:sld xmlns:a="http://schemas.openxmlformats.org/drawingml/2006/main" xmlns:r="http://schemas.openxmlformats.org/officeDocument/2006/relationships" xmlns:p="http://schemas.openxmlformats.org/presentationml/2006/main">
   <p:cSld name="Slide 13">
     <p:bg>
@@ -3848,7 +5692,7 @@
 </p:sld>
 </file>
 
-<file path=ppt/slides/slide13.xml><?xml version="1.0" encoding="utf-8"?>
+<file path=ppt/slides/slide15.xml><?xml version="1.0" encoding="utf-8"?>
 <p:sld xmlns:a="http://schemas.openxmlformats.org/drawingml/2006/main" xmlns:r="http://schemas.openxmlformats.org/officeDocument/2006/relationships" xmlns:p="http://schemas.openxmlformats.org/presentationml/2006/main">
   <p:cSld name="Slide 14">
     <p:bg>
@@ -4681,7 +6525,7 @@
 </p:sld>
 </file>
 
-<file path=ppt/slides/slide14.xml><?xml version="1.0" encoding="utf-8"?>
+<file path=ppt/slides/slide16.xml><?xml version="1.0" encoding="utf-8"?>
 <p:sld xmlns:a="http://schemas.openxmlformats.org/drawingml/2006/main" xmlns:r="http://schemas.openxmlformats.org/officeDocument/2006/relationships" xmlns:p="http://schemas.openxmlformats.org/presentationml/2006/main">
   <p:cSld name="Slide 15">
     <p:bg>
@@ -5254,7 +7098,7 @@
 </p:sld>
 </file>
 
-<file path=ppt/slides/slide15.xml><?xml version="1.0" encoding="utf-8"?>
+<file path=ppt/slides/slide17.xml><?xml version="1.0" encoding="utf-8"?>
 <p:sld xmlns:a="http://schemas.openxmlformats.org/drawingml/2006/main" xmlns:r="http://schemas.openxmlformats.org/officeDocument/2006/relationships" xmlns:p="http://schemas.openxmlformats.org/presentationml/2006/main">
   <p:cSld name="Slide 16">
     <p:bg>
@@ -5969,7 +7813,7 @@
 </p:sld>
 </file>
 
-<file path=ppt/slides/slide16.xml><?xml version="1.0" encoding="utf-8"?>
+<file path=ppt/slides/slide18.xml><?xml version="1.0" encoding="utf-8"?>
 <p:sld xmlns:a="http://schemas.openxmlformats.org/drawingml/2006/main" xmlns:r="http://schemas.openxmlformats.org/officeDocument/2006/relationships" xmlns:p="http://schemas.openxmlformats.org/presentationml/2006/main">
   <p:cSld name="Slide 17">
     <p:bg>
@@ -6289,6 +8133,2139 @@
 
 <file path=ppt/slides/slide2.xml><?xml version="1.0" encoding="utf-8"?>
 <p:sld xmlns:a="http://schemas.openxmlformats.org/drawingml/2006/main" xmlns:r="http://schemas.openxmlformats.org/officeDocument/2006/relationships" xmlns:p="http://schemas.openxmlformats.org/presentationml/2006/main">
+  <p:cSld name="Context 1 - Two Voices">
+    <p:bg>
+      <p:bgPr>
+        <a:solidFill>
+          <a:srgbClr val="F5F3FF"/>
+        </a:solidFill>
+        <a:effectLst/>
+      </p:bgPr>
+    </p:bg>
+    <p:spTree>
+      <p:nvGrpSpPr>
+        <p:cNvPr id="1" name=""/>
+        <p:cNvGrpSpPr/>
+        <p:nvPr/>
+      </p:nvGrpSpPr>
+      <p:grpSpPr>
+        <a:xfrm>
+          <a:off x="0" y="0"/>
+          <a:ext cx="0" cy="0"/>
+          <a:chOff x="0" y="0"/>
+          <a:chExt cx="0" cy="0"/>
+        </a:xfrm>
+      </p:grpSpPr>
+      <p:sp>
+        <p:nvSpPr>
+          <p:cNvPr id="2" name="Text 2"/>
+          <p:cNvSpPr/>
+          <p:nvPr/>
+        </p:nvSpPr>
+        <p:spPr>
+          <a:xfrm>
+            <a:off x="457200" y="292608"/>
+            <a:ext cx="8229600" cy="566928"/>
+          </a:xfrm>
+          <a:prstGeom prst="rect">
+            <a:avLst/>
+          </a:prstGeom>
+          <a:noFill/>
+          <a:ln/>
+        </p:spPr>
+        <p:txBody>
+          <a:bodyPr wrap="square" lIns="0" rIns="0" rtlCol="0" anchor="ctr"/>
+          <a:lstStyle/>
+          <a:p>
+            <a:pPr marL="0" indent="0" algn="l">
+              <a:buNone/>
+            </a:pPr>
+            <a:r>
+              <a:rPr lang="en-US" sz="1900" b="1" kern="0" spc="100" dirty="0">
+                <a:solidFill>
+                  <a:srgbClr val="2D1155"/>
+                </a:solidFill>
+                <a:latin typeface="Arial Black" pitchFamily="34" charset="0"/>
+                <a:ea typeface="Arial Black" pitchFamily="34" charset="-122"/>
+                <a:cs typeface="Arial Black" pitchFamily="34" charset="-120"/>
+              </a:rPr>
+              <a:t>ONE BOX, TWO VOICES</a:t>
+            </a:r>
+            <a:endParaRPr lang="en-US" sz="1200" dirty="0"/>
+          </a:p>
+        </p:txBody>
+      </p:sp>
+      <p:sp>
+        <p:nvSpPr>
+          <p:cNvPr id="3" name="Text 3"/>
+          <p:cNvSpPr/>
+          <p:nvPr/>
+        </p:nvSpPr>
+        <p:spPr>
+          <a:xfrm>
+            <a:off x="475488" y="896112"/>
+            <a:ext cx="8229600" cy="329184"/>
+          </a:xfrm>
+          <a:prstGeom prst="rect">
+            <a:avLst/>
+          </a:prstGeom>
+          <a:noFill/>
+          <a:ln/>
+        </p:spPr>
+        <p:txBody>
+          <a:bodyPr wrap="square" lIns="0" rIns="0" rtlCol="0" anchor="ctr"/>
+          <a:lstStyle/>
+          <a:p>
+            <a:pPr marL="0" indent="0" algn="l">
+              <a:buNone/>
+            </a:pPr>
+            <a:r>
+              <a:rPr lang="en-US" sz="1300" i="1" dirty="0">
+                <a:solidFill>
+                  <a:srgbClr val="6E6389"/>
+                </a:solidFill>
+                <a:latin typeface="Calibri" pitchFamily="34" charset="0"/>
+                <a:ea typeface="Calibri" pitchFamily="34" charset="-122"/>
+                <a:cs typeface="Calibri" pitchFamily="34" charset="-120"/>
+              </a:rPr>
+              <a:t>ChatGPT’s real invention wasn’t a smarter model. It was splitting the prompt in two.</a:t>
+            </a:r>
+            <a:endParaRPr lang="en-US" sz="1200" dirty="0"/>
+          </a:p>
+        </p:txBody>
+      </p:sp>
+      <p:pic>
+        <p:nvPicPr>
+          <p:cNvPr id="4" name="Image 0" descr="logo_icon.jpeg"/>
+          <p:cNvPicPr>
+            <a:picLocks noChangeAspect="1"/>
+          </p:cNvPicPr>
+          <p:nvPr/>
+        </p:nvPicPr>
+        <p:blipFill>
+          <a:blip r:embed="rId3"/>
+          <a:stretch>
+            <a:fillRect/>
+          </a:stretch>
+        </p:blipFill>
+        <p:spPr>
+          <a:xfrm>
+            <a:off x="8364931" y="4526280"/>
+            <a:ext cx="411480" cy="411480"/>
+          </a:xfrm>
+          <a:prstGeom prst="ellipse">
+            <a:avLst/>
+          </a:prstGeom>
+        </p:spPr>
+      </p:pic>
+      <p:sp>
+        <p:nvSpPr>
+          <p:cNvPr id="5" name="Text 5"/>
+          <p:cNvSpPr/>
+          <p:nvPr/>
+        </p:nvSpPr>
+        <p:spPr>
+          <a:xfrm>
+            <a:off x="457200" y="1389888"/>
+            <a:ext cx="3200400" cy="219456"/>
+          </a:xfrm>
+          <a:prstGeom prst="rect">
+            <a:avLst/>
+          </a:prstGeom>
+          <a:noFill/>
+          <a:ln/>
+        </p:spPr>
+        <p:txBody>
+          <a:bodyPr wrap="square" lIns="0" rIns="0" rtlCol="0" anchor="ctr"/>
+          <a:lstStyle/>
+          <a:p>
+            <a:pPr marL="0" indent="0" algn="l">
+              <a:buNone/>
+            </a:pPr>
+            <a:r>
+              <a:rPr lang="en-US" sz="900" b="1" spc="120" dirty="0">
+                <a:solidFill>
+                  <a:srgbClr val="6E6389"/>
+                </a:solidFill>
+                <a:latin typeface="Calibri" pitchFamily="34" charset="0"/>
+                <a:ea typeface="Calibri" pitchFamily="34" charset="-122"/>
+                <a:cs typeface="Calibri" pitchFamily="34" charset="-120"/>
+              </a:rPr>
+              <a:t>WHAT YOU TYPE</a:t>
+            </a:r>
+            <a:endParaRPr lang="en-US" sz="1200" dirty="0"/>
+          </a:p>
+        </p:txBody>
+      </p:sp>
+      <p:sp>
+        <p:nvSpPr>
+          <p:cNvPr id="6" name="Shape 6"/>
+          <p:cNvSpPr/>
+          <p:nvPr/>
+        </p:nvSpPr>
+        <p:spPr>
+          <a:xfrm>
+            <a:off x="457200" y="1700784"/>
+            <a:ext cx="3200400" cy="960120"/>
+          </a:xfrm>
+          <a:prstGeom prst="roundRect">
+            <a:avLst>
+              <a:gd name="adj" fmla="val 8000"/>
+            </a:avLst>
+          </a:prstGeom>
+          <a:solidFill>
+            <a:srgbClr val="FFFFFF"/>
+          </a:solidFill>
+          <a:ln w="12700">
+            <a:solidFill>
+              <a:srgbClr val="DDD6FE"/>
+            </a:solidFill>
+          </a:ln>
+        </p:spPr>
+        <p:txBody>
+          <a:bodyPr/>
+          <a:lstStyle/>
+          <a:p>
+            <a:endParaRPr lang="en-AU"/>
+          </a:p>
+        </p:txBody>
+      </p:sp>
+      <p:sp>
+        <p:nvSpPr>
+          <p:cNvPr id="7" name="Text 7"/>
+          <p:cNvSpPr/>
+          <p:nvPr/>
+        </p:nvSpPr>
+        <p:spPr>
+          <a:xfrm>
+            <a:off x="658368" y="1700784"/>
+            <a:ext cx="2377440" cy="960120"/>
+          </a:xfrm>
+          <a:prstGeom prst="rect">
+            <a:avLst/>
+          </a:prstGeom>
+          <a:noFill/>
+          <a:ln/>
+        </p:spPr>
+        <p:txBody>
+          <a:bodyPr wrap="square" lIns="0" rIns="0" rtlCol="0" anchor="ctr"/>
+          <a:lstStyle/>
+          <a:p>
+            <a:pPr marL="0" indent="0" algn="l">
+              <a:buNone/>
+            </a:pPr>
+            <a:r>
+              <a:rPr lang="en-US" sz="1150" dirty="0">
+                <a:solidFill>
+                  <a:srgbClr val="2D1155"/>
+                </a:solidFill>
+                <a:latin typeface="Courier New" pitchFamily="34" charset="0"/>
+                <a:ea typeface="Courier New" pitchFamily="34" charset="-122"/>
+                <a:cs typeface="Courier New" pitchFamily="34" charset="-120"/>
+              </a:rPr>
+              <a:t>Fix the login bug.</a:t>
+            </a:r>
+            <a:endParaRPr lang="en-US" sz="1200" dirty="0"/>
+          </a:p>
+        </p:txBody>
+      </p:sp>
+      <p:sp>
+        <p:nvSpPr>
+          <p:cNvPr id="8" name="Shape 8"/>
+          <p:cNvSpPr/>
+          <p:nvPr/>
+        </p:nvSpPr>
+        <p:spPr>
+          <a:xfrm>
+            <a:off x="3090672" y="1975104"/>
+            <a:ext cx="384048" cy="384048"/>
+          </a:xfrm>
+          <a:prstGeom prst="roundRect">
+            <a:avLst>
+              <a:gd name="adj" fmla="val 50000"/>
+            </a:avLst>
+          </a:prstGeom>
+          <a:solidFill>
+            <a:srgbClr val="7C3AED"/>
+          </a:solidFill>
+          <a:ln/>
+        </p:spPr>
+        <p:txBody>
+          <a:bodyPr/>
+          <a:lstStyle/>
+          <a:p>
+            <a:endParaRPr lang="en-AU"/>
+          </a:p>
+        </p:txBody>
+      </p:sp>
+      <p:sp>
+        <p:nvSpPr>
+          <p:cNvPr id="9" name="Text 9"/>
+          <p:cNvSpPr/>
+          <p:nvPr/>
+        </p:nvSpPr>
+        <p:spPr>
+          <a:xfrm>
+            <a:off x="3090672" y="1975104"/>
+            <a:ext cx="384048" cy="384048"/>
+          </a:xfrm>
+          <a:prstGeom prst="rect">
+            <a:avLst/>
+          </a:prstGeom>
+          <a:noFill/>
+          <a:ln/>
+        </p:spPr>
+        <p:txBody>
+          <a:bodyPr wrap="square" lIns="0" rIns="0" rtlCol="0" anchor="ctr"/>
+          <a:lstStyle/>
+          <a:p>
+            <a:pPr marL="0" indent="0" algn="ctr">
+              <a:buNone/>
+            </a:pPr>
+            <a:r>
+              <a:rPr lang="en-US" sz="1300" b="1" dirty="0">
+                <a:solidFill>
+                  <a:srgbClr val="FFFFFF"/>
+                </a:solidFill>
+                <a:latin typeface="Calibri" pitchFamily="34" charset="0"/>
+                <a:ea typeface="Calibri" pitchFamily="34" charset="-122"/>
+                <a:cs typeface="Calibri" pitchFamily="34" charset="-120"/>
+              </a:rPr>
+              <a:t>↑</a:t>
+            </a:r>
+            <a:endParaRPr lang="en-US" sz="1200" dirty="0"/>
+          </a:p>
+        </p:txBody>
+      </p:sp>
+      <p:sp>
+        <p:nvSpPr>
+          <p:cNvPr id="10" name="Text 10"/>
+          <p:cNvSpPr/>
+          <p:nvPr/>
+        </p:nvSpPr>
+        <p:spPr>
+          <a:xfrm>
+            <a:off x="457200" y="2816352"/>
+            <a:ext cx="3200400" cy="914400"/>
+          </a:xfrm>
+          <a:prstGeom prst="rect">
+            <a:avLst/>
+          </a:prstGeom>
+          <a:noFill/>
+          <a:ln/>
+        </p:spPr>
+        <p:txBody>
+          <a:bodyPr wrap="square" lIns="0" rIns="0" rtlCol="0" anchor="t"/>
+          <a:lstStyle/>
+          <a:p>
+            <a:pPr marL="0" indent="0" algn="l">
+              <a:spcAft>
+                <a:spcPts val="300"/>
+              </a:spcAft>
+              <a:buNone/>
+            </a:pPr>
+            <a:r>
+              <a:rPr lang="en-US" sz="1100" b="1" dirty="0">
+                <a:solidFill>
+                  <a:srgbClr val="2D1155"/>
+                </a:solidFill>
+                <a:latin typeface="Calibri" pitchFamily="34" charset="0"/>
+                <a:ea typeface="Calibri" pitchFamily="34" charset="-122"/>
+                <a:cs typeface="Calibri" pitchFamily="34" charset="-120"/>
+              </a:rPr>
+              <a:t>Four words. One box.</a:t>
+            </a:r>
+            <a:endParaRPr lang="en-US" sz="1000" dirty="0"/>
+          </a:p>
+          <a:p>
+            <a:pPr marL="0" indent="0" algn="l">
+              <a:spcAft>
+                <a:spcPts val="300"/>
+              </a:spcAft>
+              <a:buNone/>
+            </a:pPr>
+            <a:r>
+              <a:rPr lang="en-US" sz="1050" dirty="0">
+                <a:solidFill>
+                  <a:srgbClr val="6E6389"/>
+                </a:solidFill>
+                <a:latin typeface="Calibri" pitchFamily="34" charset="0"/>
+                <a:ea typeface="Calibri" pitchFamily="34" charset="-122"/>
+                <a:cs typeface="Calibri" pitchFamily="34" charset="-120"/>
+              </a:rPr>
+              <a:t>This is the only part of the prompt you ever see.</a:t>
+            </a:r>
+            <a:endParaRPr lang="en-US" sz="1000" dirty="0"/>
+          </a:p>
+        </p:txBody>
+      </p:sp>
+      <p:sp>
+        <p:nvSpPr>
+          <p:cNvPr id="11" name="Text 11"/>
+          <p:cNvSpPr/>
+          <p:nvPr/>
+        </p:nvSpPr>
+        <p:spPr>
+          <a:xfrm>
+            <a:off x="3767328" y="1700784"/>
+            <a:ext cx="502920" cy="960120"/>
+          </a:xfrm>
+          <a:prstGeom prst="rect">
+            <a:avLst/>
+          </a:prstGeom>
+          <a:noFill/>
+          <a:ln/>
+        </p:spPr>
+        <p:txBody>
+          <a:bodyPr wrap="square" lIns="0" rIns="0" rtlCol="0" anchor="ctr"/>
+          <a:lstStyle/>
+          <a:p>
+            <a:pPr marL="0" indent="0" algn="ctr">
+              <a:buNone/>
+            </a:pPr>
+            <a:r>
+              <a:rPr lang="en-US" sz="2800" b="1" dirty="0">
+                <a:solidFill>
+                  <a:srgbClr val="7C3AED"/>
+                </a:solidFill>
+                <a:latin typeface="Calibri" pitchFamily="34" charset="0"/>
+                <a:ea typeface="Calibri" pitchFamily="34" charset="-122"/>
+                <a:cs typeface="Calibri" pitchFamily="34" charset="-120"/>
+              </a:rPr>
+              <a:t>›</a:t>
+            </a:r>
+            <a:endParaRPr lang="en-US" sz="1200" dirty="0"/>
+          </a:p>
+        </p:txBody>
+      </p:sp>
+      <p:sp>
+        <p:nvSpPr>
+          <p:cNvPr id="12" name="Text 12"/>
+          <p:cNvSpPr/>
+          <p:nvPr/>
+        </p:nvSpPr>
+        <p:spPr>
+          <a:xfrm>
+            <a:off x="3630168" y="2697480"/>
+            <a:ext cx="777240" cy="731520"/>
+          </a:xfrm>
+          <a:prstGeom prst="rect">
+            <a:avLst/>
+          </a:prstGeom>
+          <a:noFill/>
+          <a:ln/>
+        </p:spPr>
+        <p:txBody>
+          <a:bodyPr wrap="square" lIns="0" rIns="0" rtlCol="0" anchor="t"/>
+          <a:lstStyle/>
+          <a:p>
+            <a:pPr marL="0" indent="0" algn="ctr">
+              <a:spcAft>
+                <a:spcPts val="0"/>
+              </a:spcAft>
+              <a:buNone/>
+            </a:pPr>
+            <a:r>
+              <a:rPr lang="en-US" sz="850" i="1" dirty="0">
+                <a:solidFill>
+                  <a:srgbClr val="6E6389"/>
+                </a:solidFill>
+                <a:latin typeface="Calibri" pitchFamily="34" charset="0"/>
+                <a:ea typeface="Calibri" pitchFamily="34" charset="-122"/>
+                <a:cs typeface="Calibri" pitchFamily="34" charset="-120"/>
+              </a:rPr>
+              <a:t>the app</a:t>
+            </a:r>
+            <a:endParaRPr lang="en-US" sz="1000" dirty="0"/>
+          </a:p>
+          <a:p>
+            <a:pPr marL="0" indent="0" algn="ctr">
+              <a:spcAft>
+                <a:spcPts val="0"/>
+              </a:spcAft>
+              <a:buNone/>
+            </a:pPr>
+            <a:r>
+              <a:rPr lang="en-US" sz="850" b="1" i="1" dirty="0">
+                <a:solidFill>
+                  <a:srgbClr val="7C3AED"/>
+                </a:solidFill>
+                <a:latin typeface="Calibri" pitchFamily="34" charset="0"/>
+                <a:ea typeface="Calibri" pitchFamily="34" charset="-122"/>
+                <a:cs typeface="Calibri" pitchFamily="34" charset="-120"/>
+              </a:rPr>
+              <a:t>prepends</a:t>
+            </a:r>
+            <a:endParaRPr lang="en-US" sz="1000" dirty="0"/>
+          </a:p>
+        </p:txBody>
+      </p:sp>
+      <p:sp>
+        <p:nvSpPr>
+          <p:cNvPr id="13" name="Text 13"/>
+          <p:cNvSpPr/>
+          <p:nvPr/>
+        </p:nvSpPr>
+        <p:spPr>
+          <a:xfrm>
+            <a:off x="4434840" y="1389888"/>
+            <a:ext cx="4160520" cy="219456"/>
+          </a:xfrm>
+          <a:prstGeom prst="rect">
+            <a:avLst/>
+          </a:prstGeom>
+          <a:noFill/>
+          <a:ln/>
+        </p:spPr>
+        <p:txBody>
+          <a:bodyPr wrap="square" lIns="0" rIns="0" rtlCol="0" anchor="ctr"/>
+          <a:lstStyle/>
+          <a:p>
+            <a:pPr marL="0" indent="0" algn="l">
+              <a:buNone/>
+            </a:pPr>
+            <a:r>
+              <a:rPr lang="en-US" sz="900" b="1" spc="120" dirty="0">
+                <a:solidFill>
+                  <a:srgbClr val="F59E0B"/>
+                </a:solidFill>
+                <a:latin typeface="Calibri" pitchFamily="34" charset="0"/>
+                <a:ea typeface="Calibri" pitchFamily="34" charset="-122"/>
+                <a:cs typeface="Calibri" pitchFamily="34" charset="-120"/>
+              </a:rPr>
+              <a:t>WHAT THE MODEL ACTUALLY READS</a:t>
+            </a:r>
+            <a:endParaRPr lang="en-US" sz="1200" dirty="0"/>
+          </a:p>
+        </p:txBody>
+      </p:sp>
+      <p:sp>
+        <p:nvSpPr>
+          <p:cNvPr id="14" name="Shape 14"/>
+          <p:cNvSpPr/>
+          <p:nvPr/>
+        </p:nvSpPr>
+        <p:spPr>
+          <a:xfrm>
+            <a:off x="4434840" y="1700784"/>
+            <a:ext cx="4160520" cy="2148840"/>
+          </a:xfrm>
+          <a:prstGeom prst="roundRect">
+            <a:avLst>
+              <a:gd name="adj" fmla="val 6000"/>
+            </a:avLst>
+          </a:prstGeom>
+          <a:solidFill>
+            <a:srgbClr val="2D1155"/>
+          </a:solidFill>
+          <a:ln/>
+        </p:spPr>
+        <p:txBody>
+          <a:bodyPr/>
+          <a:lstStyle/>
+          <a:p>
+            <a:endParaRPr lang="en-AU"/>
+          </a:p>
+        </p:txBody>
+      </p:sp>
+      <p:sp>
+        <p:nvSpPr>
+          <p:cNvPr id="15" name="Shape 15"/>
+          <p:cNvSpPr/>
+          <p:nvPr/>
+        </p:nvSpPr>
+        <p:spPr>
+          <a:xfrm>
+            <a:off x="4617720" y="1865376"/>
+            <a:ext cx="3794760" cy="914400"/>
+          </a:xfrm>
+          <a:prstGeom prst="roundRect">
+            <a:avLst>
+              <a:gd name="adj" fmla="val 7000"/>
+            </a:avLst>
+          </a:prstGeom>
+          <a:solidFill>
+            <a:srgbClr val="5B21B6"/>
+          </a:solidFill>
+          <a:ln/>
+        </p:spPr>
+        <p:txBody>
+          <a:bodyPr/>
+          <a:lstStyle/>
+          <a:p>
+            <a:endParaRPr lang="en-AU"/>
+          </a:p>
+        </p:txBody>
+      </p:sp>
+      <p:sp>
+        <p:nvSpPr>
+          <p:cNvPr id="16" name="Text 16"/>
+          <p:cNvSpPr/>
+          <p:nvPr/>
+        </p:nvSpPr>
+        <p:spPr>
+          <a:xfrm>
+            <a:off x="4745736" y="1920240"/>
+            <a:ext cx="3538728" cy="219456"/>
+          </a:xfrm>
+          <a:prstGeom prst="rect">
+            <a:avLst/>
+          </a:prstGeom>
+          <a:noFill/>
+          <a:ln/>
+        </p:spPr>
+        <p:txBody>
+          <a:bodyPr wrap="square" lIns="0" rIns="0" rtlCol="0" anchor="ctr"/>
+          <a:lstStyle/>
+          <a:p>
+            <a:pPr marL="0" indent="0" algn="l">
+              <a:buNone/>
+            </a:pPr>
+            <a:r>
+              <a:rPr lang="en-US" sz="800" b="1" spc="60" dirty="0">
+                <a:solidFill>
+                  <a:srgbClr val="F59E0B"/>
+                </a:solidFill>
+                <a:latin typeface="Calibri" pitchFamily="34" charset="0"/>
+                <a:ea typeface="Calibri" pitchFamily="34" charset="-122"/>
+                <a:cs typeface="Calibri" pitchFamily="34" charset="-120"/>
+              </a:rPr>
+              <a:t>SYSTEM PROMPT  ·  you never see this</a:t>
+            </a:r>
+            <a:endParaRPr lang="en-US" sz="1200" dirty="0"/>
+          </a:p>
+        </p:txBody>
+      </p:sp>
+      <p:sp>
+        <p:nvSpPr>
+          <p:cNvPr id="17" name="Text 17"/>
+          <p:cNvSpPr/>
+          <p:nvPr/>
+        </p:nvSpPr>
+        <p:spPr>
+          <a:xfrm>
+            <a:off x="4745736" y="2176272"/>
+            <a:ext cx="3538728" cy="566928"/>
+          </a:xfrm>
+          <a:prstGeom prst="rect">
+            <a:avLst/>
+          </a:prstGeom>
+          <a:noFill/>
+          <a:ln/>
+        </p:spPr>
+        <p:txBody>
+          <a:bodyPr wrap="square" lIns="0" rIns="0" rtlCol="0" anchor="t"/>
+          <a:lstStyle/>
+          <a:p>
+            <a:pPr marL="0" indent="0" algn="l">
+              <a:spcAft>
+                <a:spcPts val="100"/>
+              </a:spcAft>
+              <a:buNone/>
+            </a:pPr>
+            <a:r>
+              <a:rPr lang="en-US" sz="900" dirty="0">
+                <a:solidFill>
+                  <a:srgbClr val="DDD6FE"/>
+                </a:solidFill>
+                <a:latin typeface="Courier New" pitchFamily="34" charset="0"/>
+                <a:ea typeface="Courier New" pitchFamily="34" charset="-122"/>
+                <a:cs typeface="Courier New" pitchFamily="34" charset="-120"/>
+              </a:rPr>
+              <a:t>You are a helpful coding assistant.</a:t>
+            </a:r>
+            <a:endParaRPr lang="en-US" sz="1000" dirty="0"/>
+          </a:p>
+          <a:p>
+            <a:pPr marL="0" indent="0" algn="l">
+              <a:spcAft>
+                <a:spcPts val="100"/>
+              </a:spcAft>
+              <a:buNone/>
+            </a:pPr>
+            <a:r>
+              <a:rPr lang="en-US" sz="900" dirty="0">
+                <a:solidFill>
+                  <a:srgbClr val="DDD6FE"/>
+                </a:solidFill>
+                <a:latin typeface="Courier New" pitchFamily="34" charset="0"/>
+                <a:ea typeface="Courier New" pitchFamily="34" charset="-122"/>
+                <a:cs typeface="Courier New" pitchFamily="34" charset="-120"/>
+              </a:rPr>
+              <a:t>You have these tools: read, write, bash…</a:t>
+            </a:r>
+            <a:endParaRPr lang="en-US" sz="1000" dirty="0"/>
+          </a:p>
+        </p:txBody>
+      </p:sp>
+      <p:sp>
+        <p:nvSpPr>
+          <p:cNvPr id="18" name="Shape 18"/>
+          <p:cNvSpPr/>
+          <p:nvPr/>
+        </p:nvSpPr>
+        <p:spPr>
+          <a:xfrm>
+            <a:off x="4617720" y="2889504"/>
+            <a:ext cx="3794760" cy="777240"/>
+          </a:xfrm>
+          <a:prstGeom prst="roundRect">
+            <a:avLst>
+              <a:gd name="adj" fmla="val 8000"/>
+            </a:avLst>
+          </a:prstGeom>
+          <a:solidFill>
+            <a:srgbClr val="FFFFFF"/>
+          </a:solidFill>
+          <a:ln/>
+        </p:spPr>
+        <p:txBody>
+          <a:bodyPr/>
+          <a:lstStyle/>
+          <a:p>
+            <a:endParaRPr lang="en-AU"/>
+          </a:p>
+        </p:txBody>
+      </p:sp>
+      <p:sp>
+        <p:nvSpPr>
+          <p:cNvPr id="19" name="Text 19"/>
+          <p:cNvSpPr/>
+          <p:nvPr/>
+        </p:nvSpPr>
+        <p:spPr>
+          <a:xfrm>
+            <a:off x="4745736" y="2944368"/>
+            <a:ext cx="3538728" cy="219456"/>
+          </a:xfrm>
+          <a:prstGeom prst="rect">
+            <a:avLst/>
+          </a:prstGeom>
+          <a:noFill/>
+          <a:ln/>
+        </p:spPr>
+        <p:txBody>
+          <a:bodyPr wrap="square" lIns="0" rIns="0" rtlCol="0" anchor="ctr"/>
+          <a:lstStyle/>
+          <a:p>
+            <a:pPr marL="0" indent="0" algn="l">
+              <a:buNone/>
+            </a:pPr>
+            <a:r>
+              <a:rPr lang="en-US" sz="800" b="1" spc="60" dirty="0">
+                <a:solidFill>
+                  <a:srgbClr val="7C3AED"/>
+                </a:solidFill>
+                <a:latin typeface="Calibri" pitchFamily="34" charset="0"/>
+                <a:ea typeface="Calibri" pitchFamily="34" charset="-122"/>
+                <a:cs typeface="Calibri" pitchFamily="34" charset="-120"/>
+              </a:rPr>
+              <a:t>USER PROMPT  ·  the bit you typed</a:t>
+            </a:r>
+            <a:endParaRPr lang="en-US" sz="1200" dirty="0"/>
+          </a:p>
+        </p:txBody>
+      </p:sp>
+      <p:sp>
+        <p:nvSpPr>
+          <p:cNvPr id="20" name="Text 20"/>
+          <p:cNvSpPr/>
+          <p:nvPr/>
+        </p:nvSpPr>
+        <p:spPr>
+          <a:xfrm>
+            <a:off x="4745736" y="3200400"/>
+            <a:ext cx="3538728" cy="365760"/>
+          </a:xfrm>
+          <a:prstGeom prst="rect">
+            <a:avLst/>
+          </a:prstGeom>
+          <a:noFill/>
+          <a:ln/>
+        </p:spPr>
+        <p:txBody>
+          <a:bodyPr wrap="square" lIns="0" rIns="0" rtlCol="0" anchor="ctr"/>
+          <a:lstStyle/>
+          <a:p>
+            <a:pPr marL="0" indent="0" algn="l">
+              <a:buNone/>
+            </a:pPr>
+            <a:r>
+              <a:rPr lang="en-US" sz="900" dirty="0">
+                <a:solidFill>
+                  <a:srgbClr val="2D1155"/>
+                </a:solidFill>
+                <a:latin typeface="Courier New" pitchFamily="34" charset="0"/>
+                <a:ea typeface="Courier New" pitchFamily="34" charset="-122"/>
+                <a:cs typeface="Courier New" pitchFamily="34" charset="-120"/>
+              </a:rPr>
+              <a:t>Fix the login bug.</a:t>
+            </a:r>
+            <a:endParaRPr lang="en-US" sz="1200" dirty="0"/>
+          </a:p>
+        </p:txBody>
+      </p:sp>
+      <p:sp>
+        <p:nvSpPr>
+          <p:cNvPr id="21" name="Shape 21"/>
+          <p:cNvSpPr/>
+          <p:nvPr/>
+        </p:nvSpPr>
+        <p:spPr>
+          <a:xfrm>
+            <a:off x="457200" y="4096512"/>
+            <a:ext cx="7772400" cy="420624"/>
+          </a:xfrm>
+          <a:prstGeom prst="roundRect">
+            <a:avLst>
+              <a:gd name="adj" fmla="val 12000"/>
+            </a:avLst>
+          </a:prstGeom>
+          <a:solidFill>
+            <a:srgbClr val="2D1155"/>
+          </a:solidFill>
+          <a:ln/>
+        </p:spPr>
+        <p:txBody>
+          <a:bodyPr/>
+          <a:lstStyle/>
+          <a:p>
+            <a:endParaRPr lang="en-AU"/>
+          </a:p>
+        </p:txBody>
+      </p:sp>
+      <p:sp>
+        <p:nvSpPr>
+          <p:cNvPr id="22" name="Text 22"/>
+          <p:cNvSpPr/>
+          <p:nvPr/>
+        </p:nvSpPr>
+        <p:spPr>
+          <a:xfrm>
+            <a:off x="685800" y="4096512"/>
+            <a:ext cx="7315200" cy="420624"/>
+          </a:xfrm>
+          <a:prstGeom prst="rect">
+            <a:avLst/>
+          </a:prstGeom>
+          <a:noFill/>
+          <a:ln/>
+        </p:spPr>
+        <p:txBody>
+          <a:bodyPr wrap="square" lIns="0" rIns="0" rtlCol="0" anchor="ctr"/>
+          <a:lstStyle/>
+          <a:p>
+            <a:pPr marL="0" indent="0" algn="ctr">
+              <a:buNone/>
+            </a:pPr>
+            <a:r>
+              <a:rPr lang="en-US" sz="1150" dirty="0">
+                <a:solidFill>
+                  <a:srgbClr val="DDD6FE"/>
+                </a:solidFill>
+                <a:latin typeface="Calibri" pitchFamily="34" charset="0"/>
+                <a:ea typeface="Calibri" pitchFamily="34" charset="-122"/>
+                <a:cs typeface="Calibri" pitchFamily="34" charset="-120"/>
+              </a:rPr>
+              <a:t>One stream of text. The model cannot tell your words from the builder’s — </a:t>
+            </a:r>
+            <a:r>
+              <a:rPr lang="en-US" sz="1150" b="1" dirty="0">
+                <a:solidFill>
+                  <a:srgbClr val="F59E0B"/>
+                </a:solidFill>
+                <a:latin typeface="Calibri" pitchFamily="34" charset="0"/>
+                <a:ea typeface="Calibri" pitchFamily="34" charset="-122"/>
+                <a:cs typeface="Calibri" pitchFamily="34" charset="-120"/>
+              </a:rPr>
+              <a:t>it just reads the box, top to bottom.</a:t>
+            </a:r>
+            <a:endParaRPr lang="en-US" sz="1200" dirty="0"/>
+          </a:p>
+        </p:txBody>
+      </p:sp>
+    </p:spTree>
+  </p:cSld>
+  <p:clrMapOvr>
+    <a:masterClrMapping/>
+  </p:clrMapOvr>
+  <p:transition spd="slow">
+    <p:fade/>
+  </p:transition>
+</p:sld>
+</file>
+
+<file path=ppt/slides/slide3.xml><?xml version="1.0" encoding="utf-8"?>
+<p:sld xmlns:a="http://schemas.openxmlformats.org/drawingml/2006/main" xmlns:r="http://schemas.openxmlformats.org/officeDocument/2006/relationships" xmlns:p="http://schemas.openxmlformats.org/presentationml/2006/main">
+  <p:cSld name="Context 2 - The Stack">
+    <p:bg>
+      <p:bgPr>
+        <a:solidFill>
+          <a:srgbClr val="F5F3FF"/>
+        </a:solidFill>
+        <a:effectLst/>
+      </p:bgPr>
+    </p:bg>
+    <p:spTree>
+      <p:nvGrpSpPr>
+        <p:cNvPr id="1" name=""/>
+        <p:cNvGrpSpPr/>
+        <p:nvPr/>
+      </p:nvGrpSpPr>
+      <p:grpSpPr>
+        <a:xfrm>
+          <a:off x="0" y="0"/>
+          <a:ext cx="0" cy="0"/>
+          <a:chOff x="0" y="0"/>
+          <a:chExt cx="0" cy="0"/>
+        </a:xfrm>
+      </p:grpSpPr>
+      <p:sp>
+        <p:nvSpPr>
+          <p:cNvPr id="2" name="Text 2"/>
+          <p:cNvSpPr/>
+          <p:nvPr/>
+        </p:nvSpPr>
+        <p:spPr>
+          <a:xfrm>
+            <a:off x="457200" y="292608"/>
+            <a:ext cx="8229600" cy="566928"/>
+          </a:xfrm>
+          <a:prstGeom prst="rect">
+            <a:avLst/>
+          </a:prstGeom>
+          <a:noFill/>
+          <a:ln/>
+        </p:spPr>
+        <p:txBody>
+          <a:bodyPr wrap="square" lIns="0" rIns="0" rtlCol="0" anchor="ctr"/>
+          <a:lstStyle/>
+          <a:p>
+            <a:pPr marL="0" indent="0" algn="l">
+              <a:buNone/>
+            </a:pPr>
+            <a:r>
+              <a:rPr lang="en-US" sz="1900" b="1" kern="0" spc="100" dirty="0">
+                <a:solidFill>
+                  <a:srgbClr val="2D1155"/>
+                </a:solidFill>
+                <a:latin typeface="Arial Black" pitchFamily="34" charset="0"/>
+                <a:ea typeface="Arial Black" pitchFamily="34" charset="-122"/>
+                <a:cs typeface="Arial Black" pitchFamily="34" charset="-120"/>
+              </a:rPr>
+              <a:t>CONTEXT ENGINEERING</a:t>
+            </a:r>
+            <a:endParaRPr lang="en-US" sz="1200" dirty="0"/>
+          </a:p>
+        </p:txBody>
+      </p:sp>
+      <p:sp>
+        <p:nvSpPr>
+          <p:cNvPr id="3" name="Text 3"/>
+          <p:cNvSpPr/>
+          <p:nvPr/>
+        </p:nvSpPr>
+        <p:spPr>
+          <a:xfrm>
+            <a:off x="475488" y="896112"/>
+            <a:ext cx="8229600" cy="329184"/>
+          </a:xfrm>
+          <a:prstGeom prst="rect">
+            <a:avLst/>
+          </a:prstGeom>
+          <a:noFill/>
+          <a:ln/>
+        </p:spPr>
+        <p:txBody>
+          <a:bodyPr wrap="square" lIns="0" rIns="0" rtlCol="0" anchor="ctr"/>
+          <a:lstStyle/>
+          <a:p>
+            <a:pPr marL="0" indent="0" algn="l">
+              <a:buNone/>
+            </a:pPr>
+            <a:r>
+              <a:rPr lang="en-US" sz="1300" i="1" dirty="0">
+                <a:solidFill>
+                  <a:srgbClr val="6E6389"/>
+                </a:solidFill>
+                <a:latin typeface="Calibri" pitchFamily="34" charset="0"/>
+                <a:ea typeface="Calibri" pitchFamily="34" charset="-122"/>
+                <a:cs typeface="Calibri" pitchFamily="34" charset="-120"/>
+              </a:rPr>
+              <a:t>The system prompt isn’t one thing. It’s a stack, reassembled on every single call.</a:t>
+            </a:r>
+            <a:endParaRPr lang="en-US" sz="1200" dirty="0"/>
+          </a:p>
+        </p:txBody>
+      </p:sp>
+      <p:pic>
+        <p:nvPicPr>
+          <p:cNvPr id="4" name="Image 0" descr="logo_icon.jpeg"/>
+          <p:cNvPicPr>
+            <a:picLocks noChangeAspect="1"/>
+          </p:cNvPicPr>
+          <p:nvPr/>
+        </p:nvPicPr>
+        <p:blipFill>
+          <a:blip r:embed="rId3"/>
+          <a:stretch>
+            <a:fillRect/>
+          </a:stretch>
+        </p:blipFill>
+        <p:spPr>
+          <a:xfrm>
+            <a:off x="8364931" y="4526280"/>
+            <a:ext cx="411480" cy="411480"/>
+          </a:xfrm>
+          <a:prstGeom prst="ellipse">
+            <a:avLst/>
+          </a:prstGeom>
+        </p:spPr>
+      </p:pic>
+      <p:sp>
+        <p:nvSpPr>
+          <p:cNvPr id="5" name="Shape 5"/>
+          <p:cNvSpPr/>
+          <p:nvPr/>
+        </p:nvSpPr>
+        <p:spPr>
+          <a:xfrm>
+            <a:off x="457200" y="1371600"/>
+            <a:ext cx="5257800" cy="2560320"/>
+          </a:xfrm>
+          <a:prstGeom prst="roundRect">
+            <a:avLst>
+              <a:gd name="adj" fmla="val 3200"/>
+            </a:avLst>
+          </a:prstGeom>
+          <a:solidFill>
+            <a:srgbClr val="FFFFFF"/>
+          </a:solidFill>
+          <a:ln w="19050">
+            <a:solidFill>
+              <a:srgbClr val="F59E0B"/>
+            </a:solidFill>
+          </a:ln>
+        </p:spPr>
+        <p:txBody>
+          <a:bodyPr/>
+          <a:lstStyle/>
+          <a:p>
+            <a:endParaRPr lang="en-AU"/>
+          </a:p>
+        </p:txBody>
+      </p:sp>
+      <p:sp>
+        <p:nvSpPr>
+          <p:cNvPr id="6" name="Text 6"/>
+          <p:cNvSpPr/>
+          <p:nvPr/>
+        </p:nvSpPr>
+        <p:spPr>
+          <a:xfrm>
+            <a:off x="658368" y="1463040"/>
+            <a:ext cx="4855464" cy="256032"/>
+          </a:xfrm>
+          <a:prstGeom prst="rect">
+            <a:avLst/>
+          </a:prstGeom>
+          <a:noFill/>
+          <a:ln/>
+        </p:spPr>
+        <p:txBody>
+          <a:bodyPr wrap="square" lIns="0" rIns="0" rtlCol="0" anchor="ctr"/>
+          <a:lstStyle/>
+          <a:p>
+            <a:pPr marL="0" indent="0" algn="l">
+              <a:buNone/>
+            </a:pPr>
+            <a:r>
+              <a:rPr lang="en-US" sz="950" b="1" spc="100" dirty="0">
+                <a:solidFill>
+                  <a:srgbClr val="F59E0B"/>
+                </a:solidFill>
+                <a:latin typeface="Arial Black" pitchFamily="34" charset="0"/>
+                <a:ea typeface="Arial Black" pitchFamily="34" charset="-122"/>
+                <a:cs typeface="Arial Black" pitchFamily="34" charset="-120"/>
+              </a:rPr>
+              <a:t>THE CONTEXT WINDOW</a:t>
+            </a:r>
+            <a:endParaRPr lang="en-US" sz="1200" dirty="0"/>
+          </a:p>
+        </p:txBody>
+      </p:sp>
+      <p:sp>
+        <p:nvSpPr>
+          <p:cNvPr id="7" name="Text 7"/>
+          <p:cNvSpPr/>
+          <p:nvPr/>
+        </p:nvSpPr>
+        <p:spPr>
+          <a:xfrm>
+            <a:off x="658368" y="1463040"/>
+            <a:ext cx="4855464" cy="256032"/>
+          </a:xfrm>
+          <a:prstGeom prst="rect">
+            <a:avLst/>
+          </a:prstGeom>
+          <a:noFill/>
+          <a:ln/>
+        </p:spPr>
+        <p:txBody>
+          <a:bodyPr wrap="square" lIns="0" rIns="0" rtlCol="0" anchor="ctr"/>
+          <a:lstStyle/>
+          <a:p>
+            <a:pPr marL="0" indent="0" algn="r">
+              <a:buNone/>
+            </a:pPr>
+            <a:r>
+              <a:rPr lang="en-US" sz="850" i="1" dirty="0">
+                <a:solidFill>
+                  <a:srgbClr val="6E6389"/>
+                </a:solidFill>
+                <a:latin typeface="Calibri" pitchFamily="34" charset="0"/>
+                <a:ea typeface="Calibri" pitchFamily="34" charset="-122"/>
+                <a:cs typeface="Calibri" pitchFamily="34" charset="-120"/>
+              </a:rPr>
+              <a:t>finite</a:t>
+            </a:r>
+            <a:endParaRPr lang="en-US" sz="1200" dirty="0"/>
+          </a:p>
+        </p:txBody>
+      </p:sp>
+      <p:sp>
+        <p:nvSpPr>
+          <p:cNvPr id="8" name="Shape 8"/>
+          <p:cNvSpPr/>
+          <p:nvPr/>
+        </p:nvSpPr>
+        <p:spPr>
+          <a:xfrm>
+            <a:off x="658368" y="1773936"/>
+            <a:ext cx="4855464" cy="301752"/>
+          </a:xfrm>
+          <a:prstGeom prst="roundRect">
+            <a:avLst>
+              <a:gd name="adj" fmla="val 14000"/>
+            </a:avLst>
+          </a:prstGeom>
+          <a:solidFill>
+            <a:srgbClr val="2D1155"/>
+          </a:solidFill>
+          <a:ln/>
+        </p:spPr>
+        <p:txBody>
+          <a:bodyPr/>
+          <a:lstStyle/>
+          <a:p>
+            <a:endParaRPr lang="en-AU"/>
+          </a:p>
+        </p:txBody>
+      </p:sp>
+      <p:sp>
+        <p:nvSpPr>
+          <p:cNvPr id="9" name="Text 9"/>
+          <p:cNvSpPr/>
+          <p:nvPr/>
+        </p:nvSpPr>
+        <p:spPr>
+          <a:xfrm>
+            <a:off x="822960" y="1773936"/>
+            <a:ext cx="4526280" cy="301752"/>
+          </a:xfrm>
+          <a:prstGeom prst="rect">
+            <a:avLst/>
+          </a:prstGeom>
+          <a:noFill/>
+          <a:ln/>
+        </p:spPr>
+        <p:txBody>
+          <a:bodyPr wrap="square" lIns="0" rIns="0" rtlCol="0" anchor="ctr"/>
+          <a:lstStyle/>
+          <a:p>
+            <a:pPr marL="0" indent="0" algn="l">
+              <a:buNone/>
+            </a:pPr>
+            <a:r>
+              <a:rPr lang="en-US" sz="1000" b="1" dirty="0">
+                <a:solidFill>
+                  <a:srgbClr val="FFFFFF"/>
+                </a:solidFill>
+                <a:latin typeface="Calibri" pitchFamily="34" charset="0"/>
+                <a:ea typeface="Calibri" pitchFamily="34" charset="-122"/>
+                <a:cs typeface="Calibri" pitchFamily="34" charset="-120"/>
+              </a:rPr>
+              <a:t>Persona, rules, guardrails</a:t>
+            </a:r>
+            <a:endParaRPr lang="en-US" sz="1200" dirty="0"/>
+          </a:p>
+        </p:txBody>
+      </p:sp>
+      <p:sp>
+        <p:nvSpPr>
+          <p:cNvPr id="10" name="Text 10"/>
+          <p:cNvSpPr/>
+          <p:nvPr/>
+        </p:nvSpPr>
+        <p:spPr>
+          <a:xfrm>
+            <a:off x="822960" y="1773936"/>
+            <a:ext cx="4526280" cy="301752"/>
+          </a:xfrm>
+          <a:prstGeom prst="rect">
+            <a:avLst/>
+          </a:prstGeom>
+          <a:noFill/>
+          <a:ln/>
+        </p:spPr>
+        <p:txBody>
+          <a:bodyPr wrap="square" lIns="0" rIns="0" rtlCol="0" anchor="ctr"/>
+          <a:lstStyle/>
+          <a:p>
+            <a:pPr marL="0" indent="0" algn="r">
+              <a:buNone/>
+            </a:pPr>
+            <a:r>
+              <a:rPr lang="en-US" sz="900" i="1" dirty="0">
+                <a:solidFill>
+                  <a:srgbClr val="C4B5E8"/>
+                </a:solidFill>
+                <a:latin typeface="Calibri" pitchFamily="34" charset="0"/>
+                <a:ea typeface="Calibri" pitchFamily="34" charset="-122"/>
+                <a:cs typeface="Calibri" pitchFamily="34" charset="-120"/>
+              </a:rPr>
+              <a:t>set once by the builder</a:t>
+            </a:r>
+            <a:endParaRPr lang="en-US" sz="1200" dirty="0"/>
+          </a:p>
+        </p:txBody>
+      </p:sp>
+      <p:sp>
+        <p:nvSpPr>
+          <p:cNvPr id="11" name="Shape 11"/>
+          <p:cNvSpPr/>
+          <p:nvPr/>
+        </p:nvSpPr>
+        <p:spPr>
+          <a:xfrm>
+            <a:off x="658368" y="2121408"/>
+            <a:ext cx="4855464" cy="301752"/>
+          </a:xfrm>
+          <a:prstGeom prst="roundRect">
+            <a:avLst>
+              <a:gd name="adj" fmla="val 14000"/>
+            </a:avLst>
+          </a:prstGeom>
+          <a:solidFill>
+            <a:srgbClr val="2D1155"/>
+          </a:solidFill>
+          <a:ln/>
+        </p:spPr>
+        <p:txBody>
+          <a:bodyPr/>
+          <a:lstStyle/>
+          <a:p>
+            <a:endParaRPr lang="en-AU"/>
+          </a:p>
+        </p:txBody>
+      </p:sp>
+      <p:sp>
+        <p:nvSpPr>
+          <p:cNvPr id="12" name="Text 12"/>
+          <p:cNvSpPr/>
+          <p:nvPr/>
+        </p:nvSpPr>
+        <p:spPr>
+          <a:xfrm>
+            <a:off x="822960" y="2121408"/>
+            <a:ext cx="4526280" cy="301752"/>
+          </a:xfrm>
+          <a:prstGeom prst="rect">
+            <a:avLst/>
+          </a:prstGeom>
+          <a:noFill/>
+          <a:ln/>
+        </p:spPr>
+        <p:txBody>
+          <a:bodyPr wrap="square" lIns="0" rIns="0" rtlCol="0" anchor="ctr"/>
+          <a:lstStyle/>
+          <a:p>
+            <a:pPr marL="0" indent="0" algn="l">
+              <a:buNone/>
+            </a:pPr>
+            <a:r>
+              <a:rPr lang="en-US" sz="1000" b="1" dirty="0">
+                <a:solidFill>
+                  <a:srgbClr val="FFFFFF"/>
+                </a:solidFill>
+                <a:latin typeface="Calibri" pitchFamily="34" charset="0"/>
+                <a:ea typeface="Calibri" pitchFamily="34" charset="-122"/>
+                <a:cs typeface="Calibri" pitchFamily="34" charset="-120"/>
+              </a:rPr>
+              <a:t>Memory files</a:t>
+            </a:r>
+            <a:endParaRPr lang="en-US" sz="1200" dirty="0"/>
+          </a:p>
+        </p:txBody>
+      </p:sp>
+      <p:sp>
+        <p:nvSpPr>
+          <p:cNvPr id="13" name="Text 13"/>
+          <p:cNvSpPr/>
+          <p:nvPr/>
+        </p:nvSpPr>
+        <p:spPr>
+          <a:xfrm>
+            <a:off x="822960" y="2121408"/>
+            <a:ext cx="4526280" cy="301752"/>
+          </a:xfrm>
+          <a:prstGeom prst="rect">
+            <a:avLst/>
+          </a:prstGeom>
+          <a:noFill/>
+          <a:ln/>
+        </p:spPr>
+        <p:txBody>
+          <a:bodyPr wrap="square" lIns="0" rIns="0" rtlCol="0" anchor="ctr"/>
+          <a:lstStyle/>
+          <a:p>
+            <a:pPr marL="0" indent="0" algn="r">
+              <a:buNone/>
+            </a:pPr>
+            <a:r>
+              <a:rPr lang="en-US" sz="900" i="1" dirty="0">
+                <a:solidFill>
+                  <a:srgbClr val="C4B5E8"/>
+                </a:solidFill>
+                <a:latin typeface="Calibri" pitchFamily="34" charset="0"/>
+                <a:ea typeface="Calibri" pitchFamily="34" charset="-122"/>
+                <a:cs typeface="Calibri" pitchFamily="34" charset="-120"/>
+              </a:rPr>
+              <a:t>CLAUDE.md / AGENTS.md</a:t>
+            </a:r>
+            <a:endParaRPr lang="en-US" sz="1200" dirty="0"/>
+          </a:p>
+        </p:txBody>
+      </p:sp>
+      <p:sp>
+        <p:nvSpPr>
+          <p:cNvPr id="14" name="Shape 14"/>
+          <p:cNvSpPr/>
+          <p:nvPr/>
+        </p:nvSpPr>
+        <p:spPr>
+          <a:xfrm>
+            <a:off x="658368" y="2468880"/>
+            <a:ext cx="4855464" cy="301752"/>
+          </a:xfrm>
+          <a:prstGeom prst="roundRect">
+            <a:avLst>
+              <a:gd name="adj" fmla="val 14000"/>
+            </a:avLst>
+          </a:prstGeom>
+          <a:solidFill>
+            <a:srgbClr val="5B21B6"/>
+          </a:solidFill>
+          <a:ln/>
+        </p:spPr>
+        <p:txBody>
+          <a:bodyPr/>
+          <a:lstStyle/>
+          <a:p>
+            <a:endParaRPr lang="en-AU"/>
+          </a:p>
+        </p:txBody>
+      </p:sp>
+      <p:sp>
+        <p:nvSpPr>
+          <p:cNvPr id="15" name="Text 15"/>
+          <p:cNvSpPr/>
+          <p:nvPr/>
+        </p:nvSpPr>
+        <p:spPr>
+          <a:xfrm>
+            <a:off x="822960" y="2468880"/>
+            <a:ext cx="4526280" cy="301752"/>
+          </a:xfrm>
+          <a:prstGeom prst="rect">
+            <a:avLst/>
+          </a:prstGeom>
+          <a:noFill/>
+          <a:ln/>
+        </p:spPr>
+        <p:txBody>
+          <a:bodyPr wrap="square" lIns="0" rIns="0" rtlCol="0" anchor="ctr"/>
+          <a:lstStyle/>
+          <a:p>
+            <a:pPr marL="0" indent="0" algn="l">
+              <a:buNone/>
+            </a:pPr>
+            <a:r>
+              <a:rPr lang="en-US" sz="1000" b="1" dirty="0">
+                <a:solidFill>
+                  <a:srgbClr val="FFFFFF"/>
+                </a:solidFill>
+                <a:latin typeface="Calibri" pitchFamily="34" charset="0"/>
+                <a:ea typeface="Calibri" pitchFamily="34" charset="-122"/>
+                <a:cs typeface="Calibri" pitchFamily="34" charset="-120"/>
+              </a:rPr>
+              <a:t>Retrieved documents</a:t>
+            </a:r>
+            <a:endParaRPr lang="en-US" sz="1200" dirty="0"/>
+          </a:p>
+        </p:txBody>
+      </p:sp>
+      <p:sp>
+        <p:nvSpPr>
+          <p:cNvPr id="16" name="Text 16"/>
+          <p:cNvSpPr/>
+          <p:nvPr/>
+        </p:nvSpPr>
+        <p:spPr>
+          <a:xfrm>
+            <a:off x="822960" y="2468880"/>
+            <a:ext cx="4526280" cy="301752"/>
+          </a:xfrm>
+          <a:prstGeom prst="rect">
+            <a:avLst/>
+          </a:prstGeom>
+          <a:noFill/>
+          <a:ln/>
+        </p:spPr>
+        <p:txBody>
+          <a:bodyPr wrap="square" lIns="0" rIns="0" rtlCol="0" anchor="ctr"/>
+          <a:lstStyle/>
+          <a:p>
+            <a:pPr marL="0" indent="0" algn="r">
+              <a:buNone/>
+            </a:pPr>
+            <a:r>
+              <a:rPr lang="en-US" sz="950" b="1" dirty="0">
+                <a:solidFill>
+                  <a:srgbClr val="F59E0B"/>
+                </a:solidFill>
+                <a:latin typeface="Courier New" pitchFamily="34" charset="0"/>
+                <a:ea typeface="Courier New" pitchFamily="34" charset="-122"/>
+                <a:cs typeface="Courier New" pitchFamily="34" charset="-120"/>
+              </a:rPr>
+              <a:t>= RAG</a:t>
+            </a:r>
+            <a:endParaRPr lang="en-US" sz="1200" dirty="0"/>
+          </a:p>
+        </p:txBody>
+      </p:sp>
+      <p:sp>
+        <p:nvSpPr>
+          <p:cNvPr id="17" name="Shape 17"/>
+          <p:cNvSpPr/>
+          <p:nvPr/>
+        </p:nvSpPr>
+        <p:spPr>
+          <a:xfrm>
+            <a:off x="658368" y="2816352"/>
+            <a:ext cx="4855464" cy="301752"/>
+          </a:xfrm>
+          <a:prstGeom prst="roundRect">
+            <a:avLst>
+              <a:gd name="adj" fmla="val 14000"/>
+            </a:avLst>
+          </a:prstGeom>
+          <a:solidFill>
+            <a:srgbClr val="5B21B6"/>
+          </a:solidFill>
+          <a:ln/>
+        </p:spPr>
+        <p:txBody>
+          <a:bodyPr/>
+          <a:lstStyle/>
+          <a:p>
+            <a:endParaRPr lang="en-AU"/>
+          </a:p>
+        </p:txBody>
+      </p:sp>
+      <p:sp>
+        <p:nvSpPr>
+          <p:cNvPr id="18" name="Text 18"/>
+          <p:cNvSpPr/>
+          <p:nvPr/>
+        </p:nvSpPr>
+        <p:spPr>
+          <a:xfrm>
+            <a:off x="822960" y="2816352"/>
+            <a:ext cx="4526280" cy="301752"/>
+          </a:xfrm>
+          <a:prstGeom prst="rect">
+            <a:avLst/>
+          </a:prstGeom>
+          <a:noFill/>
+          <a:ln/>
+        </p:spPr>
+        <p:txBody>
+          <a:bodyPr wrap="square" lIns="0" rIns="0" rtlCol="0" anchor="ctr"/>
+          <a:lstStyle/>
+          <a:p>
+            <a:pPr marL="0" indent="0" algn="l">
+              <a:buNone/>
+            </a:pPr>
+            <a:r>
+              <a:rPr lang="en-US" sz="1000" b="1" dirty="0">
+                <a:solidFill>
+                  <a:srgbClr val="FFFFFF"/>
+                </a:solidFill>
+                <a:latin typeface="Calibri" pitchFamily="34" charset="0"/>
+                <a:ea typeface="Calibri" pitchFamily="34" charset="-122"/>
+                <a:cs typeface="Calibri" pitchFamily="34" charset="-120"/>
+              </a:rPr>
+              <a:t>Live tool + server results</a:t>
+            </a:r>
+            <a:endParaRPr lang="en-US" sz="1200" dirty="0"/>
+          </a:p>
+        </p:txBody>
+      </p:sp>
+      <p:sp>
+        <p:nvSpPr>
+          <p:cNvPr id="19" name="Text 19"/>
+          <p:cNvSpPr/>
+          <p:nvPr/>
+        </p:nvSpPr>
+        <p:spPr>
+          <a:xfrm>
+            <a:off x="822960" y="2816352"/>
+            <a:ext cx="4526280" cy="301752"/>
+          </a:xfrm>
+          <a:prstGeom prst="rect">
+            <a:avLst/>
+          </a:prstGeom>
+          <a:noFill/>
+          <a:ln/>
+        </p:spPr>
+        <p:txBody>
+          <a:bodyPr wrap="square" lIns="0" rIns="0" rtlCol="0" anchor="ctr"/>
+          <a:lstStyle/>
+          <a:p>
+            <a:pPr marL="0" indent="0" algn="r">
+              <a:buNone/>
+            </a:pPr>
+            <a:r>
+              <a:rPr lang="en-US" sz="950" b="1" dirty="0">
+                <a:solidFill>
+                  <a:srgbClr val="F59E0B"/>
+                </a:solidFill>
+                <a:latin typeface="Courier New" pitchFamily="34" charset="0"/>
+                <a:ea typeface="Courier New" pitchFamily="34" charset="-122"/>
+                <a:cs typeface="Courier New" pitchFamily="34" charset="-120"/>
+              </a:rPr>
+              <a:t>= MCP</a:t>
+            </a:r>
+            <a:endParaRPr lang="en-US" sz="1200" dirty="0"/>
+          </a:p>
+        </p:txBody>
+      </p:sp>
+      <p:sp>
+        <p:nvSpPr>
+          <p:cNvPr id="20" name="Shape 20"/>
+          <p:cNvSpPr/>
+          <p:nvPr/>
+        </p:nvSpPr>
+        <p:spPr>
+          <a:xfrm>
+            <a:off x="658368" y="3163824"/>
+            <a:ext cx="4855464" cy="301752"/>
+          </a:xfrm>
+          <a:prstGeom prst="roundRect">
+            <a:avLst>
+              <a:gd name="adj" fmla="val 14000"/>
+            </a:avLst>
+          </a:prstGeom>
+          <a:solidFill>
+            <a:srgbClr val="2D1155"/>
+          </a:solidFill>
+          <a:ln/>
+        </p:spPr>
+        <p:txBody>
+          <a:bodyPr/>
+          <a:lstStyle/>
+          <a:p>
+            <a:endParaRPr lang="en-AU"/>
+          </a:p>
+        </p:txBody>
+      </p:sp>
+      <p:sp>
+        <p:nvSpPr>
+          <p:cNvPr id="21" name="Text 21"/>
+          <p:cNvSpPr/>
+          <p:nvPr/>
+        </p:nvSpPr>
+        <p:spPr>
+          <a:xfrm>
+            <a:off x="822960" y="3163824"/>
+            <a:ext cx="4526280" cy="301752"/>
+          </a:xfrm>
+          <a:prstGeom prst="rect">
+            <a:avLst/>
+          </a:prstGeom>
+          <a:noFill/>
+          <a:ln/>
+        </p:spPr>
+        <p:txBody>
+          <a:bodyPr wrap="square" lIns="0" rIns="0" rtlCol="0" anchor="ctr"/>
+          <a:lstStyle/>
+          <a:p>
+            <a:pPr marL="0" indent="0" algn="l">
+              <a:buNone/>
+            </a:pPr>
+            <a:r>
+              <a:rPr lang="en-US" sz="1000" b="1" dirty="0">
+                <a:solidFill>
+                  <a:srgbClr val="FFFFFF"/>
+                </a:solidFill>
+                <a:latin typeface="Calibri" pitchFamily="34" charset="0"/>
+                <a:ea typeface="Calibri" pitchFamily="34" charset="-122"/>
+                <a:cs typeface="Calibri" pitchFamily="34" charset="-120"/>
+              </a:rPr>
+              <a:t>Everything said so far</a:t>
+            </a:r>
+            <a:endParaRPr lang="en-US" sz="1200" dirty="0"/>
+          </a:p>
+        </p:txBody>
+      </p:sp>
+      <p:sp>
+        <p:nvSpPr>
+          <p:cNvPr id="22" name="Text 22"/>
+          <p:cNvSpPr/>
+          <p:nvPr/>
+        </p:nvSpPr>
+        <p:spPr>
+          <a:xfrm>
+            <a:off x="822960" y="3163824"/>
+            <a:ext cx="4526280" cy="301752"/>
+          </a:xfrm>
+          <a:prstGeom prst="rect">
+            <a:avLst/>
+          </a:prstGeom>
+          <a:noFill/>
+          <a:ln/>
+        </p:spPr>
+        <p:txBody>
+          <a:bodyPr wrap="square" lIns="0" rIns="0" rtlCol="0" anchor="ctr"/>
+          <a:lstStyle/>
+          <a:p>
+            <a:pPr marL="0" indent="0" algn="r">
+              <a:buNone/>
+            </a:pPr>
+            <a:r>
+              <a:rPr lang="en-US" sz="900" i="1" dirty="0">
+                <a:solidFill>
+                  <a:srgbClr val="C4B5E8"/>
+                </a:solidFill>
+                <a:latin typeface="Calibri" pitchFamily="34" charset="0"/>
+                <a:ea typeface="Calibri" pitchFamily="34" charset="-122"/>
+                <a:cs typeface="Calibri" pitchFamily="34" charset="-120"/>
+              </a:rPr>
+              <a:t>conversation history</a:t>
+            </a:r>
+            <a:endParaRPr lang="en-US" sz="1200" dirty="0"/>
+          </a:p>
+        </p:txBody>
+      </p:sp>
+      <p:sp>
+        <p:nvSpPr>
+          <p:cNvPr id="23" name="Shape 23"/>
+          <p:cNvSpPr/>
+          <p:nvPr/>
+        </p:nvSpPr>
+        <p:spPr>
+          <a:xfrm>
+            <a:off x="658368" y="3511296"/>
+            <a:ext cx="4855464" cy="301752"/>
+          </a:xfrm>
+          <a:prstGeom prst="roundRect">
+            <a:avLst>
+              <a:gd name="adj" fmla="val 14000"/>
+            </a:avLst>
+          </a:prstGeom>
+          <a:solidFill>
+            <a:srgbClr val="F59E0B"/>
+          </a:solidFill>
+          <a:ln/>
+        </p:spPr>
+        <p:txBody>
+          <a:bodyPr/>
+          <a:lstStyle/>
+          <a:p>
+            <a:endParaRPr lang="en-AU"/>
+          </a:p>
+        </p:txBody>
+      </p:sp>
+      <p:sp>
+        <p:nvSpPr>
+          <p:cNvPr id="24" name="Text 24"/>
+          <p:cNvSpPr/>
+          <p:nvPr/>
+        </p:nvSpPr>
+        <p:spPr>
+          <a:xfrm>
+            <a:off x="822960" y="3511296"/>
+            <a:ext cx="4526280" cy="301752"/>
+          </a:xfrm>
+          <a:prstGeom prst="rect">
+            <a:avLst/>
+          </a:prstGeom>
+          <a:noFill/>
+          <a:ln/>
+        </p:spPr>
+        <p:txBody>
+          <a:bodyPr wrap="square" lIns="0" rIns="0" rtlCol="0" anchor="ctr"/>
+          <a:lstStyle/>
+          <a:p>
+            <a:pPr marL="0" indent="0" algn="l">
+              <a:buNone/>
+            </a:pPr>
+            <a:r>
+              <a:rPr lang="en-US" sz="1000" b="1" dirty="0">
+                <a:solidFill>
+                  <a:srgbClr val="2D1155"/>
+                </a:solidFill>
+                <a:latin typeface="Calibri" pitchFamily="34" charset="0"/>
+                <a:ea typeface="Calibri" pitchFamily="34" charset="-122"/>
+                <a:cs typeface="Calibri" pitchFamily="34" charset="-120"/>
+              </a:rPr>
+              <a:t>YOUR PROMPT</a:t>
+            </a:r>
+            <a:endParaRPr lang="en-US" sz="1200" dirty="0"/>
+          </a:p>
+        </p:txBody>
+      </p:sp>
+      <p:sp>
+        <p:nvSpPr>
+          <p:cNvPr id="25" name="Text 25"/>
+          <p:cNvSpPr/>
+          <p:nvPr/>
+        </p:nvSpPr>
+        <p:spPr>
+          <a:xfrm>
+            <a:off x="822960" y="3511296"/>
+            <a:ext cx="4526280" cy="301752"/>
+          </a:xfrm>
+          <a:prstGeom prst="rect">
+            <a:avLst/>
+          </a:prstGeom>
+          <a:noFill/>
+          <a:ln/>
+        </p:spPr>
+        <p:txBody>
+          <a:bodyPr wrap="square" lIns="0" rIns="0" rtlCol="0" anchor="ctr"/>
+          <a:lstStyle/>
+          <a:p>
+            <a:pPr marL="0" indent="0" algn="r">
+              <a:buNone/>
+            </a:pPr>
+            <a:r>
+              <a:rPr lang="en-US" sz="900" i="1" dirty="0">
+                <a:solidFill>
+                  <a:srgbClr val="2D1155"/>
+                </a:solidFill>
+                <a:latin typeface="Calibri" pitchFamily="34" charset="0"/>
+                <a:ea typeface="Calibri" pitchFamily="34" charset="-122"/>
+                <a:cs typeface="Calibri" pitchFamily="34" charset="-120"/>
+              </a:rPr>
+              <a:t>the only bit you type</a:t>
+            </a:r>
+            <a:endParaRPr lang="en-US" sz="1200" dirty="0"/>
+          </a:p>
+        </p:txBody>
+      </p:sp>
+      <p:sp>
+        <p:nvSpPr>
+          <p:cNvPr id="26" name="Shape 26"/>
+          <p:cNvSpPr/>
+          <p:nvPr/>
+        </p:nvSpPr>
+        <p:spPr>
+          <a:xfrm>
+            <a:off x="5943600" y="1371600"/>
+            <a:ext cx="2651760" cy="2560320"/>
+          </a:xfrm>
+          <a:prstGeom prst="roundRect">
+            <a:avLst>
+              <a:gd name="adj" fmla="val 6000"/>
+            </a:avLst>
+          </a:prstGeom>
+          <a:solidFill>
+            <a:srgbClr val="2D1155"/>
+          </a:solidFill>
+          <a:ln/>
+        </p:spPr>
+        <p:txBody>
+          <a:bodyPr/>
+          <a:lstStyle/>
+          <a:p>
+            <a:endParaRPr lang="en-AU"/>
+          </a:p>
+        </p:txBody>
+      </p:sp>
+      <p:sp>
+        <p:nvSpPr>
+          <p:cNvPr id="27" name="Text 27"/>
+          <p:cNvSpPr/>
+          <p:nvPr/>
+        </p:nvSpPr>
+        <p:spPr>
+          <a:xfrm>
+            <a:off x="6163056" y="1517904"/>
+            <a:ext cx="2212848" cy="548640"/>
+          </a:xfrm>
+          <a:prstGeom prst="rect">
+            <a:avLst/>
+          </a:prstGeom>
+          <a:noFill/>
+          <a:ln/>
+        </p:spPr>
+        <p:txBody>
+          <a:bodyPr wrap="square" lIns="0" rIns="0" rtlCol="0" anchor="ctr"/>
+          <a:lstStyle/>
+          <a:p>
+            <a:pPr marL="0" indent="0" algn="l">
+              <a:buNone/>
+            </a:pPr>
+            <a:r>
+              <a:rPr lang="en-US" sz="1250" b="1" dirty="0">
+                <a:solidFill>
+                  <a:srgbClr val="F59E0B"/>
+                </a:solidFill>
+                <a:latin typeface="Arial Black" pitchFamily="34" charset="0"/>
+                <a:ea typeface="Arial Black" pitchFamily="34" charset="-122"/>
+                <a:cs typeface="Arial Black" pitchFamily="34" charset="-120"/>
+              </a:rPr>
+              <a:t>The whole job:</a:t>
+            </a:r>
+            <a:endParaRPr lang="en-US" sz="1200" dirty="0"/>
+          </a:p>
+        </p:txBody>
+      </p:sp>
+      <p:sp>
+        <p:nvSpPr>
+          <p:cNvPr id="28" name="Text 28"/>
+          <p:cNvSpPr/>
+          <p:nvPr/>
+        </p:nvSpPr>
+        <p:spPr>
+          <a:xfrm>
+            <a:off x="6163056" y="2121408"/>
+            <a:ext cx="2212848" cy="1371600"/>
+          </a:xfrm>
+          <a:prstGeom prst="rect">
+            <a:avLst/>
+          </a:prstGeom>
+          <a:noFill/>
+          <a:ln/>
+        </p:spPr>
+        <p:txBody>
+          <a:bodyPr wrap="square" lIns="0" rIns="0" rtlCol="0" anchor="t"/>
+          <a:lstStyle/>
+          <a:p>
+            <a:pPr marL="0" indent="0" algn="l">
+              <a:spcAft>
+                <a:spcPts val="500"/>
+              </a:spcAft>
+              <a:buNone/>
+            </a:pPr>
+            <a:r>
+              <a:rPr lang="en-US" sz="1050" b="1" dirty="0">
+                <a:solidFill>
+                  <a:srgbClr val="FFFFFF"/>
+                </a:solidFill>
+                <a:latin typeface="Calibri" pitchFamily="34" charset="0"/>
+                <a:ea typeface="Calibri" pitchFamily="34" charset="-122"/>
+                <a:cs typeface="Calibri" pitchFamily="34" charset="-120"/>
+              </a:rPr>
+              <a:t>What goes in each layer.</a:t>
+            </a:r>
+            <a:endParaRPr lang="en-US" sz="1000" dirty="0"/>
+          </a:p>
+          <a:p>
+            <a:pPr marL="0" indent="0" algn="l">
+              <a:spcAft>
+                <a:spcPts val="500"/>
+              </a:spcAft>
+              <a:buNone/>
+            </a:pPr>
+            <a:r>
+              <a:rPr lang="en-US" sz="1050" b="1" dirty="0">
+                <a:solidFill>
+                  <a:srgbClr val="FFFFFF"/>
+                </a:solidFill>
+                <a:latin typeface="Calibri" pitchFamily="34" charset="0"/>
+                <a:ea typeface="Calibri" pitchFamily="34" charset="-122"/>
+                <a:cs typeface="Calibri" pitchFamily="34" charset="-120"/>
+              </a:rPr>
+              <a:t>In what order.</a:t>
+            </a:r>
+            <a:endParaRPr lang="en-US" sz="1000" dirty="0"/>
+          </a:p>
+          <a:p>
+            <a:pPr marL="0" indent="0" algn="l">
+              <a:spcAft>
+                <a:spcPts val="500"/>
+              </a:spcAft>
+              <a:buNone/>
+            </a:pPr>
+            <a:r>
+              <a:rPr lang="en-US" sz="1050" b="1" dirty="0">
+                <a:solidFill>
+                  <a:srgbClr val="FFFFFF"/>
+                </a:solidFill>
+                <a:latin typeface="Calibri" pitchFamily="34" charset="0"/>
+                <a:ea typeface="Calibri" pitchFamily="34" charset="-122"/>
+                <a:cs typeface="Calibri" pitchFamily="34" charset="-120"/>
+              </a:rPr>
+              <a:t>And what stays out.</a:t>
+            </a:r>
+            <a:endParaRPr lang="en-US" sz="1000" dirty="0"/>
+          </a:p>
+        </p:txBody>
+      </p:sp>
+      <p:sp>
+        <p:nvSpPr>
+          <p:cNvPr id="29" name="Shape 29"/>
+          <p:cNvSpPr/>
+          <p:nvPr/>
+        </p:nvSpPr>
+        <p:spPr>
+          <a:xfrm>
+            <a:off x="6163056" y="2852928"/>
+            <a:ext cx="2212848" cy="365760"/>
+          </a:xfrm>
+          <a:prstGeom prst="roundRect">
+            <a:avLst>
+              <a:gd name="adj" fmla="val 14000"/>
+            </a:avLst>
+          </a:prstGeom>
+          <a:solidFill>
+            <a:srgbClr val="5B21B6"/>
+          </a:solidFill>
+          <a:ln/>
+        </p:spPr>
+        <p:txBody>
+          <a:bodyPr/>
+          <a:lstStyle/>
+          <a:p>
+            <a:endParaRPr lang="en-AU"/>
+          </a:p>
+        </p:txBody>
+      </p:sp>
+      <p:sp>
+        <p:nvSpPr>
+          <p:cNvPr id="30" name="Text 30"/>
+          <p:cNvSpPr/>
+          <p:nvPr/>
+        </p:nvSpPr>
+        <p:spPr>
+          <a:xfrm>
+            <a:off x="6309360" y="2852928"/>
+            <a:ext cx="1920240" cy="365760"/>
+          </a:xfrm>
+          <a:prstGeom prst="rect">
+            <a:avLst/>
+          </a:prstGeom>
+          <a:noFill/>
+          <a:ln/>
+        </p:spPr>
+        <p:txBody>
+          <a:bodyPr wrap="square" lIns="0" rIns="0" rtlCol="0" anchor="ctr"/>
+          <a:lstStyle/>
+          <a:p>
+            <a:pPr marL="0" indent="0" algn="l">
+              <a:buNone/>
+            </a:pPr>
+            <a:r>
+              <a:rPr lang="en-US" sz="1000" b="1" dirty="0">
+                <a:solidFill>
+                  <a:srgbClr val="F59E0B"/>
+                </a:solidFill>
+                <a:latin typeface="Courier New" pitchFamily="34" charset="0"/>
+                <a:ea typeface="Courier New" pitchFamily="34" charset="-122"/>
+                <a:cs typeface="Courier New" pitchFamily="34" charset="-120"/>
+              </a:rPr>
+              <a:t>/context</a:t>
+            </a:r>
+            <a:endParaRPr lang="en-US" sz="1200" dirty="0"/>
+          </a:p>
+        </p:txBody>
+      </p:sp>
+      <p:sp>
+        <p:nvSpPr>
+          <p:cNvPr id="31" name="Text 31"/>
+          <p:cNvSpPr/>
+          <p:nvPr/>
+        </p:nvSpPr>
+        <p:spPr>
+          <a:xfrm>
+            <a:off x="6309360" y="2852928"/>
+            <a:ext cx="1920240" cy="365760"/>
+          </a:xfrm>
+          <a:prstGeom prst="rect">
+            <a:avLst/>
+          </a:prstGeom>
+          <a:noFill/>
+          <a:ln/>
+        </p:spPr>
+        <p:txBody>
+          <a:bodyPr wrap="square" lIns="0" rIns="0" rtlCol="0" anchor="ctr"/>
+          <a:lstStyle/>
+          <a:p>
+            <a:pPr marL="0" indent="0" algn="r">
+              <a:buNone/>
+            </a:pPr>
+            <a:r>
+              <a:rPr lang="en-US" sz="850" i="1" dirty="0">
+                <a:solidFill>
+                  <a:srgbClr val="DDD6FE"/>
+                </a:solidFill>
+                <a:latin typeface="Calibri" pitchFamily="34" charset="0"/>
+                <a:ea typeface="Calibri" pitchFamily="34" charset="-122"/>
+                <a:cs typeface="Calibri" pitchFamily="34" charset="-120"/>
+              </a:rPr>
+              <a:t>see the stack</a:t>
+            </a:r>
+            <a:endParaRPr lang="en-US" sz="1200" dirty="0"/>
+          </a:p>
+        </p:txBody>
+      </p:sp>
+      <p:sp>
+        <p:nvSpPr>
+          <p:cNvPr id="32" name="Text 32"/>
+          <p:cNvSpPr/>
+          <p:nvPr/>
+        </p:nvSpPr>
+        <p:spPr>
+          <a:xfrm>
+            <a:off x="6163056" y="3328416"/>
+            <a:ext cx="2212848" cy="548640"/>
+          </a:xfrm>
+          <a:prstGeom prst="rect">
+            <a:avLst/>
+          </a:prstGeom>
+          <a:noFill/>
+          <a:ln/>
+        </p:spPr>
+        <p:txBody>
+          <a:bodyPr wrap="square" lIns="0" rIns="0" rtlCol="0" anchor="t"/>
+          <a:lstStyle/>
+          <a:p>
+            <a:pPr marL="0" indent="0" algn="l">
+              <a:spcAft>
+                <a:spcPts val="0"/>
+              </a:spcAft>
+              <a:buNone/>
+            </a:pPr>
+            <a:r>
+              <a:rPr lang="en-US" sz="950" i="1" dirty="0">
+                <a:solidFill>
+                  <a:srgbClr val="C4B5E8"/>
+                </a:solidFill>
+                <a:latin typeface="Calibri" pitchFamily="34" charset="0"/>
+                <a:ea typeface="Calibri" pitchFamily="34" charset="-122"/>
+                <a:cs typeface="Calibri" pitchFamily="34" charset="-120"/>
+              </a:rPr>
+              <a:t>Every layer costs space. Fill the window and the model starts guessing.</a:t>
+            </a:r>
+            <a:endParaRPr lang="en-US" sz="1000" dirty="0"/>
+          </a:p>
+        </p:txBody>
+      </p:sp>
+      <p:sp>
+        <p:nvSpPr>
+          <p:cNvPr id="33" name="Shape 33"/>
+          <p:cNvSpPr/>
+          <p:nvPr/>
+        </p:nvSpPr>
+        <p:spPr>
+          <a:xfrm>
+            <a:off x="457200" y="4096512"/>
+            <a:ext cx="7772400" cy="420624"/>
+          </a:xfrm>
+          <a:prstGeom prst="roundRect">
+            <a:avLst>
+              <a:gd name="adj" fmla="val 12000"/>
+            </a:avLst>
+          </a:prstGeom>
+          <a:solidFill>
+            <a:srgbClr val="2D1155"/>
+          </a:solidFill>
+          <a:ln/>
+        </p:spPr>
+        <p:txBody>
+          <a:bodyPr/>
+          <a:lstStyle/>
+          <a:p>
+            <a:endParaRPr lang="en-AU"/>
+          </a:p>
+        </p:txBody>
+      </p:sp>
+      <p:sp>
+        <p:nvSpPr>
+          <p:cNvPr id="34" name="Text 34"/>
+          <p:cNvSpPr/>
+          <p:nvPr/>
+        </p:nvSpPr>
+        <p:spPr>
+          <a:xfrm>
+            <a:off x="685800" y="4096512"/>
+            <a:ext cx="7315200" cy="420624"/>
+          </a:xfrm>
+          <a:prstGeom prst="rect">
+            <a:avLst/>
+          </a:prstGeom>
+          <a:noFill/>
+          <a:ln/>
+        </p:spPr>
+        <p:txBody>
+          <a:bodyPr wrap="square" lIns="0" rIns="0" rtlCol="0" anchor="ctr"/>
+          <a:lstStyle/>
+          <a:p>
+            <a:pPr marL="0" indent="0" algn="ctr">
+              <a:buNone/>
+            </a:pPr>
+            <a:r>
+              <a:rPr lang="en-US" sz="1150" dirty="0">
+                <a:solidFill>
+                  <a:srgbClr val="DDD6FE"/>
+                </a:solidFill>
+                <a:latin typeface="Calibri" pitchFamily="34" charset="0"/>
+                <a:ea typeface="Calibri" pitchFamily="34" charset="-122"/>
+                <a:cs typeface="Calibri" pitchFamily="34" charset="-120"/>
+              </a:rPr>
+              <a:t>RAG, MCP, memory, tools — none of them talk to the model. </a:t>
+            </a:r>
+            <a:r>
+              <a:rPr lang="en-US" sz="1150" b="1" dirty="0">
+                <a:solidFill>
+                  <a:srgbClr val="F59E0B"/>
+                </a:solidFill>
+                <a:latin typeface="Calibri" pitchFamily="34" charset="0"/>
+                <a:ea typeface="Calibri" pitchFamily="34" charset="-122"/>
+                <a:cs typeface="Calibri" pitchFamily="34" charset="-120"/>
+              </a:rPr>
+              <a:t>They just write a better system prompt.</a:t>
+            </a:r>
+            <a:endParaRPr lang="en-US" sz="1200" dirty="0"/>
+          </a:p>
+        </p:txBody>
+      </p:sp>
+    </p:spTree>
+  </p:cSld>
+  <p:clrMapOvr>
+    <a:masterClrMapping/>
+  </p:clrMapOvr>
+  <p:transition spd="slow">
+    <p:push/>
+  </p:transition>
+</p:sld>
+</file>
+
+<file path=ppt/slides/slide4.xml><?xml version="1.0" encoding="utf-8"?>
+<p:sld xmlns:a="http://schemas.openxmlformats.org/drawingml/2006/main" xmlns:r="http://schemas.openxmlformats.org/officeDocument/2006/relationships" xmlns:p="http://schemas.openxmlformats.org/presentationml/2006/main">
   <p:cSld name="Slide 3">
     <p:bg>
       <p:bgPr>
@@ -6943,7 +10920,7 @@
 </p:sld>
 </file>
 
-<file path=ppt/slides/slide3.xml><?xml version="1.0" encoding="utf-8"?>
+<file path=ppt/slides/slide5.xml><?xml version="1.0" encoding="utf-8"?>
 <p:sld xmlns:a="http://schemas.openxmlformats.org/drawingml/2006/main" xmlns:r="http://schemas.openxmlformats.org/officeDocument/2006/relationships" xmlns:p="http://schemas.openxmlformats.org/presentationml/2006/main">
   <p:cSld name="Slide 4">
     <p:bg>
@@ -7335,7 +11312,7 @@
 </p:sld>
 </file>
 
-<file path=ppt/slides/slide4.xml><?xml version="1.0" encoding="utf-8"?>
+<file path=ppt/slides/slide6.xml><?xml version="1.0" encoding="utf-8"?>
 <p:sld xmlns:a="http://schemas.openxmlformats.org/drawingml/2006/main" xmlns:r="http://schemas.openxmlformats.org/officeDocument/2006/relationships" xmlns:p="http://schemas.openxmlformats.org/presentationml/2006/main">
   <p:cSld name="Slide 5">
     <p:bg>
@@ -8435,7 +12412,7 @@
 </p:sld>
 </file>
 
-<file path=ppt/slides/slide5.xml><?xml version="1.0" encoding="utf-8"?>
+<file path=ppt/slides/slide7.xml><?xml version="1.0" encoding="utf-8"?>
 <p:sld xmlns:a="http://schemas.openxmlformats.org/drawingml/2006/main" xmlns:r="http://schemas.openxmlformats.org/officeDocument/2006/relationships" xmlns:p="http://schemas.openxmlformats.org/presentationml/2006/main">
   <p:cSld name="Slide 6">
     <p:bg>
@@ -9312,7 +13289,7 @@
 </p:sld>
 </file>
 
-<file path=ppt/slides/slide6.xml><?xml version="1.0" encoding="utf-8"?>
+<file path=ppt/slides/slide8.xml><?xml version="1.0" encoding="utf-8"?>
 <p:sld xmlns:a="http://schemas.openxmlformats.org/drawingml/2006/main" xmlns:r="http://schemas.openxmlformats.org/officeDocument/2006/relationships" xmlns:p="http://schemas.openxmlformats.org/presentationml/2006/main">
   <p:cSld name="Slide 7">
     <p:bg>
@@ -9706,7 +13683,7 @@
 </p:sld>
 </file>
 
-<file path=ppt/slides/slide7.xml><?xml version="1.0" encoding="utf-8"?>
+<file path=ppt/slides/slide9.xml><?xml version="1.0" encoding="utf-8"?>
 <p:sld xmlns:a="http://schemas.openxmlformats.org/drawingml/2006/main" xmlns:r="http://schemas.openxmlformats.org/officeDocument/2006/relationships" xmlns:p="http://schemas.openxmlformats.org/presentationml/2006/main">
   <p:cSld name="Slide 8">
     <p:bg>
@@ -10322,1457 +14299,6 @@
               <a:t>You say WHAT and the rules. The agent picks HOW. No filename, no how.</a:t>
             </a:r>
             <a:endParaRPr lang="en-US" sz="1050" dirty="0"/>
-          </a:p>
-        </p:txBody>
-      </p:sp>
-    </p:spTree>
-  </p:cSld>
-  <p:clrMapOvr>
-    <a:masterClrMapping/>
-  </p:clrMapOvr>
-</p:sld>
-</file>
-
-<file path=ppt/slides/slide8.xml><?xml version="1.0" encoding="utf-8"?>
-<p:sld xmlns:a="http://schemas.openxmlformats.org/drawingml/2006/main" xmlns:r="http://schemas.openxmlformats.org/officeDocument/2006/relationships" xmlns:p="http://schemas.openxmlformats.org/presentationml/2006/main">
-  <p:cSld name="Slide 9">
-    <p:bg>
-      <p:bgPr>
-        <a:solidFill>
-          <a:srgbClr val="F5F3FF"/>
-        </a:solidFill>
-        <a:effectLst/>
-      </p:bgPr>
-    </p:bg>
-    <p:spTree>
-      <p:nvGrpSpPr>
-        <p:cNvPr id="1" name=""/>
-        <p:cNvGrpSpPr/>
-        <p:nvPr/>
-      </p:nvGrpSpPr>
-      <p:grpSpPr>
-        <a:xfrm>
-          <a:off x="0" y="0"/>
-          <a:ext cx="0" cy="0"/>
-          <a:chOff x="0" y="0"/>
-          <a:chExt cx="0" cy="0"/>
-        </a:xfrm>
-      </p:grpSpPr>
-      <p:sp>
-        <p:nvSpPr>
-          <p:cNvPr id="2" name="Text 0"/>
-          <p:cNvSpPr/>
-          <p:nvPr/>
-        </p:nvSpPr>
-        <p:spPr>
-          <a:xfrm>
-            <a:off x="457200" y="292608"/>
-            <a:ext cx="8229600" cy="566928"/>
-          </a:xfrm>
-          <a:prstGeom prst="rect">
-            <a:avLst/>
-          </a:prstGeom>
-          <a:noFill/>
-          <a:ln/>
-        </p:spPr>
-        <p:txBody>
-          <a:bodyPr wrap="square" rtlCol="0" anchor="ctr"/>
-          <a:lstStyle/>
-          <a:p>
-            <a:pPr marL="0" indent="0" algn="l">
-              <a:buNone/>
-            </a:pPr>
-            <a:r>
-              <a:rPr lang="en-US" sz="1900" b="1" kern="0" spc="100" dirty="0">
-                <a:solidFill>
-                  <a:srgbClr val="2D1155"/>
-                </a:solidFill>
-                <a:latin typeface="Arial Black" pitchFamily="34" charset="0"/>
-                <a:ea typeface="Arial Black" pitchFamily="34" charset="-122"/>
-                <a:cs typeface="Arial Black" pitchFamily="34" charset="-120"/>
-              </a:rPr>
-              <a:t>PLAN REVIEW, NOT PLAN WRITING</a:t>
-            </a:r>
-            <a:endParaRPr lang="en-US" sz="1900" dirty="0"/>
-          </a:p>
-        </p:txBody>
-      </p:sp>
-      <p:sp>
-        <p:nvSpPr>
-          <p:cNvPr id="3" name="Text 1"/>
-          <p:cNvSpPr/>
-          <p:nvPr/>
-        </p:nvSpPr>
-        <p:spPr>
-          <a:xfrm>
-            <a:off x="475488" y="896112"/>
-            <a:ext cx="8229600" cy="329184"/>
-          </a:xfrm>
-          <a:prstGeom prst="rect">
-            <a:avLst/>
-          </a:prstGeom>
-          <a:noFill/>
-          <a:ln/>
-        </p:spPr>
-        <p:txBody>
-          <a:bodyPr wrap="square" rtlCol="0" anchor="ctr"/>
-          <a:lstStyle/>
-          <a:p>
-            <a:pPr marL="0" indent="0">
-              <a:buNone/>
-            </a:pPr>
-            <a:r>
-              <a:rPr lang="en-US" sz="1300" i="1" dirty="0">
-                <a:solidFill>
-                  <a:srgbClr val="6E6389"/>
-                </a:solidFill>
-                <a:latin typeface="Calibri" pitchFamily="34" charset="0"/>
-                <a:ea typeface="Calibri" pitchFamily="34" charset="-122"/>
-                <a:cs typeface="Calibri" pitchFamily="34" charset="-120"/>
-              </a:rPr>
-              <a:t>Skill #2 — what changed this year.</a:t>
-            </a:r>
-            <a:endParaRPr lang="en-US" sz="1300" dirty="0"/>
-          </a:p>
-        </p:txBody>
-      </p:sp>
-      <p:pic>
-        <p:nvPicPr>
-          <p:cNvPr id="4" name="Image 0" descr="logo_icon.jpeg"/>
-          <p:cNvPicPr>
-            <a:picLocks noChangeAspect="1"/>
-          </p:cNvPicPr>
-          <p:nvPr/>
-        </p:nvPicPr>
-        <p:blipFill>
-          <a:blip r:embed="rId3"/>
-          <a:stretch>
-            <a:fillRect/>
-          </a:stretch>
-        </p:blipFill>
-        <p:spPr>
-          <a:xfrm>
-            <a:off x="8366760" y="4526280"/>
-            <a:ext cx="411480" cy="411480"/>
-          </a:xfrm>
-          <a:prstGeom prst="ellipse">
-            <a:avLst/>
-          </a:prstGeom>
-        </p:spPr>
-      </p:pic>
-      <p:sp>
-        <p:nvSpPr>
-          <p:cNvPr id="5" name="Shape 2"/>
-          <p:cNvSpPr/>
-          <p:nvPr/>
-        </p:nvSpPr>
-        <p:spPr>
-          <a:xfrm>
-            <a:off x="457200" y="1417320"/>
-            <a:ext cx="3931920" cy="1097280"/>
-          </a:xfrm>
-          <a:prstGeom prst="roundRect">
-            <a:avLst>
-              <a:gd name="adj" fmla="val 6667"/>
-            </a:avLst>
-          </a:prstGeom>
-          <a:solidFill>
-            <a:srgbClr val="FFFFFF"/>
-          </a:solidFill>
-          <a:ln w="12700">
-            <a:solidFill>
-              <a:srgbClr val="DDD6FE"/>
-            </a:solidFill>
-            <a:prstDash val="solid"/>
-          </a:ln>
-        </p:spPr>
-        <p:txBody>
-          <a:bodyPr/>
-          <a:lstStyle/>
-          <a:p>
-            <a:endParaRPr lang="en-AU"/>
-          </a:p>
-        </p:txBody>
-      </p:sp>
-      <p:sp>
-        <p:nvSpPr>
-          <p:cNvPr id="6" name="Text 3"/>
-          <p:cNvSpPr/>
-          <p:nvPr/>
-        </p:nvSpPr>
-        <p:spPr>
-          <a:xfrm>
-            <a:off x="658368" y="1536192"/>
-            <a:ext cx="3566160" cy="274320"/>
-          </a:xfrm>
-          <a:prstGeom prst="rect">
-            <a:avLst/>
-          </a:prstGeom>
-          <a:noFill/>
-          <a:ln/>
-        </p:spPr>
-        <p:txBody>
-          <a:bodyPr wrap="square" rtlCol="0" anchor="ctr"/>
-          <a:lstStyle/>
-          <a:p>
-            <a:pPr marL="0" indent="0">
-              <a:buNone/>
-            </a:pPr>
-            <a:r>
-              <a:rPr lang="en-US" sz="1000" b="1" kern="0" spc="200" dirty="0">
-                <a:solidFill>
-                  <a:srgbClr val="6E6389"/>
-                </a:solidFill>
-                <a:latin typeface="Calibri" pitchFamily="34" charset="0"/>
-                <a:ea typeface="Calibri" pitchFamily="34" charset="-122"/>
-                <a:cs typeface="Calibri" pitchFamily="34" charset="-120"/>
-              </a:rPr>
-              <a:t>THEN · 2025</a:t>
-            </a:r>
-            <a:endParaRPr lang="en-US" sz="1000" dirty="0"/>
-          </a:p>
-        </p:txBody>
-      </p:sp>
-      <p:sp>
-        <p:nvSpPr>
-          <p:cNvPr id="7" name="Text 4"/>
-          <p:cNvSpPr/>
-          <p:nvPr/>
-        </p:nvSpPr>
-        <p:spPr>
-          <a:xfrm>
-            <a:off x="658368" y="1810512"/>
-            <a:ext cx="3566160" cy="640080"/>
-          </a:xfrm>
-          <a:prstGeom prst="rect">
-            <a:avLst/>
-          </a:prstGeom>
-          <a:noFill/>
-          <a:ln/>
-        </p:spPr>
-        <p:txBody>
-          <a:bodyPr wrap="square" rtlCol="0" anchor="t"/>
-          <a:lstStyle/>
-          <a:p>
-            <a:pPr marL="0" indent="0">
-              <a:buNone/>
-            </a:pPr>
-            <a:r>
-              <a:rPr lang="en-US" sz="1150" dirty="0">
-                <a:solidFill>
-                  <a:srgbClr val="6E6389"/>
-                </a:solidFill>
-                <a:latin typeface="Calibri" pitchFamily="34" charset="0"/>
-                <a:ea typeface="Calibri" pitchFamily="34" charset="-122"/>
-                <a:cs typeface="Calibri" pitchFamily="34" charset="-120"/>
-              </a:rPr>
-              <a:t>Force a plan. Check the steps — right file, sane order. It often planned clumsily.</a:t>
-            </a:r>
-            <a:endParaRPr lang="en-US" sz="1150" dirty="0"/>
-          </a:p>
-        </p:txBody>
-      </p:sp>
-      <p:sp>
-        <p:nvSpPr>
-          <p:cNvPr id="8" name="Shape 5"/>
-          <p:cNvSpPr/>
-          <p:nvPr/>
-        </p:nvSpPr>
-        <p:spPr>
-          <a:xfrm>
-            <a:off x="4754880" y="1417320"/>
-            <a:ext cx="3931920" cy="1097280"/>
-          </a:xfrm>
-          <a:prstGeom prst="roundRect">
-            <a:avLst>
-              <a:gd name="adj" fmla="val 6667"/>
-            </a:avLst>
-          </a:prstGeom>
-          <a:solidFill>
-            <a:srgbClr val="2D1155"/>
-          </a:solidFill>
-          <a:ln w="19050">
-            <a:solidFill>
-              <a:srgbClr val="F59E0B"/>
-            </a:solidFill>
-            <a:prstDash val="solid"/>
-          </a:ln>
-        </p:spPr>
-        <p:txBody>
-          <a:bodyPr/>
-          <a:lstStyle/>
-          <a:p>
-            <a:endParaRPr lang="en-AU"/>
-          </a:p>
-        </p:txBody>
-      </p:sp>
-      <p:sp>
-        <p:nvSpPr>
-          <p:cNvPr id="9" name="Text 6"/>
-          <p:cNvSpPr/>
-          <p:nvPr/>
-        </p:nvSpPr>
-        <p:spPr>
-          <a:xfrm>
-            <a:off x="4956048" y="1536192"/>
-            <a:ext cx="3566160" cy="274320"/>
-          </a:xfrm>
-          <a:prstGeom prst="rect">
-            <a:avLst/>
-          </a:prstGeom>
-          <a:noFill/>
-          <a:ln/>
-        </p:spPr>
-        <p:txBody>
-          <a:bodyPr wrap="square" rtlCol="0" anchor="ctr"/>
-          <a:lstStyle/>
-          <a:p>
-            <a:pPr marL="0" indent="0">
-              <a:buNone/>
-            </a:pPr>
-            <a:r>
-              <a:rPr lang="en-US" sz="1000" b="1" kern="0" spc="200" dirty="0">
-                <a:solidFill>
-                  <a:srgbClr val="F59E0B"/>
-                </a:solidFill>
-                <a:latin typeface="Calibri" pitchFamily="34" charset="0"/>
-                <a:ea typeface="Calibri" pitchFamily="34" charset="-122"/>
-                <a:cs typeface="Calibri" pitchFamily="34" charset="-120"/>
-              </a:rPr>
-              <a:t>NOW · 2026</a:t>
-            </a:r>
-            <a:endParaRPr lang="en-US" sz="1000" dirty="0"/>
-          </a:p>
-        </p:txBody>
-      </p:sp>
-      <p:sp>
-        <p:nvSpPr>
-          <p:cNvPr id="10" name="Text 7"/>
-          <p:cNvSpPr/>
-          <p:nvPr/>
-        </p:nvSpPr>
-        <p:spPr>
-          <a:xfrm>
-            <a:off x="4956048" y="1810512"/>
-            <a:ext cx="3566160" cy="640080"/>
-          </a:xfrm>
-          <a:prstGeom prst="rect">
-            <a:avLst/>
-          </a:prstGeom>
-          <a:noFill/>
-          <a:ln/>
-        </p:spPr>
-        <p:txBody>
-          <a:bodyPr wrap="square" rtlCol="0" anchor="t"/>
-          <a:lstStyle/>
-          <a:p>
-            <a:pPr marL="0" indent="0">
-              <a:buNone/>
-            </a:pPr>
-            <a:r>
-              <a:rPr lang="en-US" sz="1150" dirty="0">
-                <a:solidFill>
-                  <a:srgbClr val="FFFFFF"/>
-                </a:solidFill>
-                <a:latin typeface="Calibri" pitchFamily="34" charset="0"/>
-                <a:ea typeface="Calibri" pitchFamily="34" charset="-122"/>
-                <a:cs typeface="Calibri" pitchFamily="34" charset="-120"/>
-              </a:rPr>
-              <a:t>Decomposition is solid. The risk flips: a clean, confident plan for slightly the wrong problem.</a:t>
-            </a:r>
-            <a:endParaRPr lang="en-US" sz="1150" dirty="0"/>
-          </a:p>
-        </p:txBody>
-      </p:sp>
-      <p:sp>
-        <p:nvSpPr>
-          <p:cNvPr id="11" name="Shape 8"/>
-          <p:cNvSpPr/>
-          <p:nvPr/>
-        </p:nvSpPr>
-        <p:spPr>
-          <a:xfrm>
-            <a:off x="457200" y="2697480"/>
-            <a:ext cx="8229600" cy="1371600"/>
-          </a:xfrm>
-          <a:prstGeom prst="roundRect">
-            <a:avLst>
-              <a:gd name="adj" fmla="val 5333"/>
-            </a:avLst>
-          </a:prstGeom>
-          <a:solidFill>
-            <a:srgbClr val="DDD6FE"/>
-          </a:solidFill>
-          <a:ln/>
-        </p:spPr>
-        <p:txBody>
-          <a:bodyPr/>
-          <a:lstStyle/>
-          <a:p>
-            <a:endParaRPr lang="en-AU"/>
-          </a:p>
-        </p:txBody>
-      </p:sp>
-      <p:sp>
-        <p:nvSpPr>
-          <p:cNvPr id="12" name="Text 9"/>
-          <p:cNvSpPr/>
-          <p:nvPr/>
-        </p:nvSpPr>
-        <p:spPr>
-          <a:xfrm>
-            <a:off x="731520" y="2816352"/>
-            <a:ext cx="7680960" cy="292608"/>
-          </a:xfrm>
-          <a:prstGeom prst="rect">
-            <a:avLst/>
-          </a:prstGeom>
-          <a:noFill/>
-          <a:ln/>
-        </p:spPr>
-        <p:txBody>
-          <a:bodyPr wrap="square" rtlCol="0" anchor="ctr"/>
-          <a:lstStyle/>
-          <a:p>
-            <a:pPr marL="0" indent="0">
-              <a:buNone/>
-            </a:pPr>
-            <a:r>
-              <a:rPr lang="en-US" sz="1250" b="1" dirty="0">
-                <a:solidFill>
-                  <a:srgbClr val="2D1155"/>
-                </a:solidFill>
-                <a:latin typeface="Calibri" pitchFamily="34" charset="0"/>
-                <a:ea typeface="Calibri" pitchFamily="34" charset="-122"/>
-                <a:cs typeface="Calibri" pitchFamily="34" charset="-120"/>
-              </a:rPr>
-              <a:t>So read for intent and scope, not mechanics:</a:t>
-            </a:r>
-            <a:endParaRPr lang="en-US" sz="1250" dirty="0"/>
-          </a:p>
-        </p:txBody>
-      </p:sp>
-      <p:sp>
-        <p:nvSpPr>
-          <p:cNvPr id="13" name="Text 10"/>
-          <p:cNvSpPr/>
-          <p:nvPr/>
-        </p:nvSpPr>
-        <p:spPr>
-          <a:xfrm>
-            <a:off x="731520" y="3127248"/>
-            <a:ext cx="7680960" cy="896112"/>
-          </a:xfrm>
-          <a:prstGeom prst="rect">
-            <a:avLst/>
-          </a:prstGeom>
-          <a:noFill/>
-          <a:ln/>
-        </p:spPr>
-        <p:txBody>
-          <a:bodyPr wrap="square" rtlCol="0" anchor="ctr"/>
-          <a:lstStyle/>
-          <a:p>
-            <a:pPr marL="152400" indent="-152400">
-              <a:spcAft>
-                <a:spcPts val="200"/>
-              </a:spcAft>
-              <a:buSzPct val="100000"/>
-              <a:buChar char="•"/>
-            </a:pPr>
-            <a:r>
-              <a:rPr lang="en-US" sz="1200" dirty="0">
-                <a:solidFill>
-                  <a:srgbClr val="2D1155"/>
-                </a:solidFill>
-                <a:latin typeface="Calibri" pitchFamily="34" charset="0"/>
-                <a:ea typeface="Calibri" pitchFamily="34" charset="-122"/>
-                <a:cs typeface="Calibri" pitchFamily="34" charset="-120"/>
-              </a:rPr>
-              <a:t>Did it understand the real goal, or a plausible lookalike?</a:t>
-            </a:r>
-            <a:endParaRPr lang="en-US" sz="1200" dirty="0"/>
-          </a:p>
-          <a:p>
-            <a:pPr marL="152400" indent="-152400">
-              <a:spcAft>
-                <a:spcPts val="200"/>
-              </a:spcAft>
-              <a:buSzPct val="100000"/>
-              <a:buChar char="•"/>
-            </a:pPr>
-            <a:r>
-              <a:rPr lang="en-US" sz="1200" dirty="0">
-                <a:solidFill>
-                  <a:srgbClr val="2D1155"/>
-                </a:solidFill>
-                <a:latin typeface="Calibri" pitchFamily="34" charset="0"/>
-                <a:ea typeface="Calibri" pitchFamily="34" charset="-122"/>
-                <a:cs typeface="Calibri" pitchFamily="34" charset="-120"/>
-              </a:rPr>
-              <a:t>Is it about to touch more than it should?</a:t>
-            </a:r>
-            <a:endParaRPr lang="en-US" sz="1200" dirty="0"/>
-          </a:p>
-          <a:p>
-            <a:pPr marL="152400" indent="-152400">
-              <a:spcAft>
-                <a:spcPts val="200"/>
-              </a:spcAft>
-              <a:buSzPct val="100000"/>
-              <a:buChar char="•"/>
-            </a:pPr>
-            <a:r>
-              <a:rPr lang="en-US" sz="1200" dirty="0">
-                <a:solidFill>
-                  <a:srgbClr val="2D1155"/>
-                </a:solidFill>
-                <a:latin typeface="Calibri" pitchFamily="34" charset="0"/>
-                <a:ea typeface="Calibri" pitchFamily="34" charset="-122"/>
-                <a:cs typeface="Calibri" pitchFamily="34" charset="-120"/>
-              </a:rPr>
-              <a:t>What did it assume that you never said?</a:t>
-            </a:r>
-            <a:endParaRPr lang="en-US" sz="1200" dirty="0"/>
-          </a:p>
-        </p:txBody>
-      </p:sp>
-      <p:sp>
-        <p:nvSpPr>
-          <p:cNvPr id="14" name="Text 11"/>
-          <p:cNvSpPr/>
-          <p:nvPr/>
-        </p:nvSpPr>
-        <p:spPr>
-          <a:xfrm>
-            <a:off x="457200" y="4206240"/>
-            <a:ext cx="8229600" cy="320040"/>
-          </a:xfrm>
-          <a:prstGeom prst="rect">
-            <a:avLst/>
-          </a:prstGeom>
-          <a:noFill/>
-          <a:ln/>
-        </p:spPr>
-        <p:txBody>
-          <a:bodyPr wrap="square" rtlCol="0" anchor="ctr"/>
-          <a:lstStyle/>
-          <a:p>
-            <a:pPr marL="0" indent="0">
-              <a:buNone/>
-            </a:pPr>
-            <a:r>
-              <a:rPr lang="en-US" sz="1200" dirty="0">
-                <a:solidFill>
-                  <a:srgbClr val="6E6389"/>
-                </a:solidFill>
-                <a:latin typeface="Calibri" pitchFamily="34" charset="0"/>
-                <a:ea typeface="Calibri" pitchFamily="34" charset="-122"/>
-                <a:cs typeface="Calibri" pitchFamily="34" charset="-120"/>
-              </a:rPr>
-              <a:t>Turn it on —  </a:t>
-            </a:r>
-            <a:r>
-              <a:rPr lang="en-US" sz="1200" b="1" dirty="0">
-                <a:solidFill>
-                  <a:srgbClr val="5B21B6"/>
-                </a:solidFill>
-                <a:latin typeface="Courier New" pitchFamily="34" charset="0"/>
-                <a:ea typeface="Courier New" pitchFamily="34" charset="-122"/>
-                <a:cs typeface="Courier New" pitchFamily="34" charset="-120"/>
-              </a:rPr>
-              <a:t>Claude Code: Shift+Tab</a:t>
-            </a:r>
-            <a:r>
-              <a:rPr lang="en-US" sz="1200" dirty="0">
-                <a:solidFill>
-                  <a:srgbClr val="DDD6FE"/>
-                </a:solidFill>
-                <a:latin typeface="Calibri" pitchFamily="34" charset="0"/>
-                <a:ea typeface="Calibri" pitchFamily="34" charset="-122"/>
-                <a:cs typeface="Calibri" pitchFamily="34" charset="-120"/>
-              </a:rPr>
-              <a:t>     ·     </a:t>
-            </a:r>
-            <a:r>
-              <a:rPr lang="en-US" sz="1200" b="1" dirty="0">
-                <a:solidFill>
-                  <a:srgbClr val="7C3AED"/>
-                </a:solidFill>
-                <a:latin typeface="Courier New" pitchFamily="34" charset="0"/>
-                <a:ea typeface="Courier New" pitchFamily="34" charset="-122"/>
-                <a:cs typeface="Courier New" pitchFamily="34" charset="-120"/>
-              </a:rPr>
-              <a:t>Codex: /plan</a:t>
-            </a:r>
-            <a:endParaRPr lang="en-US" sz="1200" dirty="0"/>
-          </a:p>
-        </p:txBody>
-      </p:sp>
-    </p:spTree>
-  </p:cSld>
-  <p:clrMapOvr>
-    <a:masterClrMapping/>
-  </p:clrMapOvr>
-</p:sld>
-</file>
-
-<file path=ppt/slides/slide9.xml><?xml version="1.0" encoding="utf-8"?>
-<p:sld xmlns:a="http://schemas.openxmlformats.org/drawingml/2006/main" xmlns:r="http://schemas.openxmlformats.org/officeDocument/2006/relationships" xmlns:p="http://schemas.openxmlformats.org/presentationml/2006/main">
-  <p:cSld name="Slide 10">
-    <p:bg>
-      <p:bgPr>
-        <a:solidFill>
-          <a:srgbClr val="F5F3FF"/>
-        </a:solidFill>
-        <a:effectLst/>
-      </p:bgPr>
-    </p:bg>
-    <p:spTree>
-      <p:nvGrpSpPr>
-        <p:cNvPr id="1" name=""/>
-        <p:cNvGrpSpPr/>
-        <p:nvPr/>
-      </p:nvGrpSpPr>
-      <p:grpSpPr>
-        <a:xfrm>
-          <a:off x="0" y="0"/>
-          <a:ext cx="0" cy="0"/>
-          <a:chOff x="0" y="0"/>
-          <a:chExt cx="0" cy="0"/>
-        </a:xfrm>
-      </p:grpSpPr>
-      <p:sp>
-        <p:nvSpPr>
-          <p:cNvPr id="2" name="Text 0"/>
-          <p:cNvSpPr/>
-          <p:nvPr/>
-        </p:nvSpPr>
-        <p:spPr>
-          <a:xfrm>
-            <a:off x="457200" y="292608"/>
-            <a:ext cx="8229600" cy="566928"/>
-          </a:xfrm>
-          <a:prstGeom prst="rect">
-            <a:avLst/>
-          </a:prstGeom>
-          <a:noFill/>
-          <a:ln/>
-        </p:spPr>
-        <p:txBody>
-          <a:bodyPr wrap="square" rtlCol="0" anchor="ctr"/>
-          <a:lstStyle/>
-          <a:p>
-            <a:pPr marL="0" indent="0" algn="l">
-              <a:buNone/>
-            </a:pPr>
-            <a:r>
-              <a:rPr lang="en-US" sz="2700" b="1" kern="0" spc="100" dirty="0">
-                <a:solidFill>
-                  <a:srgbClr val="2D1155"/>
-                </a:solidFill>
-                <a:latin typeface="Arial Black" pitchFamily="34" charset="0"/>
-                <a:ea typeface="Arial Black" pitchFamily="34" charset="-122"/>
-                <a:cs typeface="Arial Black" pitchFamily="34" charset="-120"/>
-              </a:rPr>
-              <a:t>THE COCKPIT</a:t>
-            </a:r>
-            <a:endParaRPr lang="en-US" sz="2700" dirty="0"/>
-          </a:p>
-        </p:txBody>
-      </p:sp>
-      <p:sp>
-        <p:nvSpPr>
-          <p:cNvPr id="3" name="Text 1"/>
-          <p:cNvSpPr/>
-          <p:nvPr/>
-        </p:nvSpPr>
-        <p:spPr>
-          <a:xfrm>
-            <a:off x="475488" y="896112"/>
-            <a:ext cx="8229600" cy="329184"/>
-          </a:xfrm>
-          <a:prstGeom prst="rect">
-            <a:avLst/>
-          </a:prstGeom>
-          <a:noFill/>
-          <a:ln/>
-        </p:spPr>
-        <p:txBody>
-          <a:bodyPr wrap="square" rtlCol="0" anchor="ctr"/>
-          <a:lstStyle/>
-          <a:p>
-            <a:pPr marL="0" indent="0">
-              <a:buNone/>
-            </a:pPr>
-            <a:r>
-              <a:rPr lang="en-US" sz="1300" i="1" dirty="0">
-                <a:solidFill>
-                  <a:srgbClr val="6E6389"/>
-                </a:solidFill>
-                <a:latin typeface="Calibri" pitchFamily="34" charset="0"/>
-                <a:ea typeface="Calibri" pitchFamily="34" charset="-122"/>
-                <a:cs typeface="Calibri" pitchFamily="34" charset="-120"/>
-              </a:rPr>
-              <a:t>Skill #3 — the handful of commands that put you in control.</a:t>
-            </a:r>
-            <a:endParaRPr lang="en-US" sz="1300" dirty="0"/>
-          </a:p>
-        </p:txBody>
-      </p:sp>
-      <p:pic>
-        <p:nvPicPr>
-          <p:cNvPr id="4" name="Image 0" descr="logo_icon.jpeg"/>
-          <p:cNvPicPr>
-            <a:picLocks noChangeAspect="1"/>
-          </p:cNvPicPr>
-          <p:nvPr/>
-        </p:nvPicPr>
-        <p:blipFill>
-          <a:blip r:embed="rId3"/>
-          <a:stretch>
-            <a:fillRect/>
-          </a:stretch>
-        </p:blipFill>
-        <p:spPr>
-          <a:xfrm>
-            <a:off x="8366760" y="4526280"/>
-            <a:ext cx="411480" cy="411480"/>
-          </a:xfrm>
-          <a:prstGeom prst="ellipse">
-            <a:avLst/>
-          </a:prstGeom>
-        </p:spPr>
-      </p:pic>
-      <p:sp>
-        <p:nvSpPr>
-          <p:cNvPr id="5" name="Text 2"/>
-          <p:cNvSpPr/>
-          <p:nvPr/>
-        </p:nvSpPr>
-        <p:spPr>
-          <a:xfrm>
-            <a:off x="640080" y="1481328"/>
-            <a:ext cx="2926080" cy="274320"/>
-          </a:xfrm>
-          <a:prstGeom prst="rect">
-            <a:avLst/>
-          </a:prstGeom>
-          <a:noFill/>
-          <a:ln/>
-        </p:spPr>
-        <p:txBody>
-          <a:bodyPr wrap="square" rtlCol="0" anchor="ctr"/>
-          <a:lstStyle/>
-          <a:p>
-            <a:pPr marL="0" indent="0">
-              <a:buNone/>
-            </a:pPr>
-            <a:r>
-              <a:rPr lang="en-US" sz="1000" b="1" kern="0" spc="100" dirty="0">
-                <a:solidFill>
-                  <a:srgbClr val="6E6389"/>
-                </a:solidFill>
-                <a:latin typeface="Calibri" pitchFamily="34" charset="0"/>
-                <a:ea typeface="Calibri" pitchFamily="34" charset="-122"/>
-                <a:cs typeface="Calibri" pitchFamily="34" charset="-120"/>
-              </a:rPr>
-              <a:t>WHAT YOU WANT</a:t>
-            </a:r>
-            <a:endParaRPr lang="en-US" sz="1000" dirty="0"/>
-          </a:p>
-        </p:txBody>
-      </p:sp>
-      <p:sp>
-        <p:nvSpPr>
-          <p:cNvPr id="6" name="Text 3"/>
-          <p:cNvSpPr/>
-          <p:nvPr/>
-        </p:nvSpPr>
-        <p:spPr>
-          <a:xfrm>
-            <a:off x="3749040" y="1481328"/>
-            <a:ext cx="2468880" cy="274320"/>
-          </a:xfrm>
-          <a:prstGeom prst="rect">
-            <a:avLst/>
-          </a:prstGeom>
-          <a:noFill/>
-          <a:ln/>
-        </p:spPr>
-        <p:txBody>
-          <a:bodyPr wrap="square" rtlCol="0" anchor="ctr"/>
-          <a:lstStyle/>
-          <a:p>
-            <a:pPr marL="0" indent="0">
-              <a:buNone/>
-            </a:pPr>
-            <a:r>
-              <a:rPr lang="en-US" sz="1000" b="1" kern="0" spc="100" dirty="0">
-                <a:solidFill>
-                  <a:srgbClr val="F59E0B"/>
-                </a:solidFill>
-                <a:latin typeface="Calibri" pitchFamily="34" charset="0"/>
-                <a:ea typeface="Calibri" pitchFamily="34" charset="-122"/>
-                <a:cs typeface="Calibri" pitchFamily="34" charset="-120"/>
-              </a:rPr>
-              <a:t>CLAUDE CODE</a:t>
-            </a:r>
-            <a:endParaRPr lang="en-US" sz="1000" dirty="0"/>
-          </a:p>
-        </p:txBody>
-      </p:sp>
-      <p:sp>
-        <p:nvSpPr>
-          <p:cNvPr id="7" name="Text 4"/>
-          <p:cNvSpPr/>
-          <p:nvPr/>
-        </p:nvSpPr>
-        <p:spPr>
-          <a:xfrm>
-            <a:off x="6355080" y="1481328"/>
-            <a:ext cx="2286000" cy="274320"/>
-          </a:xfrm>
-          <a:prstGeom prst="rect">
-            <a:avLst/>
-          </a:prstGeom>
-          <a:noFill/>
-          <a:ln/>
-        </p:spPr>
-        <p:txBody>
-          <a:bodyPr wrap="square" rtlCol="0" anchor="ctr"/>
-          <a:lstStyle/>
-          <a:p>
-            <a:pPr marL="0" indent="0">
-              <a:buNone/>
-            </a:pPr>
-            <a:r>
-              <a:rPr lang="en-US" sz="1000" b="1" kern="0" spc="100" dirty="0">
-                <a:solidFill>
-                  <a:srgbClr val="7C3AED"/>
-                </a:solidFill>
-                <a:latin typeface="Calibri" pitchFamily="34" charset="0"/>
-                <a:ea typeface="Calibri" pitchFamily="34" charset="-122"/>
-                <a:cs typeface="Calibri" pitchFamily="34" charset="-120"/>
-              </a:rPr>
-              <a:t>CODEX</a:t>
-            </a:r>
-            <a:endParaRPr lang="en-US" sz="1000" dirty="0"/>
-          </a:p>
-        </p:txBody>
-      </p:sp>
-      <p:sp>
-        <p:nvSpPr>
-          <p:cNvPr id="8" name="Shape 5"/>
-          <p:cNvSpPr/>
-          <p:nvPr/>
-        </p:nvSpPr>
-        <p:spPr>
-          <a:xfrm>
-            <a:off x="457200" y="1810512"/>
-            <a:ext cx="8229600" cy="603504"/>
-          </a:xfrm>
-          <a:prstGeom prst="rect">
-            <a:avLst/>
-          </a:prstGeom>
-          <a:solidFill>
-            <a:srgbClr val="DDD6FE"/>
-          </a:solidFill>
-          <a:ln/>
-        </p:spPr>
-        <p:txBody>
-          <a:bodyPr/>
-          <a:lstStyle/>
-          <a:p>
-            <a:endParaRPr lang="en-AU"/>
-          </a:p>
-        </p:txBody>
-      </p:sp>
-      <p:sp>
-        <p:nvSpPr>
-          <p:cNvPr id="9" name="Text 6"/>
-          <p:cNvSpPr/>
-          <p:nvPr/>
-        </p:nvSpPr>
-        <p:spPr>
-          <a:xfrm>
-            <a:off x="640080" y="1810512"/>
-            <a:ext cx="3017520" cy="603504"/>
-          </a:xfrm>
-          <a:prstGeom prst="rect">
-            <a:avLst/>
-          </a:prstGeom>
-          <a:noFill/>
-          <a:ln/>
-        </p:spPr>
-        <p:txBody>
-          <a:bodyPr wrap="square" rtlCol="0" anchor="ctr"/>
-          <a:lstStyle/>
-          <a:p>
-            <a:pPr marL="0" indent="0">
-              <a:buNone/>
-            </a:pPr>
-            <a:r>
-              <a:rPr lang="en-US" sz="1250" dirty="0">
-                <a:solidFill>
-                  <a:srgbClr val="2D1155"/>
-                </a:solidFill>
-                <a:latin typeface="Calibri" pitchFamily="34" charset="0"/>
-                <a:ea typeface="Calibri" pitchFamily="34" charset="-122"/>
-                <a:cs typeface="Calibri" pitchFamily="34" charset="-120"/>
-              </a:rPr>
-              <a:t>Check what it's carrying</a:t>
-            </a:r>
-            <a:endParaRPr lang="en-US" sz="1250" dirty="0"/>
-          </a:p>
-        </p:txBody>
-      </p:sp>
-      <p:sp>
-        <p:nvSpPr>
-          <p:cNvPr id="10" name="Text 7"/>
-          <p:cNvSpPr/>
-          <p:nvPr/>
-        </p:nvSpPr>
-        <p:spPr>
-          <a:xfrm>
-            <a:off x="3749040" y="1810512"/>
-            <a:ext cx="2560320" cy="603504"/>
-          </a:xfrm>
-          <a:prstGeom prst="rect">
-            <a:avLst/>
-          </a:prstGeom>
-          <a:noFill/>
-          <a:ln/>
-        </p:spPr>
-        <p:txBody>
-          <a:bodyPr wrap="square" rtlCol="0" anchor="ctr"/>
-          <a:lstStyle/>
-          <a:p>
-            <a:pPr marL="0" indent="0">
-              <a:buNone/>
-            </a:pPr>
-            <a:r>
-              <a:rPr lang="en-US" sz="1300" b="1" dirty="0">
-                <a:solidFill>
-                  <a:srgbClr val="5B21B6"/>
-                </a:solidFill>
-                <a:latin typeface="Courier New" pitchFamily="34" charset="0"/>
-                <a:ea typeface="Courier New" pitchFamily="34" charset="-122"/>
-                <a:cs typeface="Courier New" pitchFamily="34" charset="-120"/>
-              </a:rPr>
-              <a:t>/context</a:t>
-            </a:r>
-            <a:endParaRPr lang="en-US" sz="1300" dirty="0"/>
-          </a:p>
-        </p:txBody>
-      </p:sp>
-      <p:sp>
-        <p:nvSpPr>
-          <p:cNvPr id="11" name="Text 8"/>
-          <p:cNvSpPr/>
-          <p:nvPr/>
-        </p:nvSpPr>
-        <p:spPr>
-          <a:xfrm>
-            <a:off x="6355080" y="1810512"/>
-            <a:ext cx="2286000" cy="603504"/>
-          </a:xfrm>
-          <a:prstGeom prst="rect">
-            <a:avLst/>
-          </a:prstGeom>
-          <a:noFill/>
-          <a:ln/>
-        </p:spPr>
-        <p:txBody>
-          <a:bodyPr wrap="square" rtlCol="0" anchor="ctr"/>
-          <a:lstStyle/>
-          <a:p>
-            <a:pPr marL="0" indent="0">
-              <a:buNone/>
-            </a:pPr>
-            <a:r>
-              <a:rPr lang="en-US" sz="1300" b="1" dirty="0">
-                <a:solidFill>
-                  <a:srgbClr val="7C3AED"/>
-                </a:solidFill>
-                <a:latin typeface="Courier New" pitchFamily="34" charset="0"/>
-                <a:ea typeface="Courier New" pitchFamily="34" charset="-122"/>
-                <a:cs typeface="Courier New" pitchFamily="34" charset="-120"/>
-              </a:rPr>
-              <a:t>/status</a:t>
-            </a:r>
-            <a:endParaRPr lang="en-US" sz="1300" dirty="0"/>
-          </a:p>
-        </p:txBody>
-      </p:sp>
-      <p:sp>
-        <p:nvSpPr>
-          <p:cNvPr id="12" name="Shape 9"/>
-          <p:cNvSpPr/>
-          <p:nvPr/>
-        </p:nvSpPr>
-        <p:spPr>
-          <a:xfrm>
-            <a:off x="457200" y="2414016"/>
-            <a:ext cx="8229600" cy="603504"/>
-          </a:xfrm>
-          <a:prstGeom prst="rect">
-            <a:avLst/>
-          </a:prstGeom>
-          <a:solidFill>
-            <a:srgbClr val="FFFFFF"/>
-          </a:solidFill>
-          <a:ln/>
-        </p:spPr>
-        <p:txBody>
-          <a:bodyPr/>
-          <a:lstStyle/>
-          <a:p>
-            <a:endParaRPr lang="en-AU"/>
-          </a:p>
-        </p:txBody>
-      </p:sp>
-      <p:sp>
-        <p:nvSpPr>
-          <p:cNvPr id="13" name="Text 10"/>
-          <p:cNvSpPr/>
-          <p:nvPr/>
-        </p:nvSpPr>
-        <p:spPr>
-          <a:xfrm>
-            <a:off x="640080" y="2414016"/>
-            <a:ext cx="3017520" cy="603504"/>
-          </a:xfrm>
-          <a:prstGeom prst="rect">
-            <a:avLst/>
-          </a:prstGeom>
-          <a:noFill/>
-          <a:ln/>
-        </p:spPr>
-        <p:txBody>
-          <a:bodyPr wrap="square" rtlCol="0" anchor="ctr"/>
-          <a:lstStyle/>
-          <a:p>
-            <a:pPr marL="0" indent="0">
-              <a:buNone/>
-            </a:pPr>
-            <a:r>
-              <a:rPr lang="en-US" sz="1250" dirty="0">
-                <a:solidFill>
-                  <a:srgbClr val="2D1155"/>
-                </a:solidFill>
-                <a:latin typeface="Calibri" pitchFamily="34" charset="0"/>
-                <a:ea typeface="Calibri" pitchFamily="34" charset="-122"/>
-                <a:cs typeface="Calibri" pitchFamily="34" charset="-120"/>
-              </a:rPr>
-              <a:t>Pin a file into context</a:t>
-            </a:r>
-            <a:endParaRPr lang="en-US" sz="1250" dirty="0"/>
-          </a:p>
-        </p:txBody>
-      </p:sp>
-      <p:sp>
-        <p:nvSpPr>
-          <p:cNvPr id="14" name="Text 11"/>
-          <p:cNvSpPr/>
-          <p:nvPr/>
-        </p:nvSpPr>
-        <p:spPr>
-          <a:xfrm>
-            <a:off x="3749040" y="2414016"/>
-            <a:ext cx="2560320" cy="603504"/>
-          </a:xfrm>
-          <a:prstGeom prst="rect">
-            <a:avLst/>
-          </a:prstGeom>
-          <a:noFill/>
-          <a:ln/>
-        </p:spPr>
-        <p:txBody>
-          <a:bodyPr wrap="square" rtlCol="0" anchor="ctr"/>
-          <a:lstStyle/>
-          <a:p>
-            <a:pPr marL="0" indent="0">
-              <a:buNone/>
-            </a:pPr>
-            <a:r>
-              <a:rPr lang="en-US" sz="1300" b="1" dirty="0">
-                <a:solidFill>
-                  <a:srgbClr val="5B21B6"/>
-                </a:solidFill>
-                <a:latin typeface="Courier New" pitchFamily="34" charset="0"/>
-                <a:ea typeface="Courier New" pitchFamily="34" charset="-122"/>
-                <a:cs typeface="Courier New" pitchFamily="34" charset="-120"/>
-              </a:rPr>
-              <a:t>@path/to/file</a:t>
-            </a:r>
-            <a:endParaRPr lang="en-US" sz="1300" dirty="0"/>
-          </a:p>
-        </p:txBody>
-      </p:sp>
-      <p:sp>
-        <p:nvSpPr>
-          <p:cNvPr id="15" name="Text 12"/>
-          <p:cNvSpPr/>
-          <p:nvPr/>
-        </p:nvSpPr>
-        <p:spPr>
-          <a:xfrm>
-            <a:off x="6355080" y="2414016"/>
-            <a:ext cx="2286000" cy="603504"/>
-          </a:xfrm>
-          <a:prstGeom prst="rect">
-            <a:avLst/>
-          </a:prstGeom>
-          <a:noFill/>
-          <a:ln/>
-        </p:spPr>
-        <p:txBody>
-          <a:bodyPr wrap="square" rtlCol="0" anchor="ctr"/>
-          <a:lstStyle/>
-          <a:p>
-            <a:pPr marL="0" indent="0">
-              <a:buNone/>
-            </a:pPr>
-            <a:r>
-              <a:rPr lang="en-US" sz="1300" b="1" dirty="0">
-                <a:solidFill>
-                  <a:srgbClr val="7C3AED"/>
-                </a:solidFill>
-                <a:latin typeface="Courier New" pitchFamily="34" charset="0"/>
-                <a:ea typeface="Courier New" pitchFamily="34" charset="-122"/>
-                <a:cs typeface="Courier New" pitchFamily="34" charset="-120"/>
-              </a:rPr>
-              <a:t>@path/to/file</a:t>
-            </a:r>
-            <a:endParaRPr lang="en-US" sz="1300" dirty="0"/>
-          </a:p>
-        </p:txBody>
-      </p:sp>
-      <p:sp>
-        <p:nvSpPr>
-          <p:cNvPr id="16" name="Shape 13"/>
-          <p:cNvSpPr/>
-          <p:nvPr/>
-        </p:nvSpPr>
-        <p:spPr>
-          <a:xfrm>
-            <a:off x="457200" y="3017520"/>
-            <a:ext cx="8229600" cy="603504"/>
-          </a:xfrm>
-          <a:prstGeom prst="rect">
-            <a:avLst/>
-          </a:prstGeom>
-          <a:solidFill>
-            <a:srgbClr val="DDD6FE"/>
-          </a:solidFill>
-          <a:ln/>
-        </p:spPr>
-        <p:txBody>
-          <a:bodyPr/>
-          <a:lstStyle/>
-          <a:p>
-            <a:endParaRPr lang="en-AU"/>
-          </a:p>
-        </p:txBody>
-      </p:sp>
-      <p:sp>
-        <p:nvSpPr>
-          <p:cNvPr id="17" name="Text 14"/>
-          <p:cNvSpPr/>
-          <p:nvPr/>
-        </p:nvSpPr>
-        <p:spPr>
-          <a:xfrm>
-            <a:off x="640080" y="3017520"/>
-            <a:ext cx="3017520" cy="603504"/>
-          </a:xfrm>
-          <a:prstGeom prst="rect">
-            <a:avLst/>
-          </a:prstGeom>
-          <a:noFill/>
-          <a:ln/>
-        </p:spPr>
-        <p:txBody>
-          <a:bodyPr wrap="square" rtlCol="0" anchor="ctr"/>
-          <a:lstStyle/>
-          <a:p>
-            <a:pPr marL="0" indent="0">
-              <a:buNone/>
-            </a:pPr>
-            <a:r>
-              <a:rPr lang="en-US" sz="1250" dirty="0">
-                <a:solidFill>
-                  <a:srgbClr val="2D1155"/>
-                </a:solidFill>
-                <a:latin typeface="Calibri" pitchFamily="34" charset="0"/>
-                <a:ea typeface="Calibri" pitchFamily="34" charset="-122"/>
-                <a:cs typeface="Calibri" pitchFamily="34" charset="-120"/>
-              </a:rPr>
-              <a:t>Trim a bloated context</a:t>
-            </a:r>
-            <a:endParaRPr lang="en-US" sz="1250" dirty="0"/>
-          </a:p>
-        </p:txBody>
-      </p:sp>
-      <p:sp>
-        <p:nvSpPr>
-          <p:cNvPr id="18" name="Text 15"/>
-          <p:cNvSpPr/>
-          <p:nvPr/>
-        </p:nvSpPr>
-        <p:spPr>
-          <a:xfrm>
-            <a:off x="3749040" y="3017520"/>
-            <a:ext cx="2560320" cy="603504"/>
-          </a:xfrm>
-          <a:prstGeom prst="rect">
-            <a:avLst/>
-          </a:prstGeom>
-          <a:noFill/>
-          <a:ln/>
-        </p:spPr>
-        <p:txBody>
-          <a:bodyPr wrap="square" rtlCol="0" anchor="ctr"/>
-          <a:lstStyle/>
-          <a:p>
-            <a:pPr marL="0" indent="0">
-              <a:buNone/>
-            </a:pPr>
-            <a:r>
-              <a:rPr lang="en-US" sz="1300" b="1" dirty="0">
-                <a:solidFill>
-                  <a:srgbClr val="5B21B6"/>
-                </a:solidFill>
-                <a:latin typeface="Courier New" pitchFamily="34" charset="0"/>
-                <a:ea typeface="Courier New" pitchFamily="34" charset="-122"/>
-                <a:cs typeface="Courier New" pitchFamily="34" charset="-120"/>
-              </a:rPr>
-              <a:t>/compact</a:t>
-            </a:r>
-            <a:endParaRPr lang="en-US" sz="1300" dirty="0"/>
-          </a:p>
-        </p:txBody>
-      </p:sp>
-      <p:sp>
-        <p:nvSpPr>
-          <p:cNvPr id="19" name="Text 16"/>
-          <p:cNvSpPr/>
-          <p:nvPr/>
-        </p:nvSpPr>
-        <p:spPr>
-          <a:xfrm>
-            <a:off x="6355080" y="3017520"/>
-            <a:ext cx="2286000" cy="603504"/>
-          </a:xfrm>
-          <a:prstGeom prst="rect">
-            <a:avLst/>
-          </a:prstGeom>
-          <a:noFill/>
-          <a:ln/>
-        </p:spPr>
-        <p:txBody>
-          <a:bodyPr wrap="square" rtlCol="0" anchor="ctr"/>
-          <a:lstStyle/>
-          <a:p>
-            <a:pPr marL="0" indent="0">
-              <a:buNone/>
-            </a:pPr>
-            <a:r>
-              <a:rPr lang="en-US" sz="1300" b="1" dirty="0">
-                <a:solidFill>
-                  <a:srgbClr val="7C3AED"/>
-                </a:solidFill>
-                <a:latin typeface="Courier New" pitchFamily="34" charset="0"/>
-                <a:ea typeface="Courier New" pitchFamily="34" charset="-122"/>
-                <a:cs typeface="Courier New" pitchFamily="34" charset="-120"/>
-              </a:rPr>
-              <a:t>/compact</a:t>
-            </a:r>
-            <a:endParaRPr lang="en-US" sz="1300" dirty="0"/>
-          </a:p>
-        </p:txBody>
-      </p:sp>
-      <p:sp>
-        <p:nvSpPr>
-          <p:cNvPr id="20" name="Shape 17"/>
-          <p:cNvSpPr/>
-          <p:nvPr/>
-        </p:nvSpPr>
-        <p:spPr>
-          <a:xfrm>
-            <a:off x="457200" y="3621024"/>
-            <a:ext cx="8229600" cy="603504"/>
-          </a:xfrm>
-          <a:prstGeom prst="rect">
-            <a:avLst/>
-          </a:prstGeom>
-          <a:solidFill>
-            <a:srgbClr val="FFFFFF"/>
-          </a:solidFill>
-          <a:ln/>
-        </p:spPr>
-        <p:txBody>
-          <a:bodyPr/>
-          <a:lstStyle/>
-          <a:p>
-            <a:endParaRPr lang="en-AU"/>
-          </a:p>
-        </p:txBody>
-      </p:sp>
-      <p:sp>
-        <p:nvSpPr>
-          <p:cNvPr id="21" name="Text 18"/>
-          <p:cNvSpPr/>
-          <p:nvPr/>
-        </p:nvSpPr>
-        <p:spPr>
-          <a:xfrm>
-            <a:off x="640080" y="3621024"/>
-            <a:ext cx="3017520" cy="603504"/>
-          </a:xfrm>
-          <a:prstGeom prst="rect">
-            <a:avLst/>
-          </a:prstGeom>
-          <a:noFill/>
-          <a:ln/>
-        </p:spPr>
-        <p:txBody>
-          <a:bodyPr wrap="square" rtlCol="0" anchor="ctr"/>
-          <a:lstStyle/>
-          <a:p>
-            <a:pPr marL="0" indent="0">
-              <a:buNone/>
-            </a:pPr>
-            <a:r>
-              <a:rPr lang="en-US" sz="1250" dirty="0">
-                <a:solidFill>
-                  <a:srgbClr val="2D1155"/>
-                </a:solidFill>
-                <a:latin typeface="Calibri" pitchFamily="34" charset="0"/>
-                <a:ea typeface="Calibri" pitchFamily="34" charset="-122"/>
-                <a:cs typeface="Calibri" pitchFamily="34" charset="-120"/>
-              </a:rPr>
-              <a:t>Start fresh</a:t>
-            </a:r>
-            <a:endParaRPr lang="en-US" sz="1250" dirty="0"/>
-          </a:p>
-        </p:txBody>
-      </p:sp>
-      <p:sp>
-        <p:nvSpPr>
-          <p:cNvPr id="22" name="Text 19"/>
-          <p:cNvSpPr/>
-          <p:nvPr/>
-        </p:nvSpPr>
-        <p:spPr>
-          <a:xfrm>
-            <a:off x="3749040" y="3621024"/>
-            <a:ext cx="2560320" cy="603504"/>
-          </a:xfrm>
-          <a:prstGeom prst="rect">
-            <a:avLst/>
-          </a:prstGeom>
-          <a:noFill/>
-          <a:ln/>
-        </p:spPr>
-        <p:txBody>
-          <a:bodyPr wrap="square" rtlCol="0" anchor="ctr"/>
-          <a:lstStyle/>
-          <a:p>
-            <a:pPr marL="0" indent="0">
-              <a:buNone/>
-            </a:pPr>
-            <a:r>
-              <a:rPr lang="en-US" sz="1300" b="1" dirty="0">
-                <a:solidFill>
-                  <a:srgbClr val="5B21B6"/>
-                </a:solidFill>
-                <a:latin typeface="Courier New" pitchFamily="34" charset="0"/>
-                <a:ea typeface="Courier New" pitchFamily="34" charset="-122"/>
-                <a:cs typeface="Courier New" pitchFamily="34" charset="-120"/>
-              </a:rPr>
-              <a:t>/clear</a:t>
-            </a:r>
-            <a:endParaRPr lang="en-US" sz="1300" dirty="0"/>
-          </a:p>
-        </p:txBody>
-      </p:sp>
-      <p:sp>
-        <p:nvSpPr>
-          <p:cNvPr id="23" name="Text 20"/>
-          <p:cNvSpPr/>
-          <p:nvPr/>
-        </p:nvSpPr>
-        <p:spPr>
-          <a:xfrm>
-            <a:off x="6355080" y="3621024"/>
-            <a:ext cx="2286000" cy="603504"/>
-          </a:xfrm>
-          <a:prstGeom prst="rect">
-            <a:avLst/>
-          </a:prstGeom>
-          <a:noFill/>
-          <a:ln/>
-        </p:spPr>
-        <p:txBody>
-          <a:bodyPr wrap="square" rtlCol="0" anchor="ctr"/>
-          <a:lstStyle/>
-          <a:p>
-            <a:pPr marL="0" indent="0">
-              <a:buNone/>
-            </a:pPr>
-            <a:r>
-              <a:rPr lang="en-US" sz="1300" b="1" dirty="0">
-                <a:solidFill>
-                  <a:srgbClr val="7C3AED"/>
-                </a:solidFill>
-                <a:latin typeface="Courier New" pitchFamily="34" charset="0"/>
-                <a:ea typeface="Courier New" pitchFamily="34" charset="-122"/>
-                <a:cs typeface="Courier New" pitchFamily="34" charset="-120"/>
-              </a:rPr>
-              <a:t>new session</a:t>
-            </a:r>
-            <a:endParaRPr lang="en-US" sz="1300" dirty="0"/>
-          </a:p>
-        </p:txBody>
-      </p:sp>
-      <p:sp>
-        <p:nvSpPr>
-          <p:cNvPr id="24" name="Text 21"/>
-          <p:cNvSpPr/>
-          <p:nvPr/>
-        </p:nvSpPr>
-        <p:spPr>
-          <a:xfrm>
-            <a:off x="457200" y="4370832"/>
-            <a:ext cx="8229600" cy="320040"/>
-          </a:xfrm>
-          <a:prstGeom prst="rect">
-            <a:avLst/>
-          </a:prstGeom>
-          <a:noFill/>
-          <a:ln/>
-        </p:spPr>
-        <p:txBody>
-          <a:bodyPr wrap="square" rtlCol="0" anchor="ctr"/>
-          <a:lstStyle/>
-          <a:p>
-            <a:pPr marL="0" indent="0">
-              <a:buNone/>
-            </a:pPr>
-            <a:r>
-              <a:rPr lang="en-US" sz="1150" i="1" dirty="0">
-                <a:solidFill>
-                  <a:srgbClr val="6E6389"/>
-                </a:solidFill>
-                <a:latin typeface="Calibri" pitchFamily="34" charset="0"/>
-                <a:ea typeface="Calibri" pitchFamily="34" charset="-122"/>
-                <a:cs typeface="Calibri" pitchFamily="34" charset="-120"/>
-              </a:rPr>
-              <a:t>You don't need to memorise these — just know they exist and reach for them when answers go vague.</a:t>
-            </a:r>
-            <a:endParaRPr lang="en-US" sz="1150" dirty="0"/>
           </a:p>
         </p:txBody>
       </p:sp>
